--- a/slides/ARC3133_Class02.pptx
+++ b/slides/ARC3133_Class02.pptx
@@ -3178,7 +3178,7 @@
                 </a:solidFill>
                 <a:latin typeface="Arial"/>
               </a:rPr>
-              <a:t>CLASS 02  /  SEP 1  /  U02</a:t>
+              <a:t>CLASS 02  /  SEP 1</a:t>
             </a:r>
           </a:p>
         </p:txBody>
@@ -5700,7 +5700,7 @@
                 </a:solidFill>
                 <a:latin typeface="Calibri"/>
               </a:rPr>
-              <a:t>Keep going on P1a. It is due Week 4 — the sequence, the diagram and three variants.</a:t>
+              <a:t>Keep going on P1a. It is due Week 4 — eight or nine numbered diagrams, the last one developed in context, and the sequence written out as pseudocode.</a:t>
             </a:r>
           </a:p>
         </p:txBody>
@@ -6201,6 +6201,256 @@
                 <a:latin typeface="Calibri"/>
               </a:rPr>
               <a:t>The editable file, and one question about something in it that behaves oddly.</a:t>
+            </a:r>
+          </a:p>
+        </p:txBody>
+      </p:sp>
+      <p:sp>
+        <p:nvSpPr>
+          <p:cNvPr id="28" name="Rectangle 27"/>
+          <p:cNvSpPr/>
+          <p:nvPr/>
+        </p:nvSpPr>
+        <p:spPr>
+          <a:xfrm>
+            <a:off x="662940" y="6094476"/>
+            <a:ext cx="1508760" cy="804672"/>
+          </a:xfrm>
+          <a:prstGeom prst="rect">
+            <a:avLst/>
+          </a:prstGeom>
+          <a:solidFill>
+            <a:srgbClr val="000000"/>
+          </a:solidFill>
+          <a:ln w="6350">
+            <a:solidFill>
+              <a:srgbClr val="000000"/>
+            </a:solidFill>
+          </a:ln>
+          <a:effectLst/>
+        </p:spPr>
+        <p:style>
+          <a:lnRef idx="1">
+            <a:schemeClr val="accent1"/>
+          </a:lnRef>
+          <a:fillRef idx="3">
+            <a:schemeClr val="accent1"/>
+          </a:fillRef>
+          <a:effectRef idx="2">
+            <a:schemeClr val="accent1"/>
+          </a:effectRef>
+          <a:fontRef idx="minor">
+            <a:schemeClr val="lt1"/>
+          </a:fontRef>
+        </p:style>
+        <p:txBody>
+          <a:bodyPr rtlCol="0" anchor="ctr"/>
+          <a:lstStyle/>
+          <a:p/>
+        </p:txBody>
+      </p:sp>
+      <p:sp>
+        <p:nvSpPr>
+          <p:cNvPr id="29" name="Rectangle 28"/>
+          <p:cNvSpPr/>
+          <p:nvPr/>
+        </p:nvSpPr>
+        <p:spPr>
+          <a:xfrm>
+            <a:off x="594360" y="6025896"/>
+            <a:ext cx="1508760" cy="804672"/>
+          </a:xfrm>
+          <a:prstGeom prst="rect">
+            <a:avLst/>
+          </a:prstGeom>
+          <a:solidFill>
+            <a:srgbClr val="00D9E1"/>
+          </a:solidFill>
+          <a:ln w="34925">
+            <a:solidFill>
+              <a:srgbClr val="000000"/>
+            </a:solidFill>
+          </a:ln>
+          <a:effectLst/>
+        </p:spPr>
+        <p:style>
+          <a:lnRef idx="1">
+            <a:schemeClr val="accent1"/>
+          </a:lnRef>
+          <a:fillRef idx="3">
+            <a:schemeClr val="accent1"/>
+          </a:fillRef>
+          <a:effectRef idx="2">
+            <a:schemeClr val="accent1"/>
+          </a:effectRef>
+          <a:fontRef idx="minor">
+            <a:schemeClr val="lt1"/>
+          </a:fontRef>
+        </p:style>
+        <p:txBody>
+          <a:bodyPr rtlCol="0" anchor="ctr"/>
+          <a:lstStyle/>
+          <a:p/>
+        </p:txBody>
+      </p:sp>
+      <p:sp>
+        <p:nvSpPr>
+          <p:cNvPr id="30" name="TextBox 29"/>
+          <p:cNvSpPr txBox="1"/>
+          <p:nvPr/>
+        </p:nvSpPr>
+        <p:spPr>
+          <a:xfrm>
+            <a:off x="594360" y="6327648"/>
+            <a:ext cx="1508760" cy="274320"/>
+          </a:xfrm>
+          <a:prstGeom prst="rect">
+            <a:avLst/>
+          </a:prstGeom>
+          <a:noFill/>
+        </p:spPr>
+        <p:txBody>
+          <a:bodyPr wrap="square" lIns="0" rIns="0" tIns="0" bIns="0" anchor="t">
+            <a:spAutoFit/>
+          </a:bodyPr>
+          <a:lstStyle/>
+          <a:p>
+            <a:pPr algn="ctr"/>
+            <a:r>
+              <a:rPr sz="1400" b="1">
+                <a:solidFill>
+                  <a:srgbClr val="000000"/>
+                </a:solidFill>
+                <a:latin typeface="Arial"/>
+              </a:rPr>
+              <a:t>READ</a:t>
+            </a:r>
+          </a:p>
+        </p:txBody>
+      </p:sp>
+      <p:sp>
+        <p:nvSpPr>
+          <p:cNvPr id="31" name="Rectangle 30"/>
+          <p:cNvSpPr/>
+          <p:nvPr/>
+        </p:nvSpPr>
+        <p:spPr>
+          <a:xfrm>
+            <a:off x="2446020" y="6094476"/>
+            <a:ext cx="9189720" cy="804672"/>
+          </a:xfrm>
+          <a:prstGeom prst="rect">
+            <a:avLst/>
+          </a:prstGeom>
+          <a:solidFill>
+            <a:srgbClr val="000000"/>
+          </a:solidFill>
+          <a:ln w="6350">
+            <a:solidFill>
+              <a:srgbClr val="000000"/>
+            </a:solidFill>
+          </a:ln>
+          <a:effectLst/>
+        </p:spPr>
+        <p:style>
+          <a:lnRef idx="1">
+            <a:schemeClr val="accent1"/>
+          </a:lnRef>
+          <a:fillRef idx="3">
+            <a:schemeClr val="accent1"/>
+          </a:fillRef>
+          <a:effectRef idx="2">
+            <a:schemeClr val="accent1"/>
+          </a:effectRef>
+          <a:fontRef idx="minor">
+            <a:schemeClr val="lt1"/>
+          </a:fontRef>
+        </p:style>
+        <p:txBody>
+          <a:bodyPr rtlCol="0" anchor="ctr"/>
+          <a:lstStyle/>
+          <a:p/>
+        </p:txBody>
+      </p:sp>
+      <p:sp>
+        <p:nvSpPr>
+          <p:cNvPr id="32" name="Rectangle 31"/>
+          <p:cNvSpPr/>
+          <p:nvPr/>
+        </p:nvSpPr>
+        <p:spPr>
+          <a:xfrm>
+            <a:off x="2377440" y="6025896"/>
+            <a:ext cx="9189720" cy="804672"/>
+          </a:xfrm>
+          <a:prstGeom prst="rect">
+            <a:avLst/>
+          </a:prstGeom>
+          <a:solidFill>
+            <a:srgbClr val="FFFDF7"/>
+          </a:solidFill>
+          <a:ln w="34925">
+            <a:solidFill>
+              <a:srgbClr val="000000"/>
+            </a:solidFill>
+          </a:ln>
+          <a:effectLst/>
+        </p:spPr>
+        <p:style>
+          <a:lnRef idx="1">
+            <a:schemeClr val="accent1"/>
+          </a:lnRef>
+          <a:fillRef idx="3">
+            <a:schemeClr val="accent1"/>
+          </a:fillRef>
+          <a:effectRef idx="2">
+            <a:schemeClr val="accent1"/>
+          </a:effectRef>
+          <a:fontRef idx="minor">
+            <a:schemeClr val="lt1"/>
+          </a:fontRef>
+        </p:style>
+        <p:txBody>
+          <a:bodyPr rtlCol="0" anchor="ctr"/>
+          <a:lstStyle/>
+          <a:p/>
+        </p:txBody>
+      </p:sp>
+      <p:sp>
+        <p:nvSpPr>
+          <p:cNvPr id="33" name="TextBox 32"/>
+          <p:cNvSpPr txBox="1"/>
+          <p:nvPr/>
+        </p:nvSpPr>
+        <p:spPr>
+          <a:xfrm>
+            <a:off x="2651760" y="6144768"/>
+            <a:ext cx="8641080" cy="566928"/>
+          </a:xfrm>
+          <a:prstGeom prst="rect">
+            <a:avLst/>
+          </a:prstGeom>
+          <a:noFill/>
+        </p:spPr>
+        <p:txBody>
+          <a:bodyPr wrap="square" lIns="0" rIns="0" tIns="0" bIns="0" anchor="t">
+            <a:spAutoFit/>
+          </a:bodyPr>
+          <a:lstStyle/>
+          <a:p>
+            <a:pPr algn="l">
+              <a:lnSpc>
+                <a:spcPct val="120000"/>
+              </a:lnSpc>
+            </a:pPr>
+            <a:r>
+              <a:rPr sz="1350">
+                <a:solidFill>
+                  <a:srgbClr val="000000"/>
+                </a:solidFill>
+                <a:latin typeface="Calibri"/>
+              </a:rPr>
+              <a:t>Di Mari and Yoo, Operative Design, and Di Mari, Conditional Design. Find the spatial verb your own sequence performs, and name it on the sheet.</a:t>
             </a:r>
           </a:p>
         </p:txBody>
@@ -9267,7 +9517,7 @@
                 </a:solidFill>
                 <a:latin typeface="Calibri"/>
               </a:rPr>
-              <a:t>Reversing a subtraction is one of the three comparisons P1a asks for. Do it once deliberately and you will never confuse the operands again.</a:t>
+              <a:t>P1a asks for at least three Booleans, so one of them can be a reversed subtraction. Do it once deliberately and you will never confuse the operands again.</a:t>
             </a:r>
           </a:p>
         </p:txBody>
@@ -11548,7 +11798,7 @@
         <p:spPr>
           <a:xfrm>
             <a:off x="886968" y="2011680"/>
-            <a:ext cx="6400800" cy="274320"/>
+            <a:ext cx="6400800" cy="201705"/>
           </a:xfrm>
           <a:prstGeom prst="rect">
             <a:avLst/>
@@ -11569,7 +11819,7 @@
                 </a:solidFill>
                 <a:latin typeface="Courier New"/>
               </a:rPr>
-              <a:t>base  = box(6, 4, 3)</a:t>
+              <a:t># nine diagrams, one operation each, in this order</a:t>
             </a:r>
           </a:p>
         </p:txBody>
@@ -11582,8 +11832,8 @@
         </p:nvSpPr>
         <p:spPr>
           <a:xfrm>
-            <a:off x="886968" y="2286000"/>
-            <a:ext cx="6400800" cy="274320"/>
+            <a:off x="886968" y="2213385"/>
+            <a:ext cx="6400800" cy="201705"/>
           </a:xfrm>
           <a:prstGeom prst="rect">
             <a:avLst/>
@@ -11604,7 +11854,7 @@
                 </a:solidFill>
                 <a:latin typeface="Courier New"/>
               </a:rPr>
-              <a:t>tower = box(2, 2, 6)</a:t>
+              <a:t> </a:t>
             </a:r>
           </a:p>
         </p:txBody>
@@ -11617,8 +11867,8 @@
         </p:nvSpPr>
         <p:spPr>
           <a:xfrm>
-            <a:off x="886968" y="2560320"/>
-            <a:ext cx="6400800" cy="274320"/>
+            <a:off x="886968" y="2415091"/>
+            <a:ext cx="6400800" cy="201705"/>
           </a:xfrm>
           <a:prstGeom prst="rect">
             <a:avLst/>
@@ -11639,7 +11889,7 @@
                 </a:solidFill>
                 <a:latin typeface="Courier New"/>
               </a:rPr>
-              <a:t>tower = move(tower, 2, 0, 3)</a:t>
+              <a:t>box     = cube(1.0)                  # 1  primitive</a:t>
             </a:r>
           </a:p>
         </p:txBody>
@@ -11652,8 +11902,8 @@
         </p:nvSpPr>
         <p:spPr>
           <a:xfrm>
-            <a:off x="886968" y="2834639"/>
-            <a:ext cx="6400800" cy="274320"/>
+            <a:off x="886968" y="2616797"/>
+            <a:ext cx="6400800" cy="201705"/>
           </a:xfrm>
           <a:prstGeom prst="rect">
             <a:avLst/>
@@ -11674,7 +11924,7 @@
                 </a:solidFill>
                 <a:latin typeface="Courier New"/>
               </a:rPr>
-              <a:t> </a:t>
+              <a:t>ball    = sphere(r=0.65)             # 2  primitive</a:t>
             </a:r>
           </a:p>
         </p:txBody>
@@ -11687,8 +11937,8 @@
         </p:nvSpPr>
         <p:spPr>
           <a:xfrm>
-            <a:off x="886968" y="3108959"/>
-            <a:ext cx="6400800" cy="274320"/>
+            <a:off x="886968" y="2818503"/>
+            <a:ext cx="6400800" cy="201705"/>
           </a:xfrm>
           <a:prstGeom prst="rect">
             <a:avLst/>
@@ -11709,7 +11959,7 @@
                 </a:solidFill>
                 <a:latin typeface="Courier New"/>
               </a:rPr>
-              <a:t>void  = cylinder(r=1, h=5)</a:t>
+              <a:t>rod     = cylinder(r=0.30, h=2.0)    # 3  primitive</a:t>
             </a:r>
           </a:p>
         </p:txBody>
@@ -11722,8 +11972,8 @@
         </p:nvSpPr>
         <p:spPr>
           <a:xfrm>
-            <a:off x="886968" y="3383279"/>
-            <a:ext cx="6400800" cy="274320"/>
+            <a:off x="886968" y="3020209"/>
+            <a:ext cx="6400800" cy="201705"/>
           </a:xfrm>
           <a:prstGeom prst="rect">
             <a:avLst/>
@@ -11744,7 +11994,7 @@
                 </a:solidFill>
                 <a:latin typeface="Courier New"/>
               </a:rPr>
-              <a:t>void  = move(void, -1.5, 0, 0)</a:t>
+              <a:t> </a:t>
             </a:r>
           </a:p>
         </p:txBody>
@@ -11757,8 +12007,8 @@
         </p:nvSpPr>
         <p:spPr>
           <a:xfrm>
-            <a:off x="886968" y="3657599"/>
-            <a:ext cx="6400800" cy="274320"/>
+            <a:off x="886968" y="3221915"/>
+            <a:ext cx="6400800" cy="201705"/>
           </a:xfrm>
           <a:prstGeom prst="rect">
             <a:avLst/>
@@ -11779,7 +12029,7 @@
                 </a:solidFill>
                 <a:latin typeface="Courier New"/>
               </a:rPr>
-              <a:t> </a:t>
+              <a:t>ball    = scale(ball, 1.15)          # 4  scale</a:t>
             </a:r>
           </a:p>
         </p:txBody>
@@ -11792,8 +12042,8 @@
         </p:nvSpPr>
         <p:spPr>
           <a:xfrm>
-            <a:off x="886968" y="3931919"/>
-            <a:ext cx="6400800" cy="274320"/>
+            <a:off x="886968" y="3423621"/>
+            <a:ext cx="6400800" cy="201705"/>
           </a:xfrm>
           <a:prstGeom prst="rect">
             <a:avLst/>
@@ -11814,7 +12064,7 @@
                 </a:solidFill>
                 <a:latin typeface="Courier New"/>
               </a:rPr>
-              <a:t>mass   = union(base, tower)</a:t>
+              <a:t>ball    = translate(ball, z=0.15)    # 5  translate</a:t>
             </a:r>
           </a:p>
         </p:txBody>
@@ -11827,8 +12077,8 @@
         </p:nvSpPr>
         <p:spPr>
           <a:xfrm>
-            <a:off x="886968" y="4206239"/>
-            <a:ext cx="6400800" cy="274320"/>
+            <a:off x="886968" y="3625327"/>
+            <a:ext cx="6400800" cy="201705"/>
           </a:xfrm>
           <a:prstGeom prst="rect">
             <a:avLst/>
@@ -11849,14 +12099,294 @@
                 </a:solidFill>
                 <a:latin typeface="Courier New"/>
               </a:rPr>
-              <a:t>result = difference(mass, void)    # not difference(void, mass)</a:t>
-            </a:r>
-          </a:p>
-        </p:txBody>
-      </p:sp>
-      <p:sp>
-        <p:nvSpPr>
-          <p:cNvPr id="16" name="Rectangle 15"/>
+              <a:t>rod_y   = rotate(rod, x=90)          # 6  rotate - degrees</a:t>
+            </a:r>
+          </a:p>
+        </p:txBody>
+      </p:sp>
+      <p:sp>
+        <p:nvSpPr>
+          <p:cNvPr id="16" name="TextBox 15"/>
+          <p:cNvSpPr txBox="1"/>
+          <p:nvPr/>
+        </p:nvSpPr>
+        <p:spPr>
+          <a:xfrm>
+            <a:off x="886968" y="3827032"/>
+            <a:ext cx="6400800" cy="201705"/>
+          </a:xfrm>
+          <a:prstGeom prst="rect">
+            <a:avLst/>
+          </a:prstGeom>
+          <a:noFill/>
+        </p:spPr>
+        <p:txBody>
+          <a:bodyPr wrap="square" lIns="0" rIns="0" tIns="0" bIns="0" anchor="t">
+            <a:spAutoFit/>
+          </a:bodyPr>
+          <a:lstStyle/>
+          <a:p>
+            <a:pPr algn="l"/>
+            <a:r>
+              <a:rPr sz="1250">
+                <a:solidFill>
+                  <a:srgbClr val="000000"/>
+                </a:solidFill>
+                <a:latin typeface="Courier New"/>
+              </a:rPr>
+              <a:t>rod_x   = rotate(rod, y=90)          # 6  same operation</a:t>
+            </a:r>
+          </a:p>
+        </p:txBody>
+      </p:sp>
+      <p:sp>
+        <p:nvSpPr>
+          <p:cNvPr id="17" name="TextBox 16"/>
+          <p:cNvSpPr txBox="1"/>
+          <p:nvPr/>
+        </p:nvSpPr>
+        <p:spPr>
+          <a:xfrm>
+            <a:off x="886968" y="4028738"/>
+            <a:ext cx="6400800" cy="201705"/>
+          </a:xfrm>
+          <a:prstGeom prst="rect">
+            <a:avLst/>
+          </a:prstGeom>
+          <a:noFill/>
+        </p:spPr>
+        <p:txBody>
+          <a:bodyPr wrap="square" lIns="0" rIns="0" tIns="0" bIns="0" anchor="t">
+            <a:spAutoFit/>
+          </a:bodyPr>
+          <a:lstStyle/>
+          <a:p>
+            <a:pPr algn="l"/>
+            <a:r>
+              <a:rPr sz="1250">
+                <a:solidFill>
+                  <a:srgbClr val="000000"/>
+                </a:solidFill>
+                <a:latin typeface="Courier New"/>
+              </a:rPr>
+              <a:t> </a:t>
+            </a:r>
+          </a:p>
+        </p:txBody>
+      </p:sp>
+      <p:sp>
+        <p:nvSpPr>
+          <p:cNvPr id="18" name="TextBox 17"/>
+          <p:cNvSpPr txBox="1"/>
+          <p:nvPr/>
+        </p:nvSpPr>
+        <p:spPr>
+          <a:xfrm>
+            <a:off x="886968" y="4230444"/>
+            <a:ext cx="6400800" cy="201705"/>
+          </a:xfrm>
+          <a:prstGeom prst="rect">
+            <a:avLst/>
+          </a:prstGeom>
+          <a:noFill/>
+        </p:spPr>
+        <p:txBody>
+          <a:bodyPr wrap="square" lIns="0" rIns="0" tIns="0" bIns="0" anchor="t">
+            <a:spAutoFit/>
+          </a:bodyPr>
+          <a:lstStyle/>
+          <a:p>
+            <a:pPr algn="l"/>
+            <a:r>
+              <a:rPr sz="1250">
+                <a:solidFill>
+                  <a:srgbClr val="000000"/>
+                </a:solidFill>
+                <a:latin typeface="Courier New"/>
+              </a:rPr>
+              <a:t>solid   = intersection(box, ball)    # 7  intersection</a:t>
+            </a:r>
+          </a:p>
+        </p:txBody>
+      </p:sp>
+      <p:sp>
+        <p:nvSpPr>
+          <p:cNvPr id="19" name="TextBox 18"/>
+          <p:cNvSpPr txBox="1"/>
+          <p:nvPr/>
+        </p:nvSpPr>
+        <p:spPr>
+          <a:xfrm>
+            <a:off x="886968" y="4432150"/>
+            <a:ext cx="6400800" cy="201705"/>
+          </a:xfrm>
+          <a:prstGeom prst="rect">
+            <a:avLst/>
+          </a:prstGeom>
+          <a:noFill/>
+        </p:spPr>
+        <p:txBody>
+          <a:bodyPr wrap="square" lIns="0" rIns="0" tIns="0" bIns="0" anchor="t">
+            <a:spAutoFit/>
+          </a:bodyPr>
+          <a:lstStyle/>
+          <a:p>
+            <a:pPr algn="l"/>
+            <a:r>
+              <a:rPr sz="1250">
+                <a:solidFill>
+                  <a:srgbClr val="000000"/>
+                </a:solidFill>
+                <a:latin typeface="Courier New"/>
+              </a:rPr>
+              <a:t>cutters = union(rod, rod_y, rod_x)   # 8  union</a:t>
+            </a:r>
+          </a:p>
+        </p:txBody>
+      </p:sp>
+      <p:sp>
+        <p:nvSpPr>
+          <p:cNvPr id="20" name="TextBox 19"/>
+          <p:cNvSpPr txBox="1"/>
+          <p:nvPr/>
+        </p:nvSpPr>
+        <p:spPr>
+          <a:xfrm>
+            <a:off x="886968" y="4633856"/>
+            <a:ext cx="6400800" cy="201705"/>
+          </a:xfrm>
+          <a:prstGeom prst="rect">
+            <a:avLst/>
+          </a:prstGeom>
+          <a:noFill/>
+        </p:spPr>
+        <p:txBody>
+          <a:bodyPr wrap="square" lIns="0" rIns="0" tIns="0" bIns="0" anchor="t">
+            <a:spAutoFit/>
+          </a:bodyPr>
+          <a:lstStyle/>
+          <a:p>
+            <a:pPr algn="l"/>
+            <a:r>
+              <a:rPr sz="1250">
+                <a:solidFill>
+                  <a:srgbClr val="000000"/>
+                </a:solidFill>
+                <a:latin typeface="Courier New"/>
+              </a:rPr>
+              <a:t>result  = difference(solid, cutters) # 9  difference</a:t>
+            </a:r>
+          </a:p>
+        </p:txBody>
+      </p:sp>
+      <p:sp>
+        <p:nvSpPr>
+          <p:cNvPr id="21" name="TextBox 20"/>
+          <p:cNvSpPr txBox="1"/>
+          <p:nvPr/>
+        </p:nvSpPr>
+        <p:spPr>
+          <a:xfrm>
+            <a:off x="886968" y="4835562"/>
+            <a:ext cx="6400800" cy="201705"/>
+          </a:xfrm>
+          <a:prstGeom prst="rect">
+            <a:avLst/>
+          </a:prstGeom>
+          <a:noFill/>
+        </p:spPr>
+        <p:txBody>
+          <a:bodyPr wrap="square" lIns="0" rIns="0" tIns="0" bIns="0" anchor="t">
+            <a:spAutoFit/>
+          </a:bodyPr>
+          <a:lstStyle/>
+          <a:p>
+            <a:pPr algn="l"/>
+            <a:r>
+              <a:rPr sz="1250">
+                <a:solidFill>
+                  <a:srgbClr val="000000"/>
+                </a:solidFill>
+                <a:latin typeface="Courier New"/>
+              </a:rPr>
+              <a:t> </a:t>
+            </a:r>
+          </a:p>
+        </p:txBody>
+      </p:sp>
+      <p:sp>
+        <p:nvSpPr>
+          <p:cNvPr id="22" name="TextBox 21"/>
+          <p:cNvSpPr txBox="1"/>
+          <p:nvPr/>
+        </p:nvSpPr>
+        <p:spPr>
+          <a:xfrm>
+            <a:off x="886968" y="5037268"/>
+            <a:ext cx="6400800" cy="201705"/>
+          </a:xfrm>
+          <a:prstGeom prst="rect">
+            <a:avLst/>
+          </a:prstGeom>
+          <a:noFill/>
+        </p:spPr>
+        <p:txBody>
+          <a:bodyPr wrap="square" lIns="0" rIns="0" tIns="0" bIns="0" anchor="t">
+            <a:spAutoFit/>
+          </a:bodyPr>
+          <a:lstStyle/>
+          <a:p>
+            <a:pPr algn="l"/>
+            <a:r>
+              <a:rPr sz="1250">
+                <a:solidFill>
+                  <a:srgbClr val="000000"/>
+                </a:solidFill>
+                <a:latin typeface="Courier New"/>
+              </a:rPr>
+              <a:t># 9 keeps solid, removes cutters. draw 9 again at</a:t>
+            </a:r>
+          </a:p>
+        </p:txBody>
+      </p:sp>
+      <p:sp>
+        <p:nvSpPr>
+          <p:cNvPr id="23" name="TextBox 22"/>
+          <p:cNvSpPr txBox="1"/>
+          <p:nvPr/>
+        </p:nvSpPr>
+        <p:spPr>
+          <a:xfrm>
+            <a:off x="886968" y="5238974"/>
+            <a:ext cx="6400800" cy="201705"/>
+          </a:xfrm>
+          <a:prstGeom prst="rect">
+            <a:avLst/>
+          </a:prstGeom>
+          <a:noFill/>
+        </p:spPr>
+        <p:txBody>
+          <a:bodyPr wrap="square" lIns="0" rIns="0" tIns="0" bIns="0" anchor="t">
+            <a:spAutoFit/>
+          </a:bodyPr>
+          <a:lstStyle/>
+          <a:p>
+            <a:pPr algn="l"/>
+            <a:r>
+              <a:rPr sz="1250">
+                <a:solidFill>
+                  <a:srgbClr val="000000"/>
+                </a:solidFill>
+                <a:latin typeface="Courier New"/>
+              </a:rPr>
+              <a:t># building scale: a figure, planting, ground, shadow.</a:t>
+            </a:r>
+          </a:p>
+        </p:txBody>
+      </p:sp>
+      <p:sp>
+        <p:nvSpPr>
+          <p:cNvPr id="24" name="Rectangle 23"/>
           <p:cNvSpPr/>
           <p:nvPr/>
         </p:nvSpPr>
@@ -11900,7 +12430,7 @@
       </p:sp>
       <p:sp>
         <p:nvSpPr>
-          <p:cNvPr id="17" name="Rectangle 16"/>
+          <p:cNvPr id="25" name="Rectangle 24"/>
           <p:cNvSpPr/>
           <p:nvPr/>
         </p:nvSpPr>
@@ -11944,7 +12474,7 @@
       </p:sp>
       <p:sp>
         <p:nvSpPr>
-          <p:cNvPr id="18" name="Rectangle 17"/>
+          <p:cNvPr id="26" name="Rectangle 25"/>
           <p:cNvSpPr/>
           <p:nvPr/>
         </p:nvSpPr>
@@ -11988,7 +12518,7 @@
       </p:sp>
       <p:sp>
         <p:nvSpPr>
-          <p:cNvPr id="19" name="TextBox 18"/>
+          <p:cNvPr id="27" name="TextBox 26"/>
           <p:cNvSpPr txBox="1"/>
           <p:nvPr/>
         </p:nvSpPr>
@@ -12023,7 +12553,7 @@
       </p:sp>
       <p:sp>
         <p:nvSpPr>
-          <p:cNvPr id="20" name="TextBox 19"/>
+          <p:cNvPr id="28" name="TextBox 27"/>
           <p:cNvSpPr txBox="1"/>
           <p:nvPr/>
         </p:nvSpPr>
@@ -12174,7 +12704,7 @@
       </p:sp>
       <p:sp>
         <p:nvSpPr>
-          <p:cNvPr id="21" name="Rectangle 20"/>
+          <p:cNvPr id="29" name="Rectangle 28"/>
           <p:cNvSpPr/>
           <p:nvPr/>
         </p:nvSpPr>
@@ -12218,7 +12748,7 @@
       </p:sp>
       <p:sp>
         <p:nvSpPr>
-          <p:cNvPr id="22" name="Rectangle 21"/>
+          <p:cNvPr id="30" name="Rectangle 29"/>
           <p:cNvSpPr/>
           <p:nvPr/>
         </p:nvSpPr>
@@ -12262,7 +12792,7 @@
       </p:sp>
       <p:sp>
         <p:nvSpPr>
-          <p:cNvPr id="23" name="TextBox 22"/>
+          <p:cNvPr id="31" name="TextBox 30"/>
           <p:cNvSpPr txBox="1"/>
           <p:nvPr/>
         </p:nvSpPr>
@@ -12592,7 +13122,7 @@
                 </a:solidFill>
                 <a:latin typeface="Calibri"/>
               </a:rPr>
-              <a:t>Build a parametric massing study, reconstruct its cutter from basic geometry, and develop a small printable variant.  This first milestone is the massing study: an ordered sequence of primitives and Booleans, diagrammed so another person could follow it.</a:t>
+              <a:t>Build a parametric massing study, then build a repeating panel from its own points and faces and develop a small printable variant of it.  This first milestone is the massing study: an ordered sequence of primitives and Booleans, diagrammed so another person could follow it.</a:t>
             </a:r>
           </a:p>
         </p:txBody>
@@ -12877,7 +13407,7 @@
                 </a:solidFill>
                 <a:latin typeface="Calibri"/>
               </a:rPr>
-              <a:t>Primitives, transformed and combined in a stated order.</a:t>
+              <a:t>Three primitives, three transformations, three Booleans, in a stated order.</a:t>
             </a:r>
           </a:p>
         </p:txBody>
@@ -13123,7 +13653,7 @@
                 </a:solidFill>
                 <a:latin typeface="Arial"/>
               </a:rPr>
-              <a:t>THE DIAGRAM</a:t>
+              <a:t>THE DIAGRAMS</a:t>
             </a:r>
           </a:p>
         </p:txBody>
@@ -13162,7 +13692,7 @@
                 </a:solidFill>
                 <a:latin typeface="Calibri"/>
               </a:rPr>
-              <a:t>One drawing per operation, plus a final axonometric.</a:t>
+              <a:t>Eight or nine, numbered. One operation each, read left to right.</a:t>
             </a:r>
           </a:p>
         </p:txBody>
@@ -13408,7 +13938,7 @@
                 </a:solidFill>
                 <a:latin typeface="Arial"/>
               </a:rPr>
-              <a:t>THE VARIANTS</a:t>
+              <a:t>THE LAST ONE</a:t>
             </a:r>
           </a:p>
         </p:txBody>
@@ -13447,7 +13977,7 @@
                 </a:solidFill>
                 <a:latin typeface="Calibri"/>
               </a:rPr>
-              <a:t>Three parameter settings off the same graph.</a:t>
+              <a:t>Drawn, not diagrammed: building scale, a figure, planting, ground, shadow.</a:t>
             </a:r>
           </a:p>
         </p:txBody>
@@ -13601,7 +14131,7 @@
         <p:spPr>
           <a:xfrm>
             <a:off x="662940" y="1851660"/>
-            <a:ext cx="777240" cy="960120"/>
+            <a:ext cx="777240" cy="579120"/>
           </a:xfrm>
           <a:prstGeom prst="rect">
             <a:avLst/>
@@ -13645,7 +14175,7 @@
         <p:spPr>
           <a:xfrm>
             <a:off x="594360" y="1783080"/>
-            <a:ext cx="777240" cy="960120"/>
+            <a:ext cx="777240" cy="579120"/>
           </a:xfrm>
           <a:prstGeom prst="rect">
             <a:avLst/>
@@ -13688,7 +14218,7 @@
         </p:nvSpPr>
         <p:spPr>
           <a:xfrm>
-            <a:off x="594360" y="2162556"/>
+            <a:off x="594360" y="1972056"/>
             <a:ext cx="777240" cy="274320"/>
           </a:xfrm>
           <a:prstGeom prst="rect">
@@ -13724,7 +14254,7 @@
         <p:spPr>
           <a:xfrm>
             <a:off x="1714499" y="1851660"/>
-            <a:ext cx="9921240" cy="960120"/>
+            <a:ext cx="9921240" cy="579120"/>
           </a:xfrm>
           <a:prstGeom prst="rect">
             <a:avLst/>
@@ -13768,7 +14298,7 @@
         <p:spPr>
           <a:xfrm>
             <a:off x="1645919" y="1783080"/>
-            <a:ext cx="9921240" cy="960120"/>
+            <a:ext cx="9921240" cy="579120"/>
           </a:xfrm>
           <a:prstGeom prst="rect">
             <a:avLst/>
@@ -13812,7 +14342,7 @@
         <p:spPr>
           <a:xfrm>
             <a:off x="1920240" y="1874519"/>
-            <a:ext cx="9372600" cy="777240"/>
+            <a:ext cx="9372600" cy="396239"/>
           </a:xfrm>
           <a:prstGeom prst="rect">
             <a:avLst/>
@@ -13831,13 +14361,13 @@
               </a:lnSpc>
             </a:pPr>
             <a:r>
-              <a:rPr sz="1300">
+              <a:rPr sz="1200">
                 <a:solidFill>
                   <a:srgbClr val="000000"/>
                 </a:solidFill>
                 <a:latin typeface="Calibri"/>
               </a:rPr>
-              <a:t>One 17 × 11 inch sheet with the ordered transformation/Boolean diagram, a final axonometric and three parameter variants.</a:t>
+              <a:t>One 17 × 11 inch sheet carrying an ordered sequence of eight or nine numbered diagrams: one operation per diagram, read in order, each showing what the one before it produced.</a:t>
             </a:r>
           </a:p>
         </p:txBody>
@@ -13850,8 +14380,8 @@
         </p:nvSpPr>
         <p:spPr>
           <a:xfrm>
-            <a:off x="662940" y="2958084"/>
-            <a:ext cx="777240" cy="960120"/>
+            <a:off x="662940" y="2577084"/>
+            <a:ext cx="777240" cy="579120"/>
           </a:xfrm>
           <a:prstGeom prst="rect">
             <a:avLst/>
@@ -13894,8 +14424,8 @@
         </p:nvSpPr>
         <p:spPr>
           <a:xfrm>
-            <a:off x="594360" y="2889504"/>
-            <a:ext cx="777240" cy="960120"/>
+            <a:off x="594360" y="2508504"/>
+            <a:ext cx="777240" cy="579120"/>
           </a:xfrm>
           <a:prstGeom prst="rect">
             <a:avLst/>
@@ -13938,7 +14468,7 @@
         </p:nvSpPr>
         <p:spPr>
           <a:xfrm>
-            <a:off x="594360" y="3268980"/>
+            <a:off x="594360" y="2697479"/>
             <a:ext cx="777240" cy="274320"/>
           </a:xfrm>
           <a:prstGeom prst="rect">
@@ -13973,8 +14503,8 @@
         </p:nvSpPr>
         <p:spPr>
           <a:xfrm>
-            <a:off x="1714499" y="2958084"/>
-            <a:ext cx="9921240" cy="960120"/>
+            <a:off x="1714499" y="2577084"/>
+            <a:ext cx="9921240" cy="579120"/>
           </a:xfrm>
           <a:prstGeom prst="rect">
             <a:avLst/>
@@ -14017,8 +14547,8 @@
         </p:nvSpPr>
         <p:spPr>
           <a:xfrm>
-            <a:off x="1645919" y="2889504"/>
-            <a:ext cx="9921240" cy="960120"/>
+            <a:off x="1645919" y="2508504"/>
+            <a:ext cx="9921240" cy="579120"/>
           </a:xfrm>
           <a:prstGeom prst="rect">
             <a:avLst/>
@@ -14061,8 +14591,8 @@
         </p:nvSpPr>
         <p:spPr>
           <a:xfrm>
-            <a:off x="1920240" y="2980944"/>
-            <a:ext cx="9372600" cy="777240"/>
+            <a:off x="1920240" y="2599944"/>
+            <a:ext cx="9372600" cy="396239"/>
           </a:xfrm>
           <a:prstGeom prst="rect">
             <a:avLst/>
@@ -14081,13 +14611,13 @@
               </a:lnSpc>
             </a:pPr>
             <a:r>
-              <a:rPr sz="1300">
+              <a:rPr sz="1200">
                 <a:solidFill>
                   <a:srgbClr val="000000"/>
                 </a:solidFill>
                 <a:latin typeface="Calibri"/>
               </a:rPr>
-              <a:t>Demonstrate translation, rotation and scale, and compare union, difference and intersection. Clearly identify the operands of subtraction.</a:t>
+              <a:t>Use at least three primitives, at least three transformations covering translate, rotate and scale, and at least three Boolean operations covering union, difference and intersection. Name the operands of every subtraction — which solid is kept and which is removed.</a:t>
             </a:r>
           </a:p>
         </p:txBody>
@@ -14100,8 +14630,8 @@
         </p:nvSpPr>
         <p:spPr>
           <a:xfrm>
-            <a:off x="662940" y="4064508"/>
-            <a:ext cx="777240" cy="960120"/>
+            <a:off x="662940" y="3302508"/>
+            <a:ext cx="777240" cy="579120"/>
           </a:xfrm>
           <a:prstGeom prst="rect">
             <a:avLst/>
@@ -14144,8 +14674,8 @@
         </p:nvSpPr>
         <p:spPr>
           <a:xfrm>
-            <a:off x="594360" y="3995928"/>
-            <a:ext cx="777240" cy="960120"/>
+            <a:off x="594360" y="3233928"/>
+            <a:ext cx="777240" cy="579120"/>
           </a:xfrm>
           <a:prstGeom prst="rect">
             <a:avLst/>
@@ -14188,7 +14718,7 @@
         </p:nvSpPr>
         <p:spPr>
           <a:xfrm>
-            <a:off x="594360" y="4375404"/>
+            <a:off x="594360" y="3422904"/>
             <a:ext cx="777240" cy="274320"/>
           </a:xfrm>
           <a:prstGeom prst="rect">
@@ -14223,8 +14753,8 @@
         </p:nvSpPr>
         <p:spPr>
           <a:xfrm>
-            <a:off x="1714499" y="4064508"/>
-            <a:ext cx="9921240" cy="960120"/>
+            <a:off x="1714499" y="3302508"/>
+            <a:ext cx="9921240" cy="579120"/>
           </a:xfrm>
           <a:prstGeom prst="rect">
             <a:avLst/>
@@ -14267,8 +14797,8 @@
         </p:nvSpPr>
         <p:spPr>
           <a:xfrm>
-            <a:off x="1645919" y="3995928"/>
-            <a:ext cx="9921240" cy="960120"/>
+            <a:off x="1645919" y="3233928"/>
+            <a:ext cx="9921240" cy="579120"/>
           </a:xfrm>
           <a:prstGeom prst="rect">
             <a:avLst/>
@@ -14311,8 +14841,8 @@
         </p:nvSpPr>
         <p:spPr>
           <a:xfrm>
-            <a:off x="1920240" y="4087368"/>
-            <a:ext cx="9372600" cy="777240"/>
+            <a:off x="1920240" y="3325368"/>
+            <a:ext cx="9372600" cy="396239"/>
           </a:xfrm>
           <a:prstGeom prst="rect">
             <a:avLst/>
@@ -14331,7 +14861,757 @@
               </a:lnSpc>
             </a:pPr>
             <a:r>
-              <a:rPr sz="1300">
+              <a:rPr sz="1200">
+                <a:solidFill>
+                  <a:srgbClr val="000000"/>
+                </a:solidFill>
+                <a:latin typeface="Calibri"/>
+              </a:rPr>
+              <a:t>Develop the last diagram as a drawing rather than a diagram: the final solid at building scale, with a 1.75 m human figure, vegetation, ground and shadow, so the sequence ends in something readable as architecture.</a:t>
+            </a:r>
+          </a:p>
+        </p:txBody>
+      </p:sp>
+      <p:sp>
+        <p:nvSpPr>
+          <p:cNvPr id="23" name="Rectangle 22"/>
+          <p:cNvSpPr/>
+          <p:nvPr/>
+        </p:nvSpPr>
+        <p:spPr>
+          <a:xfrm>
+            <a:off x="662940" y="4027932"/>
+            <a:ext cx="777240" cy="579120"/>
+          </a:xfrm>
+          <a:prstGeom prst="rect">
+            <a:avLst/>
+          </a:prstGeom>
+          <a:solidFill>
+            <a:srgbClr val="000000"/>
+          </a:solidFill>
+          <a:ln w="6350">
+            <a:solidFill>
+              <a:srgbClr val="000000"/>
+            </a:solidFill>
+          </a:ln>
+          <a:effectLst/>
+        </p:spPr>
+        <p:style>
+          <a:lnRef idx="1">
+            <a:schemeClr val="accent1"/>
+          </a:lnRef>
+          <a:fillRef idx="3">
+            <a:schemeClr val="accent1"/>
+          </a:fillRef>
+          <a:effectRef idx="2">
+            <a:schemeClr val="accent1"/>
+          </a:effectRef>
+          <a:fontRef idx="minor">
+            <a:schemeClr val="lt1"/>
+          </a:fontRef>
+        </p:style>
+        <p:txBody>
+          <a:bodyPr rtlCol="0" anchor="ctr"/>
+          <a:lstStyle/>
+          <a:p/>
+        </p:txBody>
+      </p:sp>
+      <p:sp>
+        <p:nvSpPr>
+          <p:cNvPr id="24" name="Rectangle 23"/>
+          <p:cNvSpPr/>
+          <p:nvPr/>
+        </p:nvSpPr>
+        <p:spPr>
+          <a:xfrm>
+            <a:off x="594360" y="3959352"/>
+            <a:ext cx="777240" cy="579120"/>
+          </a:xfrm>
+          <a:prstGeom prst="rect">
+            <a:avLst/>
+          </a:prstGeom>
+          <a:solidFill>
+            <a:srgbClr val="FF4D8D"/>
+          </a:solidFill>
+          <a:ln w="34925">
+            <a:solidFill>
+              <a:srgbClr val="000000"/>
+            </a:solidFill>
+          </a:ln>
+          <a:effectLst/>
+        </p:spPr>
+        <p:style>
+          <a:lnRef idx="1">
+            <a:schemeClr val="accent1"/>
+          </a:lnRef>
+          <a:fillRef idx="3">
+            <a:schemeClr val="accent1"/>
+          </a:fillRef>
+          <a:effectRef idx="2">
+            <a:schemeClr val="accent1"/>
+          </a:effectRef>
+          <a:fontRef idx="minor">
+            <a:schemeClr val="lt1"/>
+          </a:fontRef>
+        </p:style>
+        <p:txBody>
+          <a:bodyPr rtlCol="0" anchor="ctr"/>
+          <a:lstStyle/>
+          <a:p/>
+        </p:txBody>
+      </p:sp>
+      <p:sp>
+        <p:nvSpPr>
+          <p:cNvPr id="25" name="TextBox 24"/>
+          <p:cNvSpPr txBox="1"/>
+          <p:nvPr/>
+        </p:nvSpPr>
+        <p:spPr>
+          <a:xfrm>
+            <a:off x="594360" y="4148328"/>
+            <a:ext cx="777240" cy="274320"/>
+          </a:xfrm>
+          <a:prstGeom prst="rect">
+            <a:avLst/>
+          </a:prstGeom>
+          <a:noFill/>
+        </p:spPr>
+        <p:txBody>
+          <a:bodyPr wrap="square" lIns="0" rIns="0" tIns="0" bIns="0" anchor="t">
+            <a:spAutoFit/>
+          </a:bodyPr>
+          <a:lstStyle/>
+          <a:p>
+            <a:pPr algn="ctr"/>
+            <a:r>
+              <a:rPr sz="1500" b="1">
+                <a:solidFill>
+                  <a:srgbClr val="000000"/>
+                </a:solidFill>
+                <a:latin typeface="Arial"/>
+              </a:rPr>
+              <a:t>04</a:t>
+            </a:r>
+          </a:p>
+        </p:txBody>
+      </p:sp>
+      <p:sp>
+        <p:nvSpPr>
+          <p:cNvPr id="26" name="Rectangle 25"/>
+          <p:cNvSpPr/>
+          <p:nvPr/>
+        </p:nvSpPr>
+        <p:spPr>
+          <a:xfrm>
+            <a:off x="1714499" y="4027932"/>
+            <a:ext cx="9921240" cy="579120"/>
+          </a:xfrm>
+          <a:prstGeom prst="rect">
+            <a:avLst/>
+          </a:prstGeom>
+          <a:solidFill>
+            <a:srgbClr val="000000"/>
+          </a:solidFill>
+          <a:ln w="6350">
+            <a:solidFill>
+              <a:srgbClr val="000000"/>
+            </a:solidFill>
+          </a:ln>
+          <a:effectLst/>
+        </p:spPr>
+        <p:style>
+          <a:lnRef idx="1">
+            <a:schemeClr val="accent1"/>
+          </a:lnRef>
+          <a:fillRef idx="3">
+            <a:schemeClr val="accent1"/>
+          </a:fillRef>
+          <a:effectRef idx="2">
+            <a:schemeClr val="accent1"/>
+          </a:effectRef>
+          <a:fontRef idx="minor">
+            <a:schemeClr val="lt1"/>
+          </a:fontRef>
+        </p:style>
+        <p:txBody>
+          <a:bodyPr rtlCol="0" anchor="ctr"/>
+          <a:lstStyle/>
+          <a:p/>
+        </p:txBody>
+      </p:sp>
+      <p:sp>
+        <p:nvSpPr>
+          <p:cNvPr id="27" name="Rectangle 26"/>
+          <p:cNvSpPr/>
+          <p:nvPr/>
+        </p:nvSpPr>
+        <p:spPr>
+          <a:xfrm>
+            <a:off x="1645919" y="3959352"/>
+            <a:ext cx="9921240" cy="579120"/>
+          </a:xfrm>
+          <a:prstGeom prst="rect">
+            <a:avLst/>
+          </a:prstGeom>
+          <a:solidFill>
+            <a:srgbClr val="FFFDF7"/>
+          </a:solidFill>
+          <a:ln w="34925">
+            <a:solidFill>
+              <a:srgbClr val="000000"/>
+            </a:solidFill>
+          </a:ln>
+          <a:effectLst/>
+        </p:spPr>
+        <p:style>
+          <a:lnRef idx="1">
+            <a:schemeClr val="accent1"/>
+          </a:lnRef>
+          <a:fillRef idx="3">
+            <a:schemeClr val="accent1"/>
+          </a:fillRef>
+          <a:effectRef idx="2">
+            <a:schemeClr val="accent1"/>
+          </a:effectRef>
+          <a:fontRef idx="minor">
+            <a:schemeClr val="lt1"/>
+          </a:fontRef>
+        </p:style>
+        <p:txBody>
+          <a:bodyPr rtlCol="0" anchor="ctr"/>
+          <a:lstStyle/>
+          <a:p/>
+        </p:txBody>
+      </p:sp>
+      <p:sp>
+        <p:nvSpPr>
+          <p:cNvPr id="28" name="TextBox 27"/>
+          <p:cNvSpPr txBox="1"/>
+          <p:nvPr/>
+        </p:nvSpPr>
+        <p:spPr>
+          <a:xfrm>
+            <a:off x="1920240" y="4050791"/>
+            <a:ext cx="9372600" cy="396239"/>
+          </a:xfrm>
+          <a:prstGeom prst="rect">
+            <a:avLst/>
+          </a:prstGeom>
+          <a:noFill/>
+        </p:spPr>
+        <p:txBody>
+          <a:bodyPr wrap="square" lIns="0" rIns="0" tIns="0" bIns="0" anchor="ctr">
+            <a:spAutoFit/>
+          </a:bodyPr>
+          <a:lstStyle/>
+          <a:p>
+            <a:pPr algn="l">
+              <a:lnSpc>
+                <a:spcPct val="125000"/>
+              </a:lnSpc>
+            </a:pPr>
+            <a:r>
+              <a:rPr sz="1200">
+                <a:solidFill>
+                  <a:srgbClr val="000000"/>
+                </a:solidFill>
+                <a:latin typeface="Calibri"/>
+              </a:rPr>
+              <a:t>Write the sequence out as pseudocode beside the diagrams — one line per operation, in the same order as the diagrams, with the parameters you exposed.</a:t>
+            </a:r>
+          </a:p>
+        </p:txBody>
+      </p:sp>
+      <p:sp>
+        <p:nvSpPr>
+          <p:cNvPr id="29" name="Rectangle 28"/>
+          <p:cNvSpPr/>
+          <p:nvPr/>
+        </p:nvSpPr>
+        <p:spPr>
+          <a:xfrm>
+            <a:off x="662940" y="4753356"/>
+            <a:ext cx="777240" cy="579120"/>
+          </a:xfrm>
+          <a:prstGeom prst="rect">
+            <a:avLst/>
+          </a:prstGeom>
+          <a:solidFill>
+            <a:srgbClr val="000000"/>
+          </a:solidFill>
+          <a:ln w="6350">
+            <a:solidFill>
+              <a:srgbClr val="000000"/>
+            </a:solidFill>
+          </a:ln>
+          <a:effectLst/>
+        </p:spPr>
+        <p:style>
+          <a:lnRef idx="1">
+            <a:schemeClr val="accent1"/>
+          </a:lnRef>
+          <a:fillRef idx="3">
+            <a:schemeClr val="accent1"/>
+          </a:fillRef>
+          <a:effectRef idx="2">
+            <a:schemeClr val="accent1"/>
+          </a:effectRef>
+          <a:fontRef idx="minor">
+            <a:schemeClr val="lt1"/>
+          </a:fontRef>
+        </p:style>
+        <p:txBody>
+          <a:bodyPr rtlCol="0" anchor="ctr"/>
+          <a:lstStyle/>
+          <a:p/>
+        </p:txBody>
+      </p:sp>
+      <p:sp>
+        <p:nvSpPr>
+          <p:cNvPr id="30" name="Rectangle 29"/>
+          <p:cNvSpPr/>
+          <p:nvPr/>
+        </p:nvSpPr>
+        <p:spPr>
+          <a:xfrm>
+            <a:off x="594360" y="4684776"/>
+            <a:ext cx="777240" cy="579120"/>
+          </a:xfrm>
+          <a:prstGeom prst="rect">
+            <a:avLst/>
+          </a:prstGeom>
+          <a:solidFill>
+            <a:srgbClr val="00D9E1"/>
+          </a:solidFill>
+          <a:ln w="34925">
+            <a:solidFill>
+              <a:srgbClr val="000000"/>
+            </a:solidFill>
+          </a:ln>
+          <a:effectLst/>
+        </p:spPr>
+        <p:style>
+          <a:lnRef idx="1">
+            <a:schemeClr val="accent1"/>
+          </a:lnRef>
+          <a:fillRef idx="3">
+            <a:schemeClr val="accent1"/>
+          </a:fillRef>
+          <a:effectRef idx="2">
+            <a:schemeClr val="accent1"/>
+          </a:effectRef>
+          <a:fontRef idx="minor">
+            <a:schemeClr val="lt1"/>
+          </a:fontRef>
+        </p:style>
+        <p:txBody>
+          <a:bodyPr rtlCol="0" anchor="ctr"/>
+          <a:lstStyle/>
+          <a:p/>
+        </p:txBody>
+      </p:sp>
+      <p:sp>
+        <p:nvSpPr>
+          <p:cNvPr id="31" name="TextBox 30"/>
+          <p:cNvSpPr txBox="1"/>
+          <p:nvPr/>
+        </p:nvSpPr>
+        <p:spPr>
+          <a:xfrm>
+            <a:off x="594360" y="4873752"/>
+            <a:ext cx="777240" cy="274320"/>
+          </a:xfrm>
+          <a:prstGeom prst="rect">
+            <a:avLst/>
+          </a:prstGeom>
+          <a:noFill/>
+        </p:spPr>
+        <p:txBody>
+          <a:bodyPr wrap="square" lIns="0" rIns="0" tIns="0" bIns="0" anchor="t">
+            <a:spAutoFit/>
+          </a:bodyPr>
+          <a:lstStyle/>
+          <a:p>
+            <a:pPr algn="ctr"/>
+            <a:r>
+              <a:rPr sz="1500" b="1">
+                <a:solidFill>
+                  <a:srgbClr val="000000"/>
+                </a:solidFill>
+                <a:latin typeface="Arial"/>
+              </a:rPr>
+              <a:t>05</a:t>
+            </a:r>
+          </a:p>
+        </p:txBody>
+      </p:sp>
+      <p:sp>
+        <p:nvSpPr>
+          <p:cNvPr id="32" name="Rectangle 31"/>
+          <p:cNvSpPr/>
+          <p:nvPr/>
+        </p:nvSpPr>
+        <p:spPr>
+          <a:xfrm>
+            <a:off x="1714499" y="4753356"/>
+            <a:ext cx="9921240" cy="579120"/>
+          </a:xfrm>
+          <a:prstGeom prst="rect">
+            <a:avLst/>
+          </a:prstGeom>
+          <a:solidFill>
+            <a:srgbClr val="000000"/>
+          </a:solidFill>
+          <a:ln w="6350">
+            <a:solidFill>
+              <a:srgbClr val="000000"/>
+            </a:solidFill>
+          </a:ln>
+          <a:effectLst/>
+        </p:spPr>
+        <p:style>
+          <a:lnRef idx="1">
+            <a:schemeClr val="accent1"/>
+          </a:lnRef>
+          <a:fillRef idx="3">
+            <a:schemeClr val="accent1"/>
+          </a:fillRef>
+          <a:effectRef idx="2">
+            <a:schemeClr val="accent1"/>
+          </a:effectRef>
+          <a:fontRef idx="minor">
+            <a:schemeClr val="lt1"/>
+          </a:fontRef>
+        </p:style>
+        <p:txBody>
+          <a:bodyPr rtlCol="0" anchor="ctr"/>
+          <a:lstStyle/>
+          <a:p/>
+        </p:txBody>
+      </p:sp>
+      <p:sp>
+        <p:nvSpPr>
+          <p:cNvPr id="33" name="Rectangle 32"/>
+          <p:cNvSpPr/>
+          <p:nvPr/>
+        </p:nvSpPr>
+        <p:spPr>
+          <a:xfrm>
+            <a:off x="1645919" y="4684776"/>
+            <a:ext cx="9921240" cy="579120"/>
+          </a:xfrm>
+          <a:prstGeom prst="rect">
+            <a:avLst/>
+          </a:prstGeom>
+          <a:solidFill>
+            <a:srgbClr val="FFFDF7"/>
+          </a:solidFill>
+          <a:ln w="34925">
+            <a:solidFill>
+              <a:srgbClr val="000000"/>
+            </a:solidFill>
+          </a:ln>
+          <a:effectLst/>
+        </p:spPr>
+        <p:style>
+          <a:lnRef idx="1">
+            <a:schemeClr val="accent1"/>
+          </a:lnRef>
+          <a:fillRef idx="3">
+            <a:schemeClr val="accent1"/>
+          </a:fillRef>
+          <a:effectRef idx="2">
+            <a:schemeClr val="accent1"/>
+          </a:effectRef>
+          <a:fontRef idx="minor">
+            <a:schemeClr val="lt1"/>
+          </a:fontRef>
+        </p:style>
+        <p:txBody>
+          <a:bodyPr rtlCol="0" anchor="ctr"/>
+          <a:lstStyle/>
+          <a:p/>
+        </p:txBody>
+      </p:sp>
+      <p:sp>
+        <p:nvSpPr>
+          <p:cNvPr id="34" name="TextBox 33"/>
+          <p:cNvSpPr txBox="1"/>
+          <p:nvPr/>
+        </p:nvSpPr>
+        <p:spPr>
+          <a:xfrm>
+            <a:off x="1920240" y="4776215"/>
+            <a:ext cx="9372600" cy="396239"/>
+          </a:xfrm>
+          <a:prstGeom prst="rect">
+            <a:avLst/>
+          </a:prstGeom>
+          <a:noFill/>
+        </p:spPr>
+        <p:txBody>
+          <a:bodyPr wrap="square" lIns="0" rIns="0" tIns="0" bIns="0" anchor="ctr">
+            <a:spAutoFit/>
+          </a:bodyPr>
+          <a:lstStyle/>
+          <a:p>
+            <a:pPr algn="l">
+              <a:lnSpc>
+                <a:spcPct val="125000"/>
+              </a:lnSpc>
+            </a:pPr>
+            <a:r>
+              <a:rPr sz="1200">
+                <a:solidFill>
+                  <a:srgbClr val="000000"/>
+                </a:solidFill>
+                <a:latin typeface="Calibri"/>
+              </a:rPr>
+              <a:t>Read the spatial operations in Di Mari and Yoo, Operative Design, and Di Mari, Conditional Design, and state which operation your sequence performs in their terms.</a:t>
+            </a:r>
+          </a:p>
+        </p:txBody>
+      </p:sp>
+      <p:sp>
+        <p:nvSpPr>
+          <p:cNvPr id="35" name="Rectangle 34"/>
+          <p:cNvSpPr/>
+          <p:nvPr/>
+        </p:nvSpPr>
+        <p:spPr>
+          <a:xfrm>
+            <a:off x="662940" y="5478780"/>
+            <a:ext cx="777240" cy="579120"/>
+          </a:xfrm>
+          <a:prstGeom prst="rect">
+            <a:avLst/>
+          </a:prstGeom>
+          <a:solidFill>
+            <a:srgbClr val="000000"/>
+          </a:solidFill>
+          <a:ln w="6350">
+            <a:solidFill>
+              <a:srgbClr val="000000"/>
+            </a:solidFill>
+          </a:ln>
+          <a:effectLst/>
+        </p:spPr>
+        <p:style>
+          <a:lnRef idx="1">
+            <a:schemeClr val="accent1"/>
+          </a:lnRef>
+          <a:fillRef idx="3">
+            <a:schemeClr val="accent1"/>
+          </a:fillRef>
+          <a:effectRef idx="2">
+            <a:schemeClr val="accent1"/>
+          </a:effectRef>
+          <a:fontRef idx="minor">
+            <a:schemeClr val="lt1"/>
+          </a:fontRef>
+        </p:style>
+        <p:txBody>
+          <a:bodyPr rtlCol="0" anchor="ctr"/>
+          <a:lstStyle/>
+          <a:p/>
+        </p:txBody>
+      </p:sp>
+      <p:sp>
+        <p:nvSpPr>
+          <p:cNvPr id="36" name="Rectangle 35"/>
+          <p:cNvSpPr/>
+          <p:nvPr/>
+        </p:nvSpPr>
+        <p:spPr>
+          <a:xfrm>
+            <a:off x="594360" y="5410199"/>
+            <a:ext cx="777240" cy="579120"/>
+          </a:xfrm>
+          <a:prstGeom prst="rect">
+            <a:avLst/>
+          </a:prstGeom>
+          <a:solidFill>
+            <a:srgbClr val="C6F035"/>
+          </a:solidFill>
+          <a:ln w="34925">
+            <a:solidFill>
+              <a:srgbClr val="000000"/>
+            </a:solidFill>
+          </a:ln>
+          <a:effectLst/>
+        </p:spPr>
+        <p:style>
+          <a:lnRef idx="1">
+            <a:schemeClr val="accent1"/>
+          </a:lnRef>
+          <a:fillRef idx="3">
+            <a:schemeClr val="accent1"/>
+          </a:fillRef>
+          <a:effectRef idx="2">
+            <a:schemeClr val="accent1"/>
+          </a:effectRef>
+          <a:fontRef idx="minor">
+            <a:schemeClr val="lt1"/>
+          </a:fontRef>
+        </p:style>
+        <p:txBody>
+          <a:bodyPr rtlCol="0" anchor="ctr"/>
+          <a:lstStyle/>
+          <a:p/>
+        </p:txBody>
+      </p:sp>
+      <p:sp>
+        <p:nvSpPr>
+          <p:cNvPr id="37" name="TextBox 36"/>
+          <p:cNvSpPr txBox="1"/>
+          <p:nvPr/>
+        </p:nvSpPr>
+        <p:spPr>
+          <a:xfrm>
+            <a:off x="594360" y="5599176"/>
+            <a:ext cx="777240" cy="274320"/>
+          </a:xfrm>
+          <a:prstGeom prst="rect">
+            <a:avLst/>
+          </a:prstGeom>
+          <a:noFill/>
+        </p:spPr>
+        <p:txBody>
+          <a:bodyPr wrap="square" lIns="0" rIns="0" tIns="0" bIns="0" anchor="t">
+            <a:spAutoFit/>
+          </a:bodyPr>
+          <a:lstStyle/>
+          <a:p>
+            <a:pPr algn="ctr"/>
+            <a:r>
+              <a:rPr sz="1500" b="1">
+                <a:solidFill>
+                  <a:srgbClr val="000000"/>
+                </a:solidFill>
+                <a:latin typeface="Arial"/>
+              </a:rPr>
+              <a:t>06</a:t>
+            </a:r>
+          </a:p>
+        </p:txBody>
+      </p:sp>
+      <p:sp>
+        <p:nvSpPr>
+          <p:cNvPr id="38" name="Rectangle 37"/>
+          <p:cNvSpPr/>
+          <p:nvPr/>
+        </p:nvSpPr>
+        <p:spPr>
+          <a:xfrm>
+            <a:off x="1714499" y="5478780"/>
+            <a:ext cx="9921240" cy="579120"/>
+          </a:xfrm>
+          <a:prstGeom prst="rect">
+            <a:avLst/>
+          </a:prstGeom>
+          <a:solidFill>
+            <a:srgbClr val="000000"/>
+          </a:solidFill>
+          <a:ln w="6350">
+            <a:solidFill>
+              <a:srgbClr val="000000"/>
+            </a:solidFill>
+          </a:ln>
+          <a:effectLst/>
+        </p:spPr>
+        <p:style>
+          <a:lnRef idx="1">
+            <a:schemeClr val="accent1"/>
+          </a:lnRef>
+          <a:fillRef idx="3">
+            <a:schemeClr val="accent1"/>
+          </a:fillRef>
+          <a:effectRef idx="2">
+            <a:schemeClr val="accent1"/>
+          </a:effectRef>
+          <a:fontRef idx="minor">
+            <a:schemeClr val="lt1"/>
+          </a:fontRef>
+        </p:style>
+        <p:txBody>
+          <a:bodyPr rtlCol="0" anchor="ctr"/>
+          <a:lstStyle/>
+          <a:p/>
+        </p:txBody>
+      </p:sp>
+      <p:sp>
+        <p:nvSpPr>
+          <p:cNvPr id="39" name="Rectangle 38"/>
+          <p:cNvSpPr/>
+          <p:nvPr/>
+        </p:nvSpPr>
+        <p:spPr>
+          <a:xfrm>
+            <a:off x="1645919" y="5410199"/>
+            <a:ext cx="9921240" cy="579120"/>
+          </a:xfrm>
+          <a:prstGeom prst="rect">
+            <a:avLst/>
+          </a:prstGeom>
+          <a:solidFill>
+            <a:srgbClr val="FFFDF7"/>
+          </a:solidFill>
+          <a:ln w="34925">
+            <a:solidFill>
+              <a:srgbClr val="000000"/>
+            </a:solidFill>
+          </a:ln>
+          <a:effectLst/>
+        </p:spPr>
+        <p:style>
+          <a:lnRef idx="1">
+            <a:schemeClr val="accent1"/>
+          </a:lnRef>
+          <a:fillRef idx="3">
+            <a:schemeClr val="accent1"/>
+          </a:fillRef>
+          <a:effectRef idx="2">
+            <a:schemeClr val="accent1"/>
+          </a:effectRef>
+          <a:fontRef idx="minor">
+            <a:schemeClr val="lt1"/>
+          </a:fontRef>
+        </p:style>
+        <p:txBody>
+          <a:bodyPr rtlCol="0" anchor="ctr"/>
+          <a:lstStyle/>
+          <a:p/>
+        </p:txBody>
+      </p:sp>
+      <p:sp>
+        <p:nvSpPr>
+          <p:cNvPr id="40" name="TextBox 39"/>
+          <p:cNvSpPr txBox="1"/>
+          <p:nvPr/>
+        </p:nvSpPr>
+        <p:spPr>
+          <a:xfrm>
+            <a:off x="1920240" y="5501639"/>
+            <a:ext cx="9372600" cy="396239"/>
+          </a:xfrm>
+          <a:prstGeom prst="rect">
+            <a:avLst/>
+          </a:prstGeom>
+          <a:noFill/>
+        </p:spPr>
+        <p:txBody>
+          <a:bodyPr wrap="square" lIns="0" rIns="0" tIns="0" bIns="0" anchor="ctr">
+            <a:spAutoFit/>
+          </a:bodyPr>
+          <a:lstStyle/>
+          <a:p>
+            <a:pPr algn="l">
+              <a:lnSpc>
+                <a:spcPct val="125000"/>
+              </a:lnSpc>
+            </a:pPr>
+            <a:r>
+              <a:rPr sz="1200">
                 <a:solidFill>
                   <a:srgbClr val="000000"/>
                 </a:solidFill>

--- a/slides/ARC3133_Class02.pptx
+++ b/slides/ARC3133_Class02.pptx
@@ -16,6 +16,7 @@
     <p:sldId id="264" r:id="rId15"/>
     <p:sldId id="265" r:id="rId16"/>
     <p:sldId id="266" r:id="rId17"/>
+    <p:sldId id="267" r:id="rId18"/>
   </p:sldIdLst>
   <p:sldSz cx="12191969" cy="6858000" type="screen4x3"/>
   <p:notesSz cx="6858000" cy="9144000"/>
@@ -3178,7 +3179,7 @@
                 </a:solidFill>
                 <a:latin typeface="Arial"/>
               </a:rPr>
-              <a:t>CLASS 02  /  SEP 1</a:t>
+              <a:t>CLASS 02  /  SEP 1  /  U02</a:t>
             </a:r>
           </a:p>
         </p:txBody>
@@ -3305,7 +3306,7 @@
                 </a:solidFill>
                 <a:latin typeface="Arial"/>
               </a:rPr>
-              <a:t>TRANSFORMATIONS</a:t>
+              <a:t>CONSTRUCTIVE</a:t>
             </a:r>
           </a:p>
           <a:p>
@@ -3321,7 +3322,7 @@
                 </a:solidFill>
                 <a:latin typeface="Arial"/>
               </a:rPr>
-              <a:t>AND CSG</a:t>
+              <a:t>SOLID GEOMETRY</a:t>
             </a:r>
           </a:p>
         </p:txBody>
@@ -3532,7 +3533,7 @@
                 </a:solidFill>
                 <a:latin typeface="Arial"/>
               </a:rPr>
-              <a:t>P1 BEGINS — DESCRIBE A SOLID AS AN EDITABLE SEQUENCE</a:t>
+              <a:t>P2 BEGINS — DESCRIBE A SOLID AS AN EDITABLE SEQUENCE</a:t>
             </a:r>
           </a:p>
         </p:txBody>
@@ -3602,7 +3603,7 @@
                 </a:solidFill>
                 <a:latin typeface="Arial"/>
               </a:rPr>
-              <a:t>P1a ISSUED TODAY</a:t>
+              <a:t>P2a ISSUED TODAY</a:t>
             </a:r>
           </a:p>
         </p:txBody>
@@ -3616,6 +3617,1646 @@
 </file>
 
 <file path=ppt/slides/slide10.xml><?xml version="1.0" encoding="utf-8"?>
+<p:sld xmlns:a="http://schemas.openxmlformats.org/drawingml/2006/main" xmlns:p="http://schemas.openxmlformats.org/presentationml/2006/main" xmlns:r="http://schemas.openxmlformats.org/officeDocument/2006/relationships">
+  <p:cSld>
+    <p:bg>
+      <p:bgPr>
+        <a:solidFill>
+          <a:srgbClr val="FFFDF7"/>
+        </a:solidFill>
+        <a:effectLst/>
+      </p:bgPr>
+    </p:bg>
+    <p:spTree>
+      <p:nvGrpSpPr>
+        <p:cNvPr id="1" name=""/>
+        <p:cNvGrpSpPr/>
+        <p:nvPr/>
+      </p:nvGrpSpPr>
+      <p:grpSpPr/>
+      <p:sp>
+        <p:nvSpPr>
+          <p:cNvPr id="2" name="Rectangle 1"/>
+          <p:cNvSpPr/>
+          <p:nvPr/>
+        </p:nvSpPr>
+        <p:spPr>
+          <a:xfrm>
+            <a:off x="594360" y="566928"/>
+            <a:ext cx="10972800" cy="0"/>
+          </a:xfrm>
+          <a:prstGeom prst="rect">
+            <a:avLst/>
+          </a:prstGeom>
+          <a:noFill/>
+          <a:ln w="50800">
+            <a:solidFill>
+              <a:srgbClr val="000000"/>
+            </a:solidFill>
+          </a:ln>
+          <a:effectLst/>
+        </p:spPr>
+        <p:style>
+          <a:lnRef idx="1">
+            <a:schemeClr val="accent1"/>
+          </a:lnRef>
+          <a:fillRef idx="3">
+            <a:schemeClr val="accent1"/>
+          </a:fillRef>
+          <a:effectRef idx="2">
+            <a:schemeClr val="accent1"/>
+          </a:effectRef>
+          <a:fontRef idx="minor">
+            <a:schemeClr val="lt1"/>
+          </a:fontRef>
+        </p:style>
+        <p:txBody>
+          <a:bodyPr rtlCol="0" anchor="ctr"/>
+          <a:lstStyle/>
+          <a:p>
+            <a:pPr algn="ctr"/>
+          </a:p>
+        </p:txBody>
+      </p:sp>
+      <p:sp>
+        <p:nvSpPr>
+          <p:cNvPr id="3" name="TextBox 2"/>
+          <p:cNvSpPr txBox="1"/>
+          <p:nvPr/>
+        </p:nvSpPr>
+        <p:spPr>
+          <a:xfrm>
+            <a:off x="594360" y="676656"/>
+            <a:ext cx="10972800" cy="566928"/>
+          </a:xfrm>
+          <a:prstGeom prst="rect">
+            <a:avLst/>
+          </a:prstGeom>
+          <a:noFill/>
+        </p:spPr>
+        <p:txBody>
+          <a:bodyPr wrap="square" lIns="0" rIns="0" tIns="0" bIns="0" anchor="t">
+            <a:spAutoFit/>
+          </a:bodyPr>
+          <a:lstStyle/>
+          <a:p>
+            <a:pPr algn="l"/>
+            <a:r>
+              <a:rPr sz="3300" b="1">
+                <a:solidFill>
+                  <a:srgbClr val="000000"/>
+                </a:solidFill>
+                <a:latin typeface="Arial"/>
+              </a:rPr>
+              <a:t>REQUIREMENTS — P2a</a:t>
+            </a:r>
+          </a:p>
+        </p:txBody>
+      </p:sp>
+      <p:sp>
+        <p:nvSpPr>
+          <p:cNvPr id="4" name="TextBox 3"/>
+          <p:cNvSpPr txBox="1"/>
+          <p:nvPr/>
+        </p:nvSpPr>
+        <p:spPr>
+          <a:xfrm>
+            <a:off x="594360" y="1261872"/>
+            <a:ext cx="10972800" cy="310896"/>
+          </a:xfrm>
+          <a:prstGeom prst="rect">
+            <a:avLst/>
+          </a:prstGeom>
+          <a:noFill/>
+        </p:spPr>
+        <p:txBody>
+          <a:bodyPr wrap="square" lIns="0" rIns="0" tIns="0" bIns="0" anchor="t">
+            <a:spAutoFit/>
+          </a:bodyPr>
+          <a:lstStyle/>
+          <a:p>
+            <a:pPr algn="l"/>
+            <a:r>
+              <a:rPr sz="1350">
+                <a:solidFill>
+                  <a:srgbClr val="6B6B6B"/>
+                </a:solidFill>
+                <a:latin typeface="Calibri"/>
+              </a:rPr>
+              <a:t>Visual quality 35% · computational understanding 25% · technical execution 20% · experimentation 10% · requirements and identity 10%.</a:t>
+            </a:r>
+          </a:p>
+        </p:txBody>
+      </p:sp>
+      <p:sp>
+        <p:nvSpPr>
+          <p:cNvPr id="5" name="Rectangle 4"/>
+          <p:cNvSpPr/>
+          <p:nvPr/>
+        </p:nvSpPr>
+        <p:spPr>
+          <a:xfrm>
+            <a:off x="662940" y="1851660"/>
+            <a:ext cx="777240" cy="579120"/>
+          </a:xfrm>
+          <a:prstGeom prst="rect">
+            <a:avLst/>
+          </a:prstGeom>
+          <a:solidFill>
+            <a:srgbClr val="000000"/>
+          </a:solidFill>
+          <a:ln w="6350">
+            <a:solidFill>
+              <a:srgbClr val="000000"/>
+            </a:solidFill>
+          </a:ln>
+          <a:effectLst/>
+        </p:spPr>
+        <p:style>
+          <a:lnRef idx="1">
+            <a:schemeClr val="accent1"/>
+          </a:lnRef>
+          <a:fillRef idx="3">
+            <a:schemeClr val="accent1"/>
+          </a:fillRef>
+          <a:effectRef idx="2">
+            <a:schemeClr val="accent1"/>
+          </a:effectRef>
+          <a:fontRef idx="minor">
+            <a:schemeClr val="lt1"/>
+          </a:fontRef>
+        </p:style>
+        <p:txBody>
+          <a:bodyPr rtlCol="0" anchor="ctr"/>
+          <a:lstStyle/>
+          <a:p/>
+        </p:txBody>
+      </p:sp>
+      <p:sp>
+        <p:nvSpPr>
+          <p:cNvPr id="6" name="Rectangle 5"/>
+          <p:cNvSpPr/>
+          <p:nvPr/>
+        </p:nvSpPr>
+        <p:spPr>
+          <a:xfrm>
+            <a:off x="594360" y="1783080"/>
+            <a:ext cx="777240" cy="579120"/>
+          </a:xfrm>
+          <a:prstGeom prst="rect">
+            <a:avLst/>
+          </a:prstGeom>
+          <a:solidFill>
+            <a:srgbClr val="00D9E1"/>
+          </a:solidFill>
+          <a:ln w="34925">
+            <a:solidFill>
+              <a:srgbClr val="000000"/>
+            </a:solidFill>
+          </a:ln>
+          <a:effectLst/>
+        </p:spPr>
+        <p:style>
+          <a:lnRef idx="1">
+            <a:schemeClr val="accent1"/>
+          </a:lnRef>
+          <a:fillRef idx="3">
+            <a:schemeClr val="accent1"/>
+          </a:fillRef>
+          <a:effectRef idx="2">
+            <a:schemeClr val="accent1"/>
+          </a:effectRef>
+          <a:fontRef idx="minor">
+            <a:schemeClr val="lt1"/>
+          </a:fontRef>
+        </p:style>
+        <p:txBody>
+          <a:bodyPr rtlCol="0" anchor="ctr"/>
+          <a:lstStyle/>
+          <a:p/>
+        </p:txBody>
+      </p:sp>
+      <p:sp>
+        <p:nvSpPr>
+          <p:cNvPr id="7" name="TextBox 6"/>
+          <p:cNvSpPr txBox="1"/>
+          <p:nvPr/>
+        </p:nvSpPr>
+        <p:spPr>
+          <a:xfrm>
+            <a:off x="594360" y="1972056"/>
+            <a:ext cx="777240" cy="274320"/>
+          </a:xfrm>
+          <a:prstGeom prst="rect">
+            <a:avLst/>
+          </a:prstGeom>
+          <a:noFill/>
+        </p:spPr>
+        <p:txBody>
+          <a:bodyPr wrap="square" lIns="0" rIns="0" tIns="0" bIns="0" anchor="t">
+            <a:spAutoFit/>
+          </a:bodyPr>
+          <a:lstStyle/>
+          <a:p>
+            <a:pPr algn="ctr"/>
+            <a:r>
+              <a:rPr sz="1500" b="1">
+                <a:solidFill>
+                  <a:srgbClr val="000000"/>
+                </a:solidFill>
+                <a:latin typeface="Arial"/>
+              </a:rPr>
+              <a:t>01</a:t>
+            </a:r>
+          </a:p>
+        </p:txBody>
+      </p:sp>
+      <p:sp>
+        <p:nvSpPr>
+          <p:cNvPr id="8" name="Rectangle 7"/>
+          <p:cNvSpPr/>
+          <p:nvPr/>
+        </p:nvSpPr>
+        <p:spPr>
+          <a:xfrm>
+            <a:off x="1714499" y="1851660"/>
+            <a:ext cx="9921240" cy="579120"/>
+          </a:xfrm>
+          <a:prstGeom prst="rect">
+            <a:avLst/>
+          </a:prstGeom>
+          <a:solidFill>
+            <a:srgbClr val="000000"/>
+          </a:solidFill>
+          <a:ln w="6350">
+            <a:solidFill>
+              <a:srgbClr val="000000"/>
+            </a:solidFill>
+          </a:ln>
+          <a:effectLst/>
+        </p:spPr>
+        <p:style>
+          <a:lnRef idx="1">
+            <a:schemeClr val="accent1"/>
+          </a:lnRef>
+          <a:fillRef idx="3">
+            <a:schemeClr val="accent1"/>
+          </a:fillRef>
+          <a:effectRef idx="2">
+            <a:schemeClr val="accent1"/>
+          </a:effectRef>
+          <a:fontRef idx="minor">
+            <a:schemeClr val="lt1"/>
+          </a:fontRef>
+        </p:style>
+        <p:txBody>
+          <a:bodyPr rtlCol="0" anchor="ctr"/>
+          <a:lstStyle/>
+          <a:p/>
+        </p:txBody>
+      </p:sp>
+      <p:sp>
+        <p:nvSpPr>
+          <p:cNvPr id="9" name="Rectangle 8"/>
+          <p:cNvSpPr/>
+          <p:nvPr/>
+        </p:nvSpPr>
+        <p:spPr>
+          <a:xfrm>
+            <a:off x="1645919" y="1783080"/>
+            <a:ext cx="9921240" cy="579120"/>
+          </a:xfrm>
+          <a:prstGeom prst="rect">
+            <a:avLst/>
+          </a:prstGeom>
+          <a:solidFill>
+            <a:srgbClr val="FFFDF7"/>
+          </a:solidFill>
+          <a:ln w="34925">
+            <a:solidFill>
+              <a:srgbClr val="000000"/>
+            </a:solidFill>
+          </a:ln>
+          <a:effectLst/>
+        </p:spPr>
+        <p:style>
+          <a:lnRef idx="1">
+            <a:schemeClr val="accent1"/>
+          </a:lnRef>
+          <a:fillRef idx="3">
+            <a:schemeClr val="accent1"/>
+          </a:fillRef>
+          <a:effectRef idx="2">
+            <a:schemeClr val="accent1"/>
+          </a:effectRef>
+          <a:fontRef idx="minor">
+            <a:schemeClr val="lt1"/>
+          </a:fontRef>
+        </p:style>
+        <p:txBody>
+          <a:bodyPr rtlCol="0" anchor="ctr"/>
+          <a:lstStyle/>
+          <a:p/>
+        </p:txBody>
+      </p:sp>
+      <p:sp>
+        <p:nvSpPr>
+          <p:cNvPr id="10" name="TextBox 9"/>
+          <p:cNvSpPr txBox="1"/>
+          <p:nvPr/>
+        </p:nvSpPr>
+        <p:spPr>
+          <a:xfrm>
+            <a:off x="1920240" y="1874519"/>
+            <a:ext cx="9372600" cy="396239"/>
+          </a:xfrm>
+          <a:prstGeom prst="rect">
+            <a:avLst/>
+          </a:prstGeom>
+          <a:noFill/>
+        </p:spPr>
+        <p:txBody>
+          <a:bodyPr wrap="square" lIns="0" rIns="0" tIns="0" bIns="0" anchor="ctr">
+            <a:spAutoFit/>
+          </a:bodyPr>
+          <a:lstStyle/>
+          <a:p>
+            <a:pPr algn="l">
+              <a:lnSpc>
+                <a:spcPct val="125000"/>
+              </a:lnSpc>
+            </a:pPr>
+            <a:r>
+              <a:rPr sz="1200">
+                <a:solidFill>
+                  <a:srgbClr val="000000"/>
+                </a:solidFill>
+                <a:latin typeface="Calibri"/>
+              </a:rPr>
+              <a:t>One 17 × 11 inch sheet laid out as a BIG-style process diagram (in the manner of Bjarke Ingels Group's step-by-step massing diagrams): eight or nine numbered frames, one operation per frame, read in sequence.</a:t>
+            </a:r>
+          </a:p>
+        </p:txBody>
+      </p:sp>
+      <p:sp>
+        <p:nvSpPr>
+          <p:cNvPr id="11" name="Rectangle 10"/>
+          <p:cNvSpPr/>
+          <p:nvPr/>
+        </p:nvSpPr>
+        <p:spPr>
+          <a:xfrm>
+            <a:off x="662940" y="2577084"/>
+            <a:ext cx="777240" cy="579120"/>
+          </a:xfrm>
+          <a:prstGeom prst="rect">
+            <a:avLst/>
+          </a:prstGeom>
+          <a:solidFill>
+            <a:srgbClr val="000000"/>
+          </a:solidFill>
+          <a:ln w="6350">
+            <a:solidFill>
+              <a:srgbClr val="000000"/>
+            </a:solidFill>
+          </a:ln>
+          <a:effectLst/>
+        </p:spPr>
+        <p:style>
+          <a:lnRef idx="1">
+            <a:schemeClr val="accent1"/>
+          </a:lnRef>
+          <a:fillRef idx="3">
+            <a:schemeClr val="accent1"/>
+          </a:fillRef>
+          <a:effectRef idx="2">
+            <a:schemeClr val="accent1"/>
+          </a:effectRef>
+          <a:fontRef idx="minor">
+            <a:schemeClr val="lt1"/>
+          </a:fontRef>
+        </p:style>
+        <p:txBody>
+          <a:bodyPr rtlCol="0" anchor="ctr"/>
+          <a:lstStyle/>
+          <a:p/>
+        </p:txBody>
+      </p:sp>
+      <p:sp>
+        <p:nvSpPr>
+          <p:cNvPr id="12" name="Rectangle 11"/>
+          <p:cNvSpPr/>
+          <p:nvPr/>
+        </p:nvSpPr>
+        <p:spPr>
+          <a:xfrm>
+            <a:off x="594360" y="2508504"/>
+            <a:ext cx="777240" cy="579120"/>
+          </a:xfrm>
+          <a:prstGeom prst="rect">
+            <a:avLst/>
+          </a:prstGeom>
+          <a:solidFill>
+            <a:srgbClr val="C6F035"/>
+          </a:solidFill>
+          <a:ln w="34925">
+            <a:solidFill>
+              <a:srgbClr val="000000"/>
+            </a:solidFill>
+          </a:ln>
+          <a:effectLst/>
+        </p:spPr>
+        <p:style>
+          <a:lnRef idx="1">
+            <a:schemeClr val="accent1"/>
+          </a:lnRef>
+          <a:fillRef idx="3">
+            <a:schemeClr val="accent1"/>
+          </a:fillRef>
+          <a:effectRef idx="2">
+            <a:schemeClr val="accent1"/>
+          </a:effectRef>
+          <a:fontRef idx="minor">
+            <a:schemeClr val="lt1"/>
+          </a:fontRef>
+        </p:style>
+        <p:txBody>
+          <a:bodyPr rtlCol="0" anchor="ctr"/>
+          <a:lstStyle/>
+          <a:p/>
+        </p:txBody>
+      </p:sp>
+      <p:sp>
+        <p:nvSpPr>
+          <p:cNvPr id="13" name="TextBox 12"/>
+          <p:cNvSpPr txBox="1"/>
+          <p:nvPr/>
+        </p:nvSpPr>
+        <p:spPr>
+          <a:xfrm>
+            <a:off x="594360" y="2697479"/>
+            <a:ext cx="777240" cy="274320"/>
+          </a:xfrm>
+          <a:prstGeom prst="rect">
+            <a:avLst/>
+          </a:prstGeom>
+          <a:noFill/>
+        </p:spPr>
+        <p:txBody>
+          <a:bodyPr wrap="square" lIns="0" rIns="0" tIns="0" bIns="0" anchor="t">
+            <a:spAutoFit/>
+          </a:bodyPr>
+          <a:lstStyle/>
+          <a:p>
+            <a:pPr algn="ctr"/>
+            <a:r>
+              <a:rPr sz="1500" b="1">
+                <a:solidFill>
+                  <a:srgbClr val="000000"/>
+                </a:solidFill>
+                <a:latin typeface="Arial"/>
+              </a:rPr>
+              <a:t>02</a:t>
+            </a:r>
+          </a:p>
+        </p:txBody>
+      </p:sp>
+      <p:sp>
+        <p:nvSpPr>
+          <p:cNvPr id="14" name="Rectangle 13"/>
+          <p:cNvSpPr/>
+          <p:nvPr/>
+        </p:nvSpPr>
+        <p:spPr>
+          <a:xfrm>
+            <a:off x="1714499" y="2577084"/>
+            <a:ext cx="9921240" cy="579120"/>
+          </a:xfrm>
+          <a:prstGeom prst="rect">
+            <a:avLst/>
+          </a:prstGeom>
+          <a:solidFill>
+            <a:srgbClr val="000000"/>
+          </a:solidFill>
+          <a:ln w="6350">
+            <a:solidFill>
+              <a:srgbClr val="000000"/>
+            </a:solidFill>
+          </a:ln>
+          <a:effectLst/>
+        </p:spPr>
+        <p:style>
+          <a:lnRef idx="1">
+            <a:schemeClr val="accent1"/>
+          </a:lnRef>
+          <a:fillRef idx="3">
+            <a:schemeClr val="accent1"/>
+          </a:fillRef>
+          <a:effectRef idx="2">
+            <a:schemeClr val="accent1"/>
+          </a:effectRef>
+          <a:fontRef idx="minor">
+            <a:schemeClr val="lt1"/>
+          </a:fontRef>
+        </p:style>
+        <p:txBody>
+          <a:bodyPr rtlCol="0" anchor="ctr"/>
+          <a:lstStyle/>
+          <a:p/>
+        </p:txBody>
+      </p:sp>
+      <p:sp>
+        <p:nvSpPr>
+          <p:cNvPr id="15" name="Rectangle 14"/>
+          <p:cNvSpPr/>
+          <p:nvPr/>
+        </p:nvSpPr>
+        <p:spPr>
+          <a:xfrm>
+            <a:off x="1645919" y="2508504"/>
+            <a:ext cx="9921240" cy="579120"/>
+          </a:xfrm>
+          <a:prstGeom prst="rect">
+            <a:avLst/>
+          </a:prstGeom>
+          <a:solidFill>
+            <a:srgbClr val="FFFDF7"/>
+          </a:solidFill>
+          <a:ln w="34925">
+            <a:solidFill>
+              <a:srgbClr val="000000"/>
+            </a:solidFill>
+          </a:ln>
+          <a:effectLst/>
+        </p:spPr>
+        <p:style>
+          <a:lnRef idx="1">
+            <a:schemeClr val="accent1"/>
+          </a:lnRef>
+          <a:fillRef idx="3">
+            <a:schemeClr val="accent1"/>
+          </a:fillRef>
+          <a:effectRef idx="2">
+            <a:schemeClr val="accent1"/>
+          </a:effectRef>
+          <a:fontRef idx="minor">
+            <a:schemeClr val="lt1"/>
+          </a:fontRef>
+        </p:style>
+        <p:txBody>
+          <a:bodyPr rtlCol="0" anchor="ctr"/>
+          <a:lstStyle/>
+          <a:p/>
+        </p:txBody>
+      </p:sp>
+      <p:sp>
+        <p:nvSpPr>
+          <p:cNvPr id="16" name="TextBox 15"/>
+          <p:cNvSpPr txBox="1"/>
+          <p:nvPr/>
+        </p:nvSpPr>
+        <p:spPr>
+          <a:xfrm>
+            <a:off x="1920240" y="2599944"/>
+            <a:ext cx="9372600" cy="396239"/>
+          </a:xfrm>
+          <a:prstGeom prst="rect">
+            <a:avLst/>
+          </a:prstGeom>
+          <a:noFill/>
+        </p:spPr>
+        <p:txBody>
+          <a:bodyPr wrap="square" lIns="0" rIns="0" tIns="0" bIns="0" anchor="ctr">
+            <a:spAutoFit/>
+          </a:bodyPr>
+          <a:lstStyle/>
+          <a:p>
+            <a:pPr algn="l">
+              <a:lnSpc>
+                <a:spcPct val="125000"/>
+              </a:lnSpc>
+            </a:pPr>
+            <a:r>
+              <a:rPr sz="1200">
+                <a:solidFill>
+                  <a:srgbClr val="000000"/>
+                </a:solidFill>
+                <a:latin typeface="Calibri"/>
+              </a:rPr>
+              <a:t>Use at least three primitives; include translation, rotation and scale, plus union, difference and intersection. Label the kept and removed solids in each subtraction.</a:t>
+            </a:r>
+          </a:p>
+        </p:txBody>
+      </p:sp>
+      <p:sp>
+        <p:nvSpPr>
+          <p:cNvPr id="17" name="Rectangle 16"/>
+          <p:cNvSpPr/>
+          <p:nvPr/>
+        </p:nvSpPr>
+        <p:spPr>
+          <a:xfrm>
+            <a:off x="662940" y="3302508"/>
+            <a:ext cx="777240" cy="579120"/>
+          </a:xfrm>
+          <a:prstGeom prst="rect">
+            <a:avLst/>
+          </a:prstGeom>
+          <a:solidFill>
+            <a:srgbClr val="000000"/>
+          </a:solidFill>
+          <a:ln w="6350">
+            <a:solidFill>
+              <a:srgbClr val="000000"/>
+            </a:solidFill>
+          </a:ln>
+          <a:effectLst/>
+        </p:spPr>
+        <p:style>
+          <a:lnRef idx="1">
+            <a:schemeClr val="accent1"/>
+          </a:lnRef>
+          <a:fillRef idx="3">
+            <a:schemeClr val="accent1"/>
+          </a:fillRef>
+          <a:effectRef idx="2">
+            <a:schemeClr val="accent1"/>
+          </a:effectRef>
+          <a:fontRef idx="minor">
+            <a:schemeClr val="lt1"/>
+          </a:fontRef>
+        </p:style>
+        <p:txBody>
+          <a:bodyPr rtlCol="0" anchor="ctr"/>
+          <a:lstStyle/>
+          <a:p/>
+        </p:txBody>
+      </p:sp>
+      <p:sp>
+        <p:nvSpPr>
+          <p:cNvPr id="18" name="Rectangle 17"/>
+          <p:cNvSpPr/>
+          <p:nvPr/>
+        </p:nvSpPr>
+        <p:spPr>
+          <a:xfrm>
+            <a:off x="594360" y="3233928"/>
+            <a:ext cx="777240" cy="579120"/>
+          </a:xfrm>
+          <a:prstGeom prst="rect">
+            <a:avLst/>
+          </a:prstGeom>
+          <a:solidFill>
+            <a:srgbClr val="FFE500"/>
+          </a:solidFill>
+          <a:ln w="34925">
+            <a:solidFill>
+              <a:srgbClr val="000000"/>
+            </a:solidFill>
+          </a:ln>
+          <a:effectLst/>
+        </p:spPr>
+        <p:style>
+          <a:lnRef idx="1">
+            <a:schemeClr val="accent1"/>
+          </a:lnRef>
+          <a:fillRef idx="3">
+            <a:schemeClr val="accent1"/>
+          </a:fillRef>
+          <a:effectRef idx="2">
+            <a:schemeClr val="accent1"/>
+          </a:effectRef>
+          <a:fontRef idx="minor">
+            <a:schemeClr val="lt1"/>
+          </a:fontRef>
+        </p:style>
+        <p:txBody>
+          <a:bodyPr rtlCol="0" anchor="ctr"/>
+          <a:lstStyle/>
+          <a:p/>
+        </p:txBody>
+      </p:sp>
+      <p:sp>
+        <p:nvSpPr>
+          <p:cNvPr id="19" name="TextBox 18"/>
+          <p:cNvSpPr txBox="1"/>
+          <p:nvPr/>
+        </p:nvSpPr>
+        <p:spPr>
+          <a:xfrm>
+            <a:off x="594360" y="3422904"/>
+            <a:ext cx="777240" cy="274320"/>
+          </a:xfrm>
+          <a:prstGeom prst="rect">
+            <a:avLst/>
+          </a:prstGeom>
+          <a:noFill/>
+        </p:spPr>
+        <p:txBody>
+          <a:bodyPr wrap="square" lIns="0" rIns="0" tIns="0" bIns="0" anchor="t">
+            <a:spAutoFit/>
+          </a:bodyPr>
+          <a:lstStyle/>
+          <a:p>
+            <a:pPr algn="ctr"/>
+            <a:r>
+              <a:rPr sz="1500" b="1">
+                <a:solidFill>
+                  <a:srgbClr val="000000"/>
+                </a:solidFill>
+                <a:latin typeface="Arial"/>
+              </a:rPr>
+              <a:t>03</a:t>
+            </a:r>
+          </a:p>
+        </p:txBody>
+      </p:sp>
+      <p:sp>
+        <p:nvSpPr>
+          <p:cNvPr id="20" name="Rectangle 19"/>
+          <p:cNvSpPr/>
+          <p:nvPr/>
+        </p:nvSpPr>
+        <p:spPr>
+          <a:xfrm>
+            <a:off x="1714499" y="3302508"/>
+            <a:ext cx="9921240" cy="579120"/>
+          </a:xfrm>
+          <a:prstGeom prst="rect">
+            <a:avLst/>
+          </a:prstGeom>
+          <a:solidFill>
+            <a:srgbClr val="000000"/>
+          </a:solidFill>
+          <a:ln w="6350">
+            <a:solidFill>
+              <a:srgbClr val="000000"/>
+            </a:solidFill>
+          </a:ln>
+          <a:effectLst/>
+        </p:spPr>
+        <p:style>
+          <a:lnRef idx="1">
+            <a:schemeClr val="accent1"/>
+          </a:lnRef>
+          <a:fillRef idx="3">
+            <a:schemeClr val="accent1"/>
+          </a:fillRef>
+          <a:effectRef idx="2">
+            <a:schemeClr val="accent1"/>
+          </a:effectRef>
+          <a:fontRef idx="minor">
+            <a:schemeClr val="lt1"/>
+          </a:fontRef>
+        </p:style>
+        <p:txBody>
+          <a:bodyPr rtlCol="0" anchor="ctr"/>
+          <a:lstStyle/>
+          <a:p/>
+        </p:txBody>
+      </p:sp>
+      <p:sp>
+        <p:nvSpPr>
+          <p:cNvPr id="21" name="Rectangle 20"/>
+          <p:cNvSpPr/>
+          <p:nvPr/>
+        </p:nvSpPr>
+        <p:spPr>
+          <a:xfrm>
+            <a:off x="1645919" y="3233928"/>
+            <a:ext cx="9921240" cy="579120"/>
+          </a:xfrm>
+          <a:prstGeom prst="rect">
+            <a:avLst/>
+          </a:prstGeom>
+          <a:solidFill>
+            <a:srgbClr val="FFFDF7"/>
+          </a:solidFill>
+          <a:ln w="34925">
+            <a:solidFill>
+              <a:srgbClr val="000000"/>
+            </a:solidFill>
+          </a:ln>
+          <a:effectLst/>
+        </p:spPr>
+        <p:style>
+          <a:lnRef idx="1">
+            <a:schemeClr val="accent1"/>
+          </a:lnRef>
+          <a:fillRef idx="3">
+            <a:schemeClr val="accent1"/>
+          </a:fillRef>
+          <a:effectRef idx="2">
+            <a:schemeClr val="accent1"/>
+          </a:effectRef>
+          <a:fontRef idx="minor">
+            <a:schemeClr val="lt1"/>
+          </a:fontRef>
+        </p:style>
+        <p:txBody>
+          <a:bodyPr rtlCol="0" anchor="ctr"/>
+          <a:lstStyle/>
+          <a:p/>
+        </p:txBody>
+      </p:sp>
+      <p:sp>
+        <p:nvSpPr>
+          <p:cNvPr id="22" name="TextBox 21"/>
+          <p:cNvSpPr txBox="1"/>
+          <p:nvPr/>
+        </p:nvSpPr>
+        <p:spPr>
+          <a:xfrm>
+            <a:off x="1920240" y="3325368"/>
+            <a:ext cx="9372600" cy="396239"/>
+          </a:xfrm>
+          <a:prstGeom prst="rect">
+            <a:avLst/>
+          </a:prstGeom>
+          <a:noFill/>
+        </p:spPr>
+        <p:txBody>
+          <a:bodyPr wrap="square" lIns="0" rIns="0" tIns="0" bIns="0" anchor="ctr">
+            <a:spAutoFit/>
+          </a:bodyPr>
+          <a:lstStyle/>
+          <a:p>
+            <a:pPr algn="l">
+              <a:lnSpc>
+                <a:spcPct val="125000"/>
+              </a:lnSpc>
+            </a:pPr>
+            <a:r>
+              <a:rPr sz="1200">
+                <a:solidFill>
+                  <a:srgbClr val="000000"/>
+                </a:solidFill>
+                <a:latin typeface="Calibri"/>
+              </a:rPr>
+              <a:t>Draw the final solid at building scale with a 1.75 m figure, vegetation, ground and shadow.</a:t>
+            </a:r>
+          </a:p>
+        </p:txBody>
+      </p:sp>
+      <p:sp>
+        <p:nvSpPr>
+          <p:cNvPr id="23" name="Rectangle 22"/>
+          <p:cNvSpPr/>
+          <p:nvPr/>
+        </p:nvSpPr>
+        <p:spPr>
+          <a:xfrm>
+            <a:off x="662940" y="4027932"/>
+            <a:ext cx="777240" cy="579120"/>
+          </a:xfrm>
+          <a:prstGeom prst="rect">
+            <a:avLst/>
+          </a:prstGeom>
+          <a:solidFill>
+            <a:srgbClr val="000000"/>
+          </a:solidFill>
+          <a:ln w="6350">
+            <a:solidFill>
+              <a:srgbClr val="000000"/>
+            </a:solidFill>
+          </a:ln>
+          <a:effectLst/>
+        </p:spPr>
+        <p:style>
+          <a:lnRef idx="1">
+            <a:schemeClr val="accent1"/>
+          </a:lnRef>
+          <a:fillRef idx="3">
+            <a:schemeClr val="accent1"/>
+          </a:fillRef>
+          <a:effectRef idx="2">
+            <a:schemeClr val="accent1"/>
+          </a:effectRef>
+          <a:fontRef idx="minor">
+            <a:schemeClr val="lt1"/>
+          </a:fontRef>
+        </p:style>
+        <p:txBody>
+          <a:bodyPr rtlCol="0" anchor="ctr"/>
+          <a:lstStyle/>
+          <a:p/>
+        </p:txBody>
+      </p:sp>
+      <p:sp>
+        <p:nvSpPr>
+          <p:cNvPr id="24" name="Rectangle 23"/>
+          <p:cNvSpPr/>
+          <p:nvPr/>
+        </p:nvSpPr>
+        <p:spPr>
+          <a:xfrm>
+            <a:off x="594360" y="3959352"/>
+            <a:ext cx="777240" cy="579120"/>
+          </a:xfrm>
+          <a:prstGeom prst="rect">
+            <a:avLst/>
+          </a:prstGeom>
+          <a:solidFill>
+            <a:srgbClr val="FF4D8D"/>
+          </a:solidFill>
+          <a:ln w="34925">
+            <a:solidFill>
+              <a:srgbClr val="000000"/>
+            </a:solidFill>
+          </a:ln>
+          <a:effectLst/>
+        </p:spPr>
+        <p:style>
+          <a:lnRef idx="1">
+            <a:schemeClr val="accent1"/>
+          </a:lnRef>
+          <a:fillRef idx="3">
+            <a:schemeClr val="accent1"/>
+          </a:fillRef>
+          <a:effectRef idx="2">
+            <a:schemeClr val="accent1"/>
+          </a:effectRef>
+          <a:fontRef idx="minor">
+            <a:schemeClr val="lt1"/>
+          </a:fontRef>
+        </p:style>
+        <p:txBody>
+          <a:bodyPr rtlCol="0" anchor="ctr"/>
+          <a:lstStyle/>
+          <a:p/>
+        </p:txBody>
+      </p:sp>
+      <p:sp>
+        <p:nvSpPr>
+          <p:cNvPr id="25" name="TextBox 24"/>
+          <p:cNvSpPr txBox="1"/>
+          <p:nvPr/>
+        </p:nvSpPr>
+        <p:spPr>
+          <a:xfrm>
+            <a:off x="594360" y="4148328"/>
+            <a:ext cx="777240" cy="274320"/>
+          </a:xfrm>
+          <a:prstGeom prst="rect">
+            <a:avLst/>
+          </a:prstGeom>
+          <a:noFill/>
+        </p:spPr>
+        <p:txBody>
+          <a:bodyPr wrap="square" lIns="0" rIns="0" tIns="0" bIns="0" anchor="t">
+            <a:spAutoFit/>
+          </a:bodyPr>
+          <a:lstStyle/>
+          <a:p>
+            <a:pPr algn="ctr"/>
+            <a:r>
+              <a:rPr sz="1500" b="1">
+                <a:solidFill>
+                  <a:srgbClr val="000000"/>
+                </a:solidFill>
+                <a:latin typeface="Arial"/>
+              </a:rPr>
+              <a:t>04</a:t>
+            </a:r>
+          </a:p>
+        </p:txBody>
+      </p:sp>
+      <p:sp>
+        <p:nvSpPr>
+          <p:cNvPr id="26" name="Rectangle 25"/>
+          <p:cNvSpPr/>
+          <p:nvPr/>
+        </p:nvSpPr>
+        <p:spPr>
+          <a:xfrm>
+            <a:off x="1714499" y="4027932"/>
+            <a:ext cx="9921240" cy="579120"/>
+          </a:xfrm>
+          <a:prstGeom prst="rect">
+            <a:avLst/>
+          </a:prstGeom>
+          <a:solidFill>
+            <a:srgbClr val="000000"/>
+          </a:solidFill>
+          <a:ln w="6350">
+            <a:solidFill>
+              <a:srgbClr val="000000"/>
+            </a:solidFill>
+          </a:ln>
+          <a:effectLst/>
+        </p:spPr>
+        <p:style>
+          <a:lnRef idx="1">
+            <a:schemeClr val="accent1"/>
+          </a:lnRef>
+          <a:fillRef idx="3">
+            <a:schemeClr val="accent1"/>
+          </a:fillRef>
+          <a:effectRef idx="2">
+            <a:schemeClr val="accent1"/>
+          </a:effectRef>
+          <a:fontRef idx="minor">
+            <a:schemeClr val="lt1"/>
+          </a:fontRef>
+        </p:style>
+        <p:txBody>
+          <a:bodyPr rtlCol="0" anchor="ctr"/>
+          <a:lstStyle/>
+          <a:p/>
+        </p:txBody>
+      </p:sp>
+      <p:sp>
+        <p:nvSpPr>
+          <p:cNvPr id="27" name="Rectangle 26"/>
+          <p:cNvSpPr/>
+          <p:nvPr/>
+        </p:nvSpPr>
+        <p:spPr>
+          <a:xfrm>
+            <a:off x="1645919" y="3959352"/>
+            <a:ext cx="9921240" cy="579120"/>
+          </a:xfrm>
+          <a:prstGeom prst="rect">
+            <a:avLst/>
+          </a:prstGeom>
+          <a:solidFill>
+            <a:srgbClr val="FFFDF7"/>
+          </a:solidFill>
+          <a:ln w="34925">
+            <a:solidFill>
+              <a:srgbClr val="000000"/>
+            </a:solidFill>
+          </a:ln>
+          <a:effectLst/>
+        </p:spPr>
+        <p:style>
+          <a:lnRef idx="1">
+            <a:schemeClr val="accent1"/>
+          </a:lnRef>
+          <a:fillRef idx="3">
+            <a:schemeClr val="accent1"/>
+          </a:fillRef>
+          <a:effectRef idx="2">
+            <a:schemeClr val="accent1"/>
+          </a:effectRef>
+          <a:fontRef idx="minor">
+            <a:schemeClr val="lt1"/>
+          </a:fontRef>
+        </p:style>
+        <p:txBody>
+          <a:bodyPr rtlCol="0" anchor="ctr"/>
+          <a:lstStyle/>
+          <a:p/>
+        </p:txBody>
+      </p:sp>
+      <p:sp>
+        <p:nvSpPr>
+          <p:cNvPr id="28" name="TextBox 27"/>
+          <p:cNvSpPr txBox="1"/>
+          <p:nvPr/>
+        </p:nvSpPr>
+        <p:spPr>
+          <a:xfrm>
+            <a:off x="1920240" y="4050791"/>
+            <a:ext cx="9372600" cy="396239"/>
+          </a:xfrm>
+          <a:prstGeom prst="rect">
+            <a:avLst/>
+          </a:prstGeom>
+          <a:noFill/>
+        </p:spPr>
+        <p:txBody>
+          <a:bodyPr wrap="square" lIns="0" rIns="0" tIns="0" bIns="0" anchor="ctr">
+            <a:spAutoFit/>
+          </a:bodyPr>
+          <a:lstStyle/>
+          <a:p>
+            <a:pPr algn="l">
+              <a:lnSpc>
+                <a:spcPct val="125000"/>
+              </a:lnSpc>
+            </a:pPr>
+            <a:r>
+              <a:rPr sz="1200">
+                <a:solidFill>
+                  <a:srgbClr val="000000"/>
+                </a:solidFill>
+                <a:latin typeface="Calibri"/>
+              </a:rPr>
+              <a:t>Add clear instructions and matching pseudocode beside the diagrams, one step per operation, with the exposed parameters.</a:t>
+            </a:r>
+          </a:p>
+        </p:txBody>
+      </p:sp>
+      <p:sp>
+        <p:nvSpPr>
+          <p:cNvPr id="29" name="Rectangle 28"/>
+          <p:cNvSpPr/>
+          <p:nvPr/>
+        </p:nvSpPr>
+        <p:spPr>
+          <a:xfrm>
+            <a:off x="662940" y="4753356"/>
+            <a:ext cx="777240" cy="579120"/>
+          </a:xfrm>
+          <a:prstGeom prst="rect">
+            <a:avLst/>
+          </a:prstGeom>
+          <a:solidFill>
+            <a:srgbClr val="000000"/>
+          </a:solidFill>
+          <a:ln w="6350">
+            <a:solidFill>
+              <a:srgbClr val="000000"/>
+            </a:solidFill>
+          </a:ln>
+          <a:effectLst/>
+        </p:spPr>
+        <p:style>
+          <a:lnRef idx="1">
+            <a:schemeClr val="accent1"/>
+          </a:lnRef>
+          <a:fillRef idx="3">
+            <a:schemeClr val="accent1"/>
+          </a:fillRef>
+          <a:effectRef idx="2">
+            <a:schemeClr val="accent1"/>
+          </a:effectRef>
+          <a:fontRef idx="minor">
+            <a:schemeClr val="lt1"/>
+          </a:fontRef>
+        </p:style>
+        <p:txBody>
+          <a:bodyPr rtlCol="0" anchor="ctr"/>
+          <a:lstStyle/>
+          <a:p/>
+        </p:txBody>
+      </p:sp>
+      <p:sp>
+        <p:nvSpPr>
+          <p:cNvPr id="30" name="Rectangle 29"/>
+          <p:cNvSpPr/>
+          <p:nvPr/>
+        </p:nvSpPr>
+        <p:spPr>
+          <a:xfrm>
+            <a:off x="594360" y="4684776"/>
+            <a:ext cx="777240" cy="579120"/>
+          </a:xfrm>
+          <a:prstGeom prst="rect">
+            <a:avLst/>
+          </a:prstGeom>
+          <a:solidFill>
+            <a:srgbClr val="00D9E1"/>
+          </a:solidFill>
+          <a:ln w="34925">
+            <a:solidFill>
+              <a:srgbClr val="000000"/>
+            </a:solidFill>
+          </a:ln>
+          <a:effectLst/>
+        </p:spPr>
+        <p:style>
+          <a:lnRef idx="1">
+            <a:schemeClr val="accent1"/>
+          </a:lnRef>
+          <a:fillRef idx="3">
+            <a:schemeClr val="accent1"/>
+          </a:fillRef>
+          <a:effectRef idx="2">
+            <a:schemeClr val="accent1"/>
+          </a:effectRef>
+          <a:fontRef idx="minor">
+            <a:schemeClr val="lt1"/>
+          </a:fontRef>
+        </p:style>
+        <p:txBody>
+          <a:bodyPr rtlCol="0" anchor="ctr"/>
+          <a:lstStyle/>
+          <a:p/>
+        </p:txBody>
+      </p:sp>
+      <p:sp>
+        <p:nvSpPr>
+          <p:cNvPr id="31" name="TextBox 30"/>
+          <p:cNvSpPr txBox="1"/>
+          <p:nvPr/>
+        </p:nvSpPr>
+        <p:spPr>
+          <a:xfrm>
+            <a:off x="594360" y="4873752"/>
+            <a:ext cx="777240" cy="274320"/>
+          </a:xfrm>
+          <a:prstGeom prst="rect">
+            <a:avLst/>
+          </a:prstGeom>
+          <a:noFill/>
+        </p:spPr>
+        <p:txBody>
+          <a:bodyPr wrap="square" lIns="0" rIns="0" tIns="0" bIns="0" anchor="t">
+            <a:spAutoFit/>
+          </a:bodyPr>
+          <a:lstStyle/>
+          <a:p>
+            <a:pPr algn="ctr"/>
+            <a:r>
+              <a:rPr sz="1500" b="1">
+                <a:solidFill>
+                  <a:srgbClr val="000000"/>
+                </a:solidFill>
+                <a:latin typeface="Arial"/>
+              </a:rPr>
+              <a:t>05</a:t>
+            </a:r>
+          </a:p>
+        </p:txBody>
+      </p:sp>
+      <p:sp>
+        <p:nvSpPr>
+          <p:cNvPr id="32" name="Rectangle 31"/>
+          <p:cNvSpPr/>
+          <p:nvPr/>
+        </p:nvSpPr>
+        <p:spPr>
+          <a:xfrm>
+            <a:off x="1714499" y="4753356"/>
+            <a:ext cx="9921240" cy="579120"/>
+          </a:xfrm>
+          <a:prstGeom prst="rect">
+            <a:avLst/>
+          </a:prstGeom>
+          <a:solidFill>
+            <a:srgbClr val="000000"/>
+          </a:solidFill>
+          <a:ln w="6350">
+            <a:solidFill>
+              <a:srgbClr val="000000"/>
+            </a:solidFill>
+          </a:ln>
+          <a:effectLst/>
+        </p:spPr>
+        <p:style>
+          <a:lnRef idx="1">
+            <a:schemeClr val="accent1"/>
+          </a:lnRef>
+          <a:fillRef idx="3">
+            <a:schemeClr val="accent1"/>
+          </a:fillRef>
+          <a:effectRef idx="2">
+            <a:schemeClr val="accent1"/>
+          </a:effectRef>
+          <a:fontRef idx="minor">
+            <a:schemeClr val="lt1"/>
+          </a:fontRef>
+        </p:style>
+        <p:txBody>
+          <a:bodyPr rtlCol="0" anchor="ctr"/>
+          <a:lstStyle/>
+          <a:p/>
+        </p:txBody>
+      </p:sp>
+      <p:sp>
+        <p:nvSpPr>
+          <p:cNvPr id="33" name="Rectangle 32"/>
+          <p:cNvSpPr/>
+          <p:nvPr/>
+        </p:nvSpPr>
+        <p:spPr>
+          <a:xfrm>
+            <a:off x="1645919" y="4684776"/>
+            <a:ext cx="9921240" cy="579120"/>
+          </a:xfrm>
+          <a:prstGeom prst="rect">
+            <a:avLst/>
+          </a:prstGeom>
+          <a:solidFill>
+            <a:srgbClr val="FFFDF7"/>
+          </a:solidFill>
+          <a:ln w="34925">
+            <a:solidFill>
+              <a:srgbClr val="000000"/>
+            </a:solidFill>
+          </a:ln>
+          <a:effectLst/>
+        </p:spPr>
+        <p:style>
+          <a:lnRef idx="1">
+            <a:schemeClr val="accent1"/>
+          </a:lnRef>
+          <a:fillRef idx="3">
+            <a:schemeClr val="accent1"/>
+          </a:fillRef>
+          <a:effectRef idx="2">
+            <a:schemeClr val="accent1"/>
+          </a:effectRef>
+          <a:fontRef idx="minor">
+            <a:schemeClr val="lt1"/>
+          </a:fontRef>
+        </p:style>
+        <p:txBody>
+          <a:bodyPr rtlCol="0" anchor="ctr"/>
+          <a:lstStyle/>
+          <a:p/>
+        </p:txBody>
+      </p:sp>
+      <p:sp>
+        <p:nvSpPr>
+          <p:cNvPr id="34" name="TextBox 33"/>
+          <p:cNvSpPr txBox="1"/>
+          <p:nvPr/>
+        </p:nvSpPr>
+        <p:spPr>
+          <a:xfrm>
+            <a:off x="1920240" y="4776215"/>
+            <a:ext cx="9372600" cy="396239"/>
+          </a:xfrm>
+          <a:prstGeom prst="rect">
+            <a:avLst/>
+          </a:prstGeom>
+          <a:noFill/>
+        </p:spPr>
+        <p:txBody>
+          <a:bodyPr wrap="square" lIns="0" rIns="0" tIns="0" bIns="0" anchor="ctr">
+            <a:spAutoFit/>
+          </a:bodyPr>
+          <a:lstStyle/>
+          <a:p>
+            <a:pPr algn="l">
+              <a:lnSpc>
+                <a:spcPct val="125000"/>
+              </a:lnSpc>
+            </a:pPr>
+            <a:r>
+              <a:rPr sz="1200">
+                <a:solidFill>
+                  <a:srgbClr val="000000"/>
+                </a:solidFill>
+                <a:latin typeface="Calibri"/>
+              </a:rPr>
+              <a:t>Refer to Di Mari and Yoo's Operative Design and Di Mari's Conditional Design; name the spatial operation your sequence explores.</a:t>
+            </a:r>
+          </a:p>
+        </p:txBody>
+      </p:sp>
+      <p:sp>
+        <p:nvSpPr>
+          <p:cNvPr id="35" name="Rectangle 34"/>
+          <p:cNvSpPr/>
+          <p:nvPr/>
+        </p:nvSpPr>
+        <p:spPr>
+          <a:xfrm>
+            <a:off x="662940" y="5478780"/>
+            <a:ext cx="777240" cy="579120"/>
+          </a:xfrm>
+          <a:prstGeom prst="rect">
+            <a:avLst/>
+          </a:prstGeom>
+          <a:solidFill>
+            <a:srgbClr val="000000"/>
+          </a:solidFill>
+          <a:ln w="6350">
+            <a:solidFill>
+              <a:srgbClr val="000000"/>
+            </a:solidFill>
+          </a:ln>
+          <a:effectLst/>
+        </p:spPr>
+        <p:style>
+          <a:lnRef idx="1">
+            <a:schemeClr val="accent1"/>
+          </a:lnRef>
+          <a:fillRef idx="3">
+            <a:schemeClr val="accent1"/>
+          </a:fillRef>
+          <a:effectRef idx="2">
+            <a:schemeClr val="accent1"/>
+          </a:effectRef>
+          <a:fontRef idx="minor">
+            <a:schemeClr val="lt1"/>
+          </a:fontRef>
+        </p:style>
+        <p:txBody>
+          <a:bodyPr rtlCol="0" anchor="ctr"/>
+          <a:lstStyle/>
+          <a:p/>
+        </p:txBody>
+      </p:sp>
+      <p:sp>
+        <p:nvSpPr>
+          <p:cNvPr id="36" name="Rectangle 35"/>
+          <p:cNvSpPr/>
+          <p:nvPr/>
+        </p:nvSpPr>
+        <p:spPr>
+          <a:xfrm>
+            <a:off x="594360" y="5410199"/>
+            <a:ext cx="777240" cy="579120"/>
+          </a:xfrm>
+          <a:prstGeom prst="rect">
+            <a:avLst/>
+          </a:prstGeom>
+          <a:solidFill>
+            <a:srgbClr val="C6F035"/>
+          </a:solidFill>
+          <a:ln w="34925">
+            <a:solidFill>
+              <a:srgbClr val="000000"/>
+            </a:solidFill>
+          </a:ln>
+          <a:effectLst/>
+        </p:spPr>
+        <p:style>
+          <a:lnRef idx="1">
+            <a:schemeClr val="accent1"/>
+          </a:lnRef>
+          <a:fillRef idx="3">
+            <a:schemeClr val="accent1"/>
+          </a:fillRef>
+          <a:effectRef idx="2">
+            <a:schemeClr val="accent1"/>
+          </a:effectRef>
+          <a:fontRef idx="minor">
+            <a:schemeClr val="lt1"/>
+          </a:fontRef>
+        </p:style>
+        <p:txBody>
+          <a:bodyPr rtlCol="0" anchor="ctr"/>
+          <a:lstStyle/>
+          <a:p/>
+        </p:txBody>
+      </p:sp>
+      <p:sp>
+        <p:nvSpPr>
+          <p:cNvPr id="37" name="TextBox 36"/>
+          <p:cNvSpPr txBox="1"/>
+          <p:nvPr/>
+        </p:nvSpPr>
+        <p:spPr>
+          <a:xfrm>
+            <a:off x="594360" y="5599176"/>
+            <a:ext cx="777240" cy="274320"/>
+          </a:xfrm>
+          <a:prstGeom prst="rect">
+            <a:avLst/>
+          </a:prstGeom>
+          <a:noFill/>
+        </p:spPr>
+        <p:txBody>
+          <a:bodyPr wrap="square" lIns="0" rIns="0" tIns="0" bIns="0" anchor="t">
+            <a:spAutoFit/>
+          </a:bodyPr>
+          <a:lstStyle/>
+          <a:p>
+            <a:pPr algn="ctr"/>
+            <a:r>
+              <a:rPr sz="1500" b="1">
+                <a:solidFill>
+                  <a:srgbClr val="000000"/>
+                </a:solidFill>
+                <a:latin typeface="Arial"/>
+              </a:rPr>
+              <a:t>06</a:t>
+            </a:r>
+          </a:p>
+        </p:txBody>
+      </p:sp>
+      <p:sp>
+        <p:nvSpPr>
+          <p:cNvPr id="38" name="Rectangle 37"/>
+          <p:cNvSpPr/>
+          <p:nvPr/>
+        </p:nvSpPr>
+        <p:spPr>
+          <a:xfrm>
+            <a:off x="1714499" y="5478780"/>
+            <a:ext cx="9921240" cy="579120"/>
+          </a:xfrm>
+          <a:prstGeom prst="rect">
+            <a:avLst/>
+          </a:prstGeom>
+          <a:solidFill>
+            <a:srgbClr val="000000"/>
+          </a:solidFill>
+          <a:ln w="6350">
+            <a:solidFill>
+              <a:srgbClr val="000000"/>
+            </a:solidFill>
+          </a:ln>
+          <a:effectLst/>
+        </p:spPr>
+        <p:style>
+          <a:lnRef idx="1">
+            <a:schemeClr val="accent1"/>
+          </a:lnRef>
+          <a:fillRef idx="3">
+            <a:schemeClr val="accent1"/>
+          </a:fillRef>
+          <a:effectRef idx="2">
+            <a:schemeClr val="accent1"/>
+          </a:effectRef>
+          <a:fontRef idx="minor">
+            <a:schemeClr val="lt1"/>
+          </a:fontRef>
+        </p:style>
+        <p:txBody>
+          <a:bodyPr rtlCol="0" anchor="ctr"/>
+          <a:lstStyle/>
+          <a:p/>
+        </p:txBody>
+      </p:sp>
+      <p:sp>
+        <p:nvSpPr>
+          <p:cNvPr id="39" name="Rectangle 38"/>
+          <p:cNvSpPr/>
+          <p:nvPr/>
+        </p:nvSpPr>
+        <p:spPr>
+          <a:xfrm>
+            <a:off x="1645919" y="5410199"/>
+            <a:ext cx="9921240" cy="579120"/>
+          </a:xfrm>
+          <a:prstGeom prst="rect">
+            <a:avLst/>
+          </a:prstGeom>
+          <a:solidFill>
+            <a:srgbClr val="FFFDF7"/>
+          </a:solidFill>
+          <a:ln w="34925">
+            <a:solidFill>
+              <a:srgbClr val="000000"/>
+            </a:solidFill>
+          </a:ln>
+          <a:effectLst/>
+        </p:spPr>
+        <p:style>
+          <a:lnRef idx="1">
+            <a:schemeClr val="accent1"/>
+          </a:lnRef>
+          <a:fillRef idx="3">
+            <a:schemeClr val="accent1"/>
+          </a:fillRef>
+          <a:effectRef idx="2">
+            <a:schemeClr val="accent1"/>
+          </a:effectRef>
+          <a:fontRef idx="minor">
+            <a:schemeClr val="lt1"/>
+          </a:fontRef>
+        </p:style>
+        <p:txBody>
+          <a:bodyPr rtlCol="0" anchor="ctr"/>
+          <a:lstStyle/>
+          <a:p/>
+        </p:txBody>
+      </p:sp>
+      <p:sp>
+        <p:nvSpPr>
+          <p:cNvPr id="40" name="TextBox 39"/>
+          <p:cNvSpPr txBox="1"/>
+          <p:nvPr/>
+        </p:nvSpPr>
+        <p:spPr>
+          <a:xfrm>
+            <a:off x="1920240" y="5501639"/>
+            <a:ext cx="9372600" cy="396239"/>
+          </a:xfrm>
+          <a:prstGeom prst="rect">
+            <a:avLst/>
+          </a:prstGeom>
+          <a:noFill/>
+        </p:spPr>
+        <p:txBody>
+          <a:bodyPr wrap="square" lIns="0" rIns="0" tIns="0" bIns="0" anchor="ctr">
+            <a:spAutoFit/>
+          </a:bodyPr>
+          <a:lstStyle/>
+          <a:p>
+            <a:pPr algn="l">
+              <a:lnSpc>
+                <a:spcPct val="125000"/>
+              </a:lnSpc>
+            </a:pPr>
+            <a:r>
+              <a:rPr sz="1200">
+                <a:solidFill>
+                  <a:srgbClr val="000000"/>
+                </a:solidFill>
+                <a:latin typeface="Calibri"/>
+              </a:rPr>
+              <a:t>Submit an editable graph with exposed inputs and all source operations intact.</a:t>
+            </a:r>
+          </a:p>
+        </p:txBody>
+      </p:sp>
+    </p:spTree>
+  </p:cSld>
+  <p:clrMapOvr>
+    <a:masterClrMapping/>
+  </p:clrMapOvr>
+</p:sld>
+</file>
+
+<file path=ppt/slides/slide11.xml><?xml version="1.0" encoding="utf-8"?>
 <p:sld xmlns:a="http://schemas.openxmlformats.org/drawingml/2006/main" xmlns:p="http://schemas.openxmlformats.org/presentationml/2006/main" xmlns:r="http://schemas.openxmlformats.org/officeDocument/2006/relationships">
   <p:cSld>
     <p:bg>
@@ -3742,7 +5383,7 @@
                 </a:solidFill>
                 <a:latin typeface="Calibri"/>
               </a:rPr>
-              <a:t>Rest of the session: a working graph with something you can change in front of me.</a:t>
+              <a:t>Rest of the class: a working graph with something you can change in front of me.</a:t>
             </a:r>
           </a:p>
         </p:txBody>
@@ -3988,7 +5629,7 @@
                 </a:solidFill>
                 <a:latin typeface="Calibri"/>
               </a:rPr>
-              <a:t>Object chosen — orthogonal massing, 5–10 clear moves, no complex curves</a:t>
+              <a:t>Object chosen — simple massing, eight or nine clear moves, no complex curves</a:t>
             </a:r>
           </a:p>
         </p:txBody>
@@ -4480,7 +6121,7 @@
                 </a:solidFill>
                 <a:latin typeface="Calibri"/>
               </a:rPr>
-              <a:t>At least one Boolean working, with the operands named</a:t>
+              <a:t>At least one Boolean working, with the kept and removed solids named</a:t>
             </a:r>
           </a:p>
         </p:txBody>
@@ -5108,7 +6749,7 @@
 </p:sld>
 </file>
 
-<file path=ppt/slides/slide11.xml><?xml version="1.0" encoding="utf-8"?>
+<file path=ppt/slides/slide12.xml><?xml version="1.0" encoding="utf-8"?>
 <p:sld xmlns:a="http://schemas.openxmlformats.org/drawingml/2006/main" xmlns:p="http://schemas.openxmlformats.org/presentationml/2006/main" xmlns:r="http://schemas.openxmlformats.org/officeDocument/2006/relationships">
   <p:cSld>
     <p:bg>
@@ -5323,7 +6964,7 @@
                 </a:solidFill>
                 <a:latin typeface="Arial"/>
               </a:rPr>
-              <a:t>WATCH</a:t>
+              <a:t>NEXT</a:t>
             </a:r>
           </a:p>
         </p:txBody>
@@ -5450,7 +7091,7 @@
                 </a:solidFill>
                 <a:latin typeface="Calibri"/>
               </a:rPr>
-              <a:t>U03 — Geometry from scratch. Point, line, edge, face, mesh, solid. The Blender lesson file for this one already exists; check the unit page.</a:t>
+              <a:t>WEEK 3 — Sep 8 — CSG continued, and 3D printing. P2b, the printed version of your CSG object, is issued.</a:t>
             </a:r>
           </a:p>
         </p:txBody>
@@ -5700,7 +7341,7 @@
                 </a:solidFill>
                 <a:latin typeface="Calibri"/>
               </a:rPr>
-              <a:t>Keep going on P1a. It is due Week 4 — eight or nine numbered diagrams, the last one developed in context, and the sequence written out as pseudocode.</a:t>
+              <a:t>Keep going on P2a, due WEEK 4 — Sep 15: eight or nine frames, the last one at building scale, and instructions with matching pseudocode beside them.</a:t>
             </a:r>
           </a:p>
         </p:txBody>
@@ -5823,7 +7464,7 @@
                 </a:solidFill>
                 <a:latin typeface="Arial"/>
               </a:rPr>
-              <a:t>WRITE</a:t>
+              <a:t>BRING</a:t>
             </a:r>
           </a:p>
         </p:txBody>
@@ -5950,7 +7591,7 @@
                 </a:solidFill>
                 <a:latin typeface="Calibri"/>
               </a:rPr>
-              <a:t>Your procedure as pseudocode, using the notation above. Read it aloud to someone who has not seen your model and fix what they cannot follow.</a:t>
+              <a:t>The editable file with its inputs exposed. Next class we check that the solid is closed and measure it for printing.</a:t>
             </a:r>
           </a:p>
         </p:txBody>
@@ -6073,7 +7714,7 @@
                 </a:solidFill>
                 <a:latin typeface="Arial"/>
               </a:rPr>
-              <a:t>BRING</a:t>
+              <a:t>READ</a:t>
             </a:r>
           </a:p>
         </p:txBody>
@@ -6200,257 +7841,7 @@
                 </a:solidFill>
                 <a:latin typeface="Calibri"/>
               </a:rPr>
-              <a:t>The editable file, and one question about something in it that behaves oddly.</a:t>
-            </a:r>
-          </a:p>
-        </p:txBody>
-      </p:sp>
-      <p:sp>
-        <p:nvSpPr>
-          <p:cNvPr id="28" name="Rectangle 27"/>
-          <p:cNvSpPr/>
-          <p:nvPr/>
-        </p:nvSpPr>
-        <p:spPr>
-          <a:xfrm>
-            <a:off x="662940" y="6094476"/>
-            <a:ext cx="1508760" cy="804672"/>
-          </a:xfrm>
-          <a:prstGeom prst="rect">
-            <a:avLst/>
-          </a:prstGeom>
-          <a:solidFill>
-            <a:srgbClr val="000000"/>
-          </a:solidFill>
-          <a:ln w="6350">
-            <a:solidFill>
-              <a:srgbClr val="000000"/>
-            </a:solidFill>
-          </a:ln>
-          <a:effectLst/>
-        </p:spPr>
-        <p:style>
-          <a:lnRef idx="1">
-            <a:schemeClr val="accent1"/>
-          </a:lnRef>
-          <a:fillRef idx="3">
-            <a:schemeClr val="accent1"/>
-          </a:fillRef>
-          <a:effectRef idx="2">
-            <a:schemeClr val="accent1"/>
-          </a:effectRef>
-          <a:fontRef idx="minor">
-            <a:schemeClr val="lt1"/>
-          </a:fontRef>
-        </p:style>
-        <p:txBody>
-          <a:bodyPr rtlCol="0" anchor="ctr"/>
-          <a:lstStyle/>
-          <a:p/>
-        </p:txBody>
-      </p:sp>
-      <p:sp>
-        <p:nvSpPr>
-          <p:cNvPr id="29" name="Rectangle 28"/>
-          <p:cNvSpPr/>
-          <p:nvPr/>
-        </p:nvSpPr>
-        <p:spPr>
-          <a:xfrm>
-            <a:off x="594360" y="6025896"/>
-            <a:ext cx="1508760" cy="804672"/>
-          </a:xfrm>
-          <a:prstGeom prst="rect">
-            <a:avLst/>
-          </a:prstGeom>
-          <a:solidFill>
-            <a:srgbClr val="00D9E1"/>
-          </a:solidFill>
-          <a:ln w="34925">
-            <a:solidFill>
-              <a:srgbClr val="000000"/>
-            </a:solidFill>
-          </a:ln>
-          <a:effectLst/>
-        </p:spPr>
-        <p:style>
-          <a:lnRef idx="1">
-            <a:schemeClr val="accent1"/>
-          </a:lnRef>
-          <a:fillRef idx="3">
-            <a:schemeClr val="accent1"/>
-          </a:fillRef>
-          <a:effectRef idx="2">
-            <a:schemeClr val="accent1"/>
-          </a:effectRef>
-          <a:fontRef idx="minor">
-            <a:schemeClr val="lt1"/>
-          </a:fontRef>
-        </p:style>
-        <p:txBody>
-          <a:bodyPr rtlCol="0" anchor="ctr"/>
-          <a:lstStyle/>
-          <a:p/>
-        </p:txBody>
-      </p:sp>
-      <p:sp>
-        <p:nvSpPr>
-          <p:cNvPr id="30" name="TextBox 29"/>
-          <p:cNvSpPr txBox="1"/>
-          <p:nvPr/>
-        </p:nvSpPr>
-        <p:spPr>
-          <a:xfrm>
-            <a:off x="594360" y="6327648"/>
-            <a:ext cx="1508760" cy="274320"/>
-          </a:xfrm>
-          <a:prstGeom prst="rect">
-            <a:avLst/>
-          </a:prstGeom>
-          <a:noFill/>
-        </p:spPr>
-        <p:txBody>
-          <a:bodyPr wrap="square" lIns="0" rIns="0" tIns="0" bIns="0" anchor="t">
-            <a:spAutoFit/>
-          </a:bodyPr>
-          <a:lstStyle/>
-          <a:p>
-            <a:pPr algn="ctr"/>
-            <a:r>
-              <a:rPr sz="1400" b="1">
-                <a:solidFill>
-                  <a:srgbClr val="000000"/>
-                </a:solidFill>
-                <a:latin typeface="Arial"/>
-              </a:rPr>
-              <a:t>READ</a:t>
-            </a:r>
-          </a:p>
-        </p:txBody>
-      </p:sp>
-      <p:sp>
-        <p:nvSpPr>
-          <p:cNvPr id="31" name="Rectangle 30"/>
-          <p:cNvSpPr/>
-          <p:nvPr/>
-        </p:nvSpPr>
-        <p:spPr>
-          <a:xfrm>
-            <a:off x="2446020" y="6094476"/>
-            <a:ext cx="9189720" cy="804672"/>
-          </a:xfrm>
-          <a:prstGeom prst="rect">
-            <a:avLst/>
-          </a:prstGeom>
-          <a:solidFill>
-            <a:srgbClr val="000000"/>
-          </a:solidFill>
-          <a:ln w="6350">
-            <a:solidFill>
-              <a:srgbClr val="000000"/>
-            </a:solidFill>
-          </a:ln>
-          <a:effectLst/>
-        </p:spPr>
-        <p:style>
-          <a:lnRef idx="1">
-            <a:schemeClr val="accent1"/>
-          </a:lnRef>
-          <a:fillRef idx="3">
-            <a:schemeClr val="accent1"/>
-          </a:fillRef>
-          <a:effectRef idx="2">
-            <a:schemeClr val="accent1"/>
-          </a:effectRef>
-          <a:fontRef idx="minor">
-            <a:schemeClr val="lt1"/>
-          </a:fontRef>
-        </p:style>
-        <p:txBody>
-          <a:bodyPr rtlCol="0" anchor="ctr"/>
-          <a:lstStyle/>
-          <a:p/>
-        </p:txBody>
-      </p:sp>
-      <p:sp>
-        <p:nvSpPr>
-          <p:cNvPr id="32" name="Rectangle 31"/>
-          <p:cNvSpPr/>
-          <p:nvPr/>
-        </p:nvSpPr>
-        <p:spPr>
-          <a:xfrm>
-            <a:off x="2377440" y="6025896"/>
-            <a:ext cx="9189720" cy="804672"/>
-          </a:xfrm>
-          <a:prstGeom prst="rect">
-            <a:avLst/>
-          </a:prstGeom>
-          <a:solidFill>
-            <a:srgbClr val="FFFDF7"/>
-          </a:solidFill>
-          <a:ln w="34925">
-            <a:solidFill>
-              <a:srgbClr val="000000"/>
-            </a:solidFill>
-          </a:ln>
-          <a:effectLst/>
-        </p:spPr>
-        <p:style>
-          <a:lnRef idx="1">
-            <a:schemeClr val="accent1"/>
-          </a:lnRef>
-          <a:fillRef idx="3">
-            <a:schemeClr val="accent1"/>
-          </a:fillRef>
-          <a:effectRef idx="2">
-            <a:schemeClr val="accent1"/>
-          </a:effectRef>
-          <a:fontRef idx="minor">
-            <a:schemeClr val="lt1"/>
-          </a:fontRef>
-        </p:style>
-        <p:txBody>
-          <a:bodyPr rtlCol="0" anchor="ctr"/>
-          <a:lstStyle/>
-          <a:p/>
-        </p:txBody>
-      </p:sp>
-      <p:sp>
-        <p:nvSpPr>
-          <p:cNvPr id="33" name="TextBox 32"/>
-          <p:cNvSpPr txBox="1"/>
-          <p:nvPr/>
-        </p:nvSpPr>
-        <p:spPr>
-          <a:xfrm>
-            <a:off x="2651760" y="6144768"/>
-            <a:ext cx="8641080" cy="566928"/>
-          </a:xfrm>
-          <a:prstGeom prst="rect">
-            <a:avLst/>
-          </a:prstGeom>
-          <a:noFill/>
-        </p:spPr>
-        <p:txBody>
-          <a:bodyPr wrap="square" lIns="0" rIns="0" tIns="0" bIns="0" anchor="t">
-            <a:spAutoFit/>
-          </a:bodyPr>
-          <a:lstStyle/>
-          <a:p>
-            <a:pPr algn="l">
-              <a:lnSpc>
-                <a:spcPct val="120000"/>
-              </a:lnSpc>
-            </a:pPr>
-            <a:r>
-              <a:rPr sz="1350">
-                <a:solidFill>
-                  <a:srgbClr val="000000"/>
-                </a:solidFill>
-                <a:latin typeface="Calibri"/>
-              </a:rPr>
-              <a:t>Di Mari and Yoo, Operative Design, and Di Mari, Conditional Design. Find the spatial verb your own sequence performs, and name it on the sheet.</a:t>
+              <a:t>Di Mari and Yoo, Operative Design, and Di Mari, Conditional Design. Find the spatial operation your own sequence explores, and name it on the sheet.</a:t>
             </a:r>
           </a:p>
         </p:txBody>
@@ -7034,7 +8425,7 @@
                 </a:solidFill>
                 <a:latin typeface="Calibri"/>
               </a:rPr>
-              <a:t>CUBE  +  SPHERE  →  SUBTRACT  →  RESULT</a:t>
+              <a:t>CUBE  +  SPHERE  →  DIFFERENCE  →  RESULT</a:t>
             </a:r>
           </a:p>
           <a:p>
@@ -7189,7 +8580,7 @@
                 </a:solidFill>
                 <a:latin typeface="Arial"/>
               </a:rPr>
-              <a:t>P1a REQUIRES YOUR OPERATION HISTORY TO BE INTACT. YOU WILL BE ASKED TO CHANGE A PARAMETER IN FRONT OF THE CLASS.</a:t>
+              <a:t>P2a REQUIRES YOUR OPERATION HISTORY TO BE INTACT. YOU WILL BE ASKED TO CHANGE A PARAMETER IN FRONT OF THE CLASS.</a:t>
             </a:r>
           </a:p>
         </p:txBody>
@@ -7496,7 +8887,7 @@
                 </a:solidFill>
                 <a:latin typeface="Arial"/>
               </a:rPr>
-              <a:t>MOVE</a:t>
+              <a:t>TRANSLATE</a:t>
             </a:r>
           </a:p>
         </p:txBody>
@@ -8492,7 +9883,7 @@
                 </a:solidFill>
                 <a:latin typeface="Arial"/>
               </a:rPr>
-              <a:t>Move and scale treat each coordinate on its own. Rotation is the only one where x and y have to talk to each other.</a:t>
+              <a:t>Translation and scale treat each coordinate on its own. Rotation is the only one where x and y have to talk to each other.</a:t>
             </a:r>
           </a:p>
         </p:txBody>
@@ -8632,7 +10023,7 @@
                 </a:solidFill>
                 <a:latin typeface="Calibri"/>
               </a:rPr>
-              <a:t>Everything in P1a is built from these, applied in order.</a:t>
+              <a:t>Everything in P2a is built from these, applied in order.</a:t>
             </a:r>
           </a:p>
         </p:txBody>
@@ -9517,7 +10908,7 @@
                 </a:solidFill>
                 <a:latin typeface="Calibri"/>
               </a:rPr>
-              <a:t>P1a asks for at least three Booleans, so one of them can be a reversed subtraction. Do it once deliberately and you will never confuse the operands again.</a:t>
+              <a:t>P2a asks for all three. In every subtraction, label the solid you keep and the solid you remove. Reverse one once, deliberately, and you will not confuse the operands again.</a:t>
             </a:r>
           </a:p>
         </p:txBody>
@@ -9657,7 +11048,7 @@
                 </a:solidFill>
                 <a:latin typeface="Calibri"/>
               </a:rPr>
-              <a:t>What we build together, in order, this session.</a:t>
+              <a:t>What we build together, in order, this class.</a:t>
             </a:r>
           </a:p>
         </p:txBody>
@@ -9907,7 +11298,7 @@
                 </a:solidFill>
                 <a:latin typeface="Calibri"/>
               </a:rPr>
-              <a:t>Introduce the node editor, inputs, outputs and parameters using one primitive.</a:t>
+              <a:t>Start with one primitive; identify node inputs, outputs and parameters.</a:t>
             </a:r>
           </a:p>
         </p:txBody>
@@ -10157,7 +11548,7 @@
                 </a:solidFill>
                 <a:latin typeface="Calibri"/>
               </a:rPr>
-              <a:t>Move, rotate and scale procedurally; change the order and compare the result.</a:t>
+              <a:t>Translate, rotate and scale. Change the order and compare results.</a:t>
             </a:r>
           </a:p>
         </p:txBody>
@@ -10407,7 +11798,7 @@
                 </a:solidFill>
                 <a:latin typeface="Calibri"/>
               </a:rPr>
-              <a:t>Compare union, difference and intersection between two solids, including reversing the subtraction.</a:t>
+              <a:t>Compare union, intersection and difference. Reverse a subtraction and explain what changes.</a:t>
             </a:r>
           </a:p>
         </p:txBody>
@@ -10657,7 +12048,7 @@
                 </a:solidFill>
                 <a:latin typeface="Calibri"/>
               </a:rPr>
-              <a:t>Expose useful inputs and compose a short massing sequence.</a:t>
+              <a:t>Expose useful inputs and build a short massing sequence.</a:t>
             </a:r>
           </a:p>
         </p:txBody>
@@ -10993,7 +12384,7 @@
           <a:p>
             <a:pPr algn="l">
               <a:lnSpc>
-                <a:spcPct val="135000"/>
+                <a:spcPct val="130000"/>
               </a:lnSpc>
             </a:pPr>
             <a:r>
@@ -11003,9 +12394,327 @@
                 </a:solidFill>
                 <a:latin typeface="Courier New"/>
               </a:rPr>
-              <a:t>box(x, y, z)      cylinder(r, h)</a:t>
-            </a:r>
-          </a:p>
+              <a:t>cube(size)        sphere(r)</a:t>
+            </a:r>
+          </a:p>
+          <a:p>
+            <a:pPr algn="l">
+              <a:lnSpc>
+                <a:spcPct val="130000"/>
+              </a:lnSpc>
+            </a:pPr>
+            <a:r>
+              <a:rPr sz="1200">
+                <a:solidFill>
+                  <a:srgbClr val="000000"/>
+                </a:solidFill>
+                <a:latin typeface="Courier New"/>
+              </a:rPr>
+              <a:t>cylinder(r, h)</a:t>
+            </a:r>
+          </a:p>
+          <a:p>
+            <a:pPr algn="l">
+              <a:lnSpc>
+                <a:spcPct val="130000"/>
+              </a:lnSpc>
+            </a:pPr>
+            <a:r>
+              <a:rPr sz="700">
+                <a:solidFill>
+                  <a:srgbClr val="000000"/>
+                </a:solidFill>
+                <a:latin typeface="Courier New"/>
+              </a:rPr>
+              <a:t> </a:t>
+            </a:r>
+          </a:p>
+          <a:p>
+            <a:pPr algn="l">
+              <a:lnSpc>
+                <a:spcPct val="130000"/>
+              </a:lnSpc>
+            </a:pPr>
+            <a:r>
+              <a:rPr sz="1200">
+                <a:solidFill>
+                  <a:srgbClr val="000000"/>
+                </a:solidFill>
+                <a:latin typeface="Courier New"/>
+              </a:rPr>
+              <a:t>translate(s, x, y, z)</a:t>
+            </a:r>
+          </a:p>
+          <a:p>
+            <a:pPr algn="l">
+              <a:lnSpc>
+                <a:spcPct val="130000"/>
+              </a:lnSpc>
+            </a:pPr>
+            <a:r>
+              <a:rPr sz="1200">
+                <a:solidFill>
+                  <a:srgbClr val="000000"/>
+                </a:solidFill>
+                <a:latin typeface="Courier New"/>
+              </a:rPr>
+              <a:t>rotate(s, x, y, z)    # degrees</a:t>
+            </a:r>
+          </a:p>
+          <a:p>
+            <a:pPr algn="l">
+              <a:lnSpc>
+                <a:spcPct val="130000"/>
+              </a:lnSpc>
+            </a:pPr>
+            <a:r>
+              <a:rPr sz="1200">
+                <a:solidFill>
+                  <a:srgbClr val="000000"/>
+                </a:solidFill>
+                <a:latin typeface="Courier New"/>
+              </a:rPr>
+              <a:t>scale(s, factor)</a:t>
+            </a:r>
+          </a:p>
+          <a:p>
+            <a:pPr algn="l">
+              <a:lnSpc>
+                <a:spcPct val="130000"/>
+              </a:lnSpc>
+            </a:pPr>
+            <a:r>
+              <a:rPr sz="700">
+                <a:solidFill>
+                  <a:srgbClr val="000000"/>
+                </a:solidFill>
+                <a:latin typeface="Courier New"/>
+              </a:rPr>
+              <a:t> </a:t>
+            </a:r>
+          </a:p>
+          <a:p>
+            <a:pPr algn="l">
+              <a:lnSpc>
+                <a:spcPct val="130000"/>
+              </a:lnSpc>
+            </a:pPr>
+            <a:r>
+              <a:rPr sz="1200">
+                <a:solidFill>
+                  <a:srgbClr val="000000"/>
+                </a:solidFill>
+                <a:latin typeface="Courier New"/>
+              </a:rPr>
+              <a:t>union(a, b)       intersection(a, b)</a:t>
+            </a:r>
+          </a:p>
+          <a:p>
+            <a:pPr algn="l">
+              <a:lnSpc>
+                <a:spcPct val="130000"/>
+              </a:lnSpc>
+            </a:pPr>
+            <a:r>
+              <a:rPr sz="1200">
+                <a:solidFill>
+                  <a:srgbClr val="000000"/>
+                </a:solidFill>
+                <a:latin typeface="Courier New"/>
+              </a:rPr>
+              <a:t>difference(keep, remove)</a:t>
+            </a:r>
+          </a:p>
+        </p:txBody>
+      </p:sp>
+      <p:sp>
+        <p:nvSpPr>
+          <p:cNvPr id="10" name="Rectangle 9"/>
+          <p:cNvSpPr/>
+          <p:nvPr/>
+        </p:nvSpPr>
+        <p:spPr>
+          <a:xfrm>
+            <a:off x="6103620" y="1851660"/>
+            <a:ext cx="5532120" cy="3200400"/>
+          </a:xfrm>
+          <a:prstGeom prst="rect">
+            <a:avLst/>
+          </a:prstGeom>
+          <a:solidFill>
+            <a:srgbClr val="000000"/>
+          </a:solidFill>
+          <a:ln w="6350">
+            <a:solidFill>
+              <a:srgbClr val="000000"/>
+            </a:solidFill>
+          </a:ln>
+          <a:effectLst/>
+        </p:spPr>
+        <p:style>
+          <a:lnRef idx="1">
+            <a:schemeClr val="accent1"/>
+          </a:lnRef>
+          <a:fillRef idx="3">
+            <a:schemeClr val="accent1"/>
+          </a:fillRef>
+          <a:effectRef idx="2">
+            <a:schemeClr val="accent1"/>
+          </a:effectRef>
+          <a:fontRef idx="minor">
+            <a:schemeClr val="lt1"/>
+          </a:fontRef>
+        </p:style>
+        <p:txBody>
+          <a:bodyPr rtlCol="0" anchor="ctr"/>
+          <a:lstStyle/>
+          <a:p/>
+        </p:txBody>
+      </p:sp>
+      <p:sp>
+        <p:nvSpPr>
+          <p:cNvPr id="11" name="Rectangle 10"/>
+          <p:cNvSpPr/>
+          <p:nvPr/>
+        </p:nvSpPr>
+        <p:spPr>
+          <a:xfrm>
+            <a:off x="6035040" y="1783080"/>
+            <a:ext cx="5532120" cy="3200400"/>
+          </a:xfrm>
+          <a:prstGeom prst="rect">
+            <a:avLst/>
+          </a:prstGeom>
+          <a:solidFill>
+            <a:srgbClr val="FFFDF7"/>
+          </a:solidFill>
+          <a:ln w="34925">
+            <a:solidFill>
+              <a:srgbClr val="000000"/>
+            </a:solidFill>
+          </a:ln>
+          <a:effectLst/>
+        </p:spPr>
+        <p:style>
+          <a:lnRef idx="1">
+            <a:schemeClr val="accent1"/>
+          </a:lnRef>
+          <a:fillRef idx="3">
+            <a:schemeClr val="accent1"/>
+          </a:fillRef>
+          <a:effectRef idx="2">
+            <a:schemeClr val="accent1"/>
+          </a:effectRef>
+          <a:fontRef idx="minor">
+            <a:schemeClr val="lt1"/>
+          </a:fontRef>
+        </p:style>
+        <p:txBody>
+          <a:bodyPr rtlCol="0" anchor="ctr"/>
+          <a:lstStyle/>
+          <a:p/>
+        </p:txBody>
+      </p:sp>
+      <p:sp>
+        <p:nvSpPr>
+          <p:cNvPr id="12" name="Rectangle 11"/>
+          <p:cNvSpPr/>
+          <p:nvPr/>
+        </p:nvSpPr>
+        <p:spPr>
+          <a:xfrm>
+            <a:off x="6035040" y="1783080"/>
+            <a:ext cx="5532120" cy="502920"/>
+          </a:xfrm>
+          <a:prstGeom prst="rect">
+            <a:avLst/>
+          </a:prstGeom>
+          <a:solidFill>
+            <a:srgbClr val="C6F035"/>
+          </a:solidFill>
+          <a:ln w="34925">
+            <a:solidFill>
+              <a:srgbClr val="000000"/>
+            </a:solidFill>
+          </a:ln>
+          <a:effectLst/>
+        </p:spPr>
+        <p:style>
+          <a:lnRef idx="1">
+            <a:schemeClr val="accent1"/>
+          </a:lnRef>
+          <a:fillRef idx="3">
+            <a:schemeClr val="accent1"/>
+          </a:fillRef>
+          <a:effectRef idx="2">
+            <a:schemeClr val="accent1"/>
+          </a:effectRef>
+          <a:fontRef idx="minor">
+            <a:schemeClr val="lt1"/>
+          </a:fontRef>
+        </p:style>
+        <p:txBody>
+          <a:bodyPr rtlCol="0" anchor="ctr"/>
+          <a:lstStyle/>
+          <a:p/>
+        </p:txBody>
+      </p:sp>
+      <p:sp>
+        <p:nvSpPr>
+          <p:cNvPr id="13" name="TextBox 12"/>
+          <p:cNvSpPr txBox="1"/>
+          <p:nvPr/>
+        </p:nvSpPr>
+        <p:spPr>
+          <a:xfrm>
+            <a:off x="6263640" y="1783080"/>
+            <a:ext cx="5074920" cy="502920"/>
+          </a:xfrm>
+          <a:prstGeom prst="rect">
+            <a:avLst/>
+          </a:prstGeom>
+          <a:noFill/>
+        </p:spPr>
+        <p:txBody>
+          <a:bodyPr wrap="square" lIns="0" rIns="0" tIns="0" bIns="0" anchor="ctr">
+            <a:spAutoFit/>
+          </a:bodyPr>
+          <a:lstStyle/>
+          <a:p>
+            <a:pPr algn="l"/>
+            <a:r>
+              <a:rPr sz="1587" b="1">
+                <a:solidFill>
+                  <a:srgbClr val="000000"/>
+                </a:solidFill>
+                <a:latin typeface="Arial"/>
+              </a:rPr>
+              <a:t>WORKED EXAMPLE</a:t>
+            </a:r>
+          </a:p>
+        </p:txBody>
+      </p:sp>
+      <p:sp>
+        <p:nvSpPr>
+          <p:cNvPr id="14" name="TextBox 13"/>
+          <p:cNvSpPr txBox="1"/>
+          <p:nvPr/>
+        </p:nvSpPr>
+        <p:spPr>
+          <a:xfrm>
+            <a:off x="6309360" y="2468880"/>
+            <a:ext cx="4983480" cy="2286000"/>
+          </a:xfrm>
+          <a:prstGeom prst="rect">
+            <a:avLst/>
+          </a:prstGeom>
+          <a:noFill/>
+        </p:spPr>
+        <p:txBody>
+          <a:bodyPr wrap="square" lIns="0" rIns="0" tIns="0" bIns="0" anchor="t">
+            <a:spAutoFit/>
+          </a:bodyPr>
+          <a:lstStyle/>
           <a:p>
             <a:pPr algn="l">
               <a:lnSpc>
@@ -11019,7 +12728,7 @@
                 </a:solidFill>
                 <a:latin typeface="Courier New"/>
               </a:rPr>
-              <a:t>sphere(r)         cone(r, h)</a:t>
+              <a:t>base   = cube(6)</a:t>
             </a:r>
           </a:p>
           <a:p>
@@ -11029,13 +12738,13 @@
               </a:lnSpc>
             </a:pPr>
             <a:r>
-              <a:rPr sz="700">
+              <a:rPr sz="1200">
                 <a:solidFill>
                   <a:srgbClr val="000000"/>
                 </a:solidFill>
                 <a:latin typeface="Courier New"/>
               </a:rPr>
-              <a:t> </a:t>
+              <a:t>tower  = cube(2)</a:t>
             </a:r>
           </a:p>
           <a:p>
@@ -11051,7 +12760,7 @@
                 </a:solidFill>
                 <a:latin typeface="Courier New"/>
               </a:rPr>
-              <a:t>move(s, x, y, z)  rotate(s, axis, deg)</a:t>
+              <a:t>tower  = scale(tower, 1.5)</a:t>
             </a:r>
           </a:p>
           <a:p>
@@ -11067,7 +12776,7 @@
                 </a:solidFill>
                 <a:latin typeface="Courier New"/>
               </a:rPr>
-              <a:t>scale(s, factor)</a:t>
+              <a:t>tower  = translate(tower, 2, 0, 4)</a:t>
             </a:r>
           </a:p>
           <a:p>
@@ -11077,13 +12786,13 @@
               </a:lnSpc>
             </a:pPr>
             <a:r>
-              <a:rPr sz="700">
+              <a:rPr sz="1200">
                 <a:solidFill>
                   <a:srgbClr val="000000"/>
                 </a:solidFill>
                 <a:latin typeface="Courier New"/>
               </a:rPr>
-              <a:t> </a:t>
+              <a:t>void   = cylinder(r=1, h=8)</a:t>
             </a:r>
           </a:p>
           <a:p>
@@ -11093,13 +12802,13 @@
               </a:lnSpc>
             </a:pPr>
             <a:r>
-              <a:rPr sz="1200">
+              <a:rPr sz="700">
                 <a:solidFill>
                   <a:srgbClr val="000000"/>
                 </a:solidFill>
                 <a:latin typeface="Courier New"/>
               </a:rPr>
-              <a:t>union(a, b)       subtract(a, b)</a:t>
+              <a:t> </a:t>
             </a:r>
           </a:p>
           <a:p>
@@ -11115,199 +12824,9 @@
                 </a:solidFill>
                 <a:latin typeface="Courier New"/>
               </a:rPr>
-              <a:t>intersect(a, b)</a:t>
-            </a:r>
-          </a:p>
-        </p:txBody>
-      </p:sp>
-      <p:sp>
-        <p:nvSpPr>
-          <p:cNvPr id="10" name="Rectangle 9"/>
-          <p:cNvSpPr/>
-          <p:nvPr/>
-        </p:nvSpPr>
-        <p:spPr>
-          <a:xfrm>
-            <a:off x="6103620" y="1851660"/>
-            <a:ext cx="5532120" cy="3200400"/>
-          </a:xfrm>
-          <a:prstGeom prst="rect">
-            <a:avLst/>
-          </a:prstGeom>
-          <a:solidFill>
-            <a:srgbClr val="000000"/>
-          </a:solidFill>
-          <a:ln w="6350">
-            <a:solidFill>
-              <a:srgbClr val="000000"/>
-            </a:solidFill>
-          </a:ln>
-          <a:effectLst/>
-        </p:spPr>
-        <p:style>
-          <a:lnRef idx="1">
-            <a:schemeClr val="accent1"/>
-          </a:lnRef>
-          <a:fillRef idx="3">
-            <a:schemeClr val="accent1"/>
-          </a:fillRef>
-          <a:effectRef idx="2">
-            <a:schemeClr val="accent1"/>
-          </a:effectRef>
-          <a:fontRef idx="minor">
-            <a:schemeClr val="lt1"/>
-          </a:fontRef>
-        </p:style>
-        <p:txBody>
-          <a:bodyPr rtlCol="0" anchor="ctr"/>
-          <a:lstStyle/>
-          <a:p/>
-        </p:txBody>
-      </p:sp>
-      <p:sp>
-        <p:nvSpPr>
-          <p:cNvPr id="11" name="Rectangle 10"/>
-          <p:cNvSpPr/>
-          <p:nvPr/>
-        </p:nvSpPr>
-        <p:spPr>
-          <a:xfrm>
-            <a:off x="6035040" y="1783080"/>
-            <a:ext cx="5532120" cy="3200400"/>
-          </a:xfrm>
-          <a:prstGeom prst="rect">
-            <a:avLst/>
-          </a:prstGeom>
-          <a:solidFill>
-            <a:srgbClr val="FFFDF7"/>
-          </a:solidFill>
-          <a:ln w="34925">
-            <a:solidFill>
-              <a:srgbClr val="000000"/>
-            </a:solidFill>
-          </a:ln>
-          <a:effectLst/>
-        </p:spPr>
-        <p:style>
-          <a:lnRef idx="1">
-            <a:schemeClr val="accent1"/>
-          </a:lnRef>
-          <a:fillRef idx="3">
-            <a:schemeClr val="accent1"/>
-          </a:fillRef>
-          <a:effectRef idx="2">
-            <a:schemeClr val="accent1"/>
-          </a:effectRef>
-          <a:fontRef idx="minor">
-            <a:schemeClr val="lt1"/>
-          </a:fontRef>
-        </p:style>
-        <p:txBody>
-          <a:bodyPr rtlCol="0" anchor="ctr"/>
-          <a:lstStyle/>
-          <a:p/>
-        </p:txBody>
-      </p:sp>
-      <p:sp>
-        <p:nvSpPr>
-          <p:cNvPr id="12" name="Rectangle 11"/>
-          <p:cNvSpPr/>
-          <p:nvPr/>
-        </p:nvSpPr>
-        <p:spPr>
-          <a:xfrm>
-            <a:off x="6035040" y="1783080"/>
-            <a:ext cx="5532120" cy="502920"/>
-          </a:xfrm>
-          <a:prstGeom prst="rect">
-            <a:avLst/>
-          </a:prstGeom>
-          <a:solidFill>
-            <a:srgbClr val="C6F035"/>
-          </a:solidFill>
-          <a:ln w="34925">
-            <a:solidFill>
-              <a:srgbClr val="000000"/>
-            </a:solidFill>
-          </a:ln>
-          <a:effectLst/>
-        </p:spPr>
-        <p:style>
-          <a:lnRef idx="1">
-            <a:schemeClr val="accent1"/>
-          </a:lnRef>
-          <a:fillRef idx="3">
-            <a:schemeClr val="accent1"/>
-          </a:fillRef>
-          <a:effectRef idx="2">
-            <a:schemeClr val="accent1"/>
-          </a:effectRef>
-          <a:fontRef idx="minor">
-            <a:schemeClr val="lt1"/>
-          </a:fontRef>
-        </p:style>
-        <p:txBody>
-          <a:bodyPr rtlCol="0" anchor="ctr"/>
-          <a:lstStyle/>
-          <a:p/>
-        </p:txBody>
-      </p:sp>
-      <p:sp>
-        <p:nvSpPr>
-          <p:cNvPr id="13" name="TextBox 12"/>
-          <p:cNvSpPr txBox="1"/>
-          <p:nvPr/>
-        </p:nvSpPr>
-        <p:spPr>
-          <a:xfrm>
-            <a:off x="6263640" y="1783080"/>
-            <a:ext cx="5074920" cy="502920"/>
-          </a:xfrm>
-          <a:prstGeom prst="rect">
-            <a:avLst/>
-          </a:prstGeom>
-          <a:noFill/>
-        </p:spPr>
-        <p:txBody>
-          <a:bodyPr wrap="square" lIns="0" rIns="0" tIns="0" bIns="0" anchor="ctr">
-            <a:spAutoFit/>
-          </a:bodyPr>
-          <a:lstStyle/>
-          <a:p>
-            <a:pPr algn="l"/>
-            <a:r>
-              <a:rPr sz="1587" b="1">
-                <a:solidFill>
-                  <a:srgbClr val="000000"/>
-                </a:solidFill>
-                <a:latin typeface="Arial"/>
-              </a:rPr>
-              <a:t>WORKED EXAMPLE</a:t>
-            </a:r>
-          </a:p>
-        </p:txBody>
-      </p:sp>
-      <p:sp>
-        <p:nvSpPr>
-          <p:cNvPr id="14" name="TextBox 13"/>
-          <p:cNvSpPr txBox="1"/>
-          <p:nvPr/>
-        </p:nvSpPr>
-        <p:spPr>
-          <a:xfrm>
-            <a:off x="6309360" y="2468880"/>
-            <a:ext cx="4983480" cy="2286000"/>
-          </a:xfrm>
-          <a:prstGeom prst="rect">
-            <a:avLst/>
-          </a:prstGeom>
-          <a:noFill/>
-        </p:spPr>
-        <p:txBody>
-          <a:bodyPr wrap="square" lIns="0" rIns="0" tIns="0" bIns="0" anchor="t">
-            <a:spAutoFit/>
-          </a:bodyPr>
-          <a:lstStyle/>
+              <a:t>mass   = union(base, tower)</a:t>
+            </a:r>
+          </a:p>
           <a:p>
             <a:pPr algn="l">
               <a:lnSpc>
@@ -11321,119 +12840,7 @@
                 </a:solidFill>
                 <a:latin typeface="Courier New"/>
               </a:rPr>
-              <a:t>base   = box(6, 4, 3)</a:t>
-            </a:r>
-          </a:p>
-          <a:p>
-            <a:pPr algn="l">
-              <a:lnSpc>
-                <a:spcPct val="135000"/>
-              </a:lnSpc>
-            </a:pPr>
-            <a:r>
-              <a:rPr sz="1200">
-                <a:solidFill>
-                  <a:srgbClr val="000000"/>
-                </a:solidFill>
-                <a:latin typeface="Courier New"/>
-              </a:rPr>
-              <a:t>tower  = box(2, 2, 6)</a:t>
-            </a:r>
-          </a:p>
-          <a:p>
-            <a:pPr algn="l">
-              <a:lnSpc>
-                <a:spcPct val="135000"/>
-              </a:lnSpc>
-            </a:pPr>
-            <a:r>
-              <a:rPr sz="1200">
-                <a:solidFill>
-                  <a:srgbClr val="000000"/>
-                </a:solidFill>
-                <a:latin typeface="Courier New"/>
-              </a:rPr>
-              <a:t>tower  = move(tower, 2, 0, 3)</a:t>
-            </a:r>
-          </a:p>
-          <a:p>
-            <a:pPr algn="l">
-              <a:lnSpc>
-                <a:spcPct val="135000"/>
-              </a:lnSpc>
-            </a:pPr>
-            <a:r>
-              <a:rPr sz="1200">
-                <a:solidFill>
-                  <a:srgbClr val="000000"/>
-                </a:solidFill>
-                <a:latin typeface="Courier New"/>
-              </a:rPr>
-              <a:t>void   = cylinder(r=1, h=5)</a:t>
-            </a:r>
-          </a:p>
-          <a:p>
-            <a:pPr algn="l">
-              <a:lnSpc>
-                <a:spcPct val="135000"/>
-              </a:lnSpc>
-            </a:pPr>
-            <a:r>
-              <a:rPr sz="1200">
-                <a:solidFill>
-                  <a:srgbClr val="000000"/>
-                </a:solidFill>
-                <a:latin typeface="Courier New"/>
-              </a:rPr>
-              <a:t>void   = move(void, -1.5, 0, 0)</a:t>
-            </a:r>
-          </a:p>
-          <a:p>
-            <a:pPr algn="l">
-              <a:lnSpc>
-                <a:spcPct val="135000"/>
-              </a:lnSpc>
-            </a:pPr>
-            <a:r>
-              <a:rPr sz="700">
-                <a:solidFill>
-                  <a:srgbClr val="000000"/>
-                </a:solidFill>
-                <a:latin typeface="Courier New"/>
-              </a:rPr>
-              <a:t> </a:t>
-            </a:r>
-          </a:p>
-          <a:p>
-            <a:pPr algn="l">
-              <a:lnSpc>
-                <a:spcPct val="135000"/>
-              </a:lnSpc>
-            </a:pPr>
-            <a:r>
-              <a:rPr sz="1200">
-                <a:solidFill>
-                  <a:srgbClr val="000000"/>
-                </a:solidFill>
-                <a:latin typeface="Courier New"/>
-              </a:rPr>
-              <a:t>mass   = union(base, tower)</a:t>
-            </a:r>
-          </a:p>
-          <a:p>
-            <a:pPr algn="l">
-              <a:lnSpc>
-                <a:spcPct val="135000"/>
-              </a:lnSpc>
-            </a:pPr>
-            <a:r>
-              <a:rPr sz="1200">
-                <a:solidFill>
-                  <a:srgbClr val="000000"/>
-                </a:solidFill>
-                <a:latin typeface="Courier New"/>
-              </a:rPr>
-              <a:t>result = subtract(mass, void)</a:t>
+              <a:t>result = difference(mass, void)</a:t>
             </a:r>
           </a:p>
         </p:txBody>
@@ -11556,7 +12963,7 @@
                 </a:solidFill>
                 <a:latin typeface="Arial"/>
               </a:rPr>
-              <a:t>THREE RULES: EVERY SHAPE IS BORN AT THE ORIGIN · UNITS ARE ABSTRACT · EVERY STEP ASSIGNS A NAME, SO A SUBTRACTION IS NEVER IN DOUBT.</a:t>
+              <a:t>THREE RULES: EVERY SHAPE STARTS AT THE ORIGIN · EVERY STEP ASSIGNS A NAME · EVERY DIFFERENCE NAMES WHAT IT KEEPS AND WHAT IT REMOVES.</a:t>
             </a:r>
           </a:p>
         </p:txBody>
@@ -12820,7 +14227,7 @@
                 </a:solidFill>
                 <a:latin typeface="Arial"/>
               </a:rPr>
-              <a:t>THIS IS THE NOTATION FROM THE LAST SLIDE, AND IT IS ALSO PYTHON. MORE ON THAT IN DECEMBER.</a:t>
+              <a:t>SAME NOTATION AS THE LAST SLIDE. NINE NUMBERED STEPS, NINE FRAMES — THAT IS YOUR P2a SHEET.</a:t>
             </a:r>
           </a:p>
         </p:txBody>
@@ -12834,6 +14241,2825 @@
 </file>
 
 <file path=ppt/slides/slide8.xml><?xml version="1.0" encoding="utf-8"?>
+<p:sld xmlns:a="http://schemas.openxmlformats.org/drawingml/2006/main" xmlns:p="http://schemas.openxmlformats.org/presentationml/2006/main" xmlns:r="http://schemas.openxmlformats.org/officeDocument/2006/relationships">
+  <p:cSld>
+    <p:bg>
+      <p:bgPr>
+        <a:solidFill>
+          <a:srgbClr val="FFFDF7"/>
+        </a:solidFill>
+        <a:effectLst/>
+      </p:bgPr>
+    </p:bg>
+    <p:spTree>
+      <p:nvGrpSpPr>
+        <p:cNvPr id="1" name=""/>
+        <p:cNvGrpSpPr/>
+        <p:nvPr/>
+      </p:nvGrpSpPr>
+      <p:grpSpPr/>
+      <p:sp>
+        <p:nvSpPr>
+          <p:cNvPr id="2" name="Rectangle 1"/>
+          <p:cNvSpPr/>
+          <p:nvPr/>
+        </p:nvSpPr>
+        <p:spPr>
+          <a:xfrm>
+            <a:off x="594360" y="566928"/>
+            <a:ext cx="10972800" cy="0"/>
+          </a:xfrm>
+          <a:prstGeom prst="rect">
+            <a:avLst/>
+          </a:prstGeom>
+          <a:noFill/>
+          <a:ln w="50800">
+            <a:solidFill>
+              <a:srgbClr val="000000"/>
+            </a:solidFill>
+          </a:ln>
+          <a:effectLst/>
+        </p:spPr>
+        <p:style>
+          <a:lnRef idx="1">
+            <a:schemeClr val="accent1"/>
+          </a:lnRef>
+          <a:fillRef idx="3">
+            <a:schemeClr val="accent1"/>
+          </a:fillRef>
+          <a:effectRef idx="2">
+            <a:schemeClr val="accent1"/>
+          </a:effectRef>
+          <a:fontRef idx="minor">
+            <a:schemeClr val="lt1"/>
+          </a:fontRef>
+        </p:style>
+        <p:txBody>
+          <a:bodyPr rtlCol="0" anchor="ctr"/>
+          <a:lstStyle/>
+          <a:p>
+            <a:pPr algn="ctr"/>
+          </a:p>
+        </p:txBody>
+      </p:sp>
+      <p:sp>
+        <p:nvSpPr>
+          <p:cNvPr id="3" name="TextBox 2"/>
+          <p:cNvSpPr txBox="1"/>
+          <p:nvPr/>
+        </p:nvSpPr>
+        <p:spPr>
+          <a:xfrm>
+            <a:off x="594360" y="676656"/>
+            <a:ext cx="10972800" cy="566928"/>
+          </a:xfrm>
+          <a:prstGeom prst="rect">
+            <a:avLst/>
+          </a:prstGeom>
+          <a:noFill/>
+        </p:spPr>
+        <p:txBody>
+          <a:bodyPr wrap="square" lIns="0" rIns="0" tIns="0" bIns="0" anchor="t">
+            <a:spAutoFit/>
+          </a:bodyPr>
+          <a:lstStyle/>
+          <a:p>
+            <a:pPr algn="l"/>
+            <a:r>
+              <a:rPr sz="3000" b="1">
+                <a:solidFill>
+                  <a:srgbClr val="000000"/>
+                </a:solidFill>
+                <a:latin typeface="Arial"/>
+              </a:rPr>
+              <a:t>HOW TO DRAW A BIG-STYLE PROCESS DIAGRAM</a:t>
+            </a:r>
+          </a:p>
+        </p:txBody>
+      </p:sp>
+      <p:sp>
+        <p:nvSpPr>
+          <p:cNvPr id="4" name="TextBox 3"/>
+          <p:cNvSpPr txBox="1"/>
+          <p:nvPr/>
+        </p:nvSpPr>
+        <p:spPr>
+          <a:xfrm>
+            <a:off x="594360" y="1261872"/>
+            <a:ext cx="10972800" cy="310896"/>
+          </a:xfrm>
+          <a:prstGeom prst="rect">
+            <a:avLst/>
+          </a:prstGeom>
+          <a:noFill/>
+        </p:spPr>
+        <p:txBody>
+          <a:bodyPr wrap="square" lIns="0" rIns="0" tIns="0" bIns="0" anchor="t">
+            <a:spAutoFit/>
+          </a:bodyPr>
+          <a:lstStyle/>
+          <a:p>
+            <a:pPr algn="l"/>
+            <a:r>
+              <a:rPr sz="1350">
+                <a:solidFill>
+                  <a:srgbClr val="6B6B6B"/>
+                </a:solidFill>
+                <a:latin typeface="Calibri"/>
+              </a:rPr>
+              <a:t>Explain the building as a row of simple moves: one move per frame, read left to right.</a:t>
+            </a:r>
+          </a:p>
+        </p:txBody>
+      </p:sp>
+      <p:sp>
+        <p:nvSpPr>
+          <p:cNvPr id="5" name="Rectangle 4"/>
+          <p:cNvSpPr/>
+          <p:nvPr/>
+        </p:nvSpPr>
+        <p:spPr>
+          <a:xfrm>
+            <a:off x="662940" y="1851660"/>
+            <a:ext cx="1828800" cy="1417320"/>
+          </a:xfrm>
+          <a:prstGeom prst="rect">
+            <a:avLst/>
+          </a:prstGeom>
+          <a:solidFill>
+            <a:srgbClr val="000000"/>
+          </a:solidFill>
+          <a:ln w="6350">
+            <a:solidFill>
+              <a:srgbClr val="000000"/>
+            </a:solidFill>
+          </a:ln>
+          <a:effectLst/>
+        </p:spPr>
+        <p:style>
+          <a:lnRef idx="1">
+            <a:schemeClr val="accent1"/>
+          </a:lnRef>
+          <a:fillRef idx="3">
+            <a:schemeClr val="accent1"/>
+          </a:fillRef>
+          <a:effectRef idx="2">
+            <a:schemeClr val="accent1"/>
+          </a:effectRef>
+          <a:fontRef idx="minor">
+            <a:schemeClr val="lt1"/>
+          </a:fontRef>
+        </p:style>
+        <p:txBody>
+          <a:bodyPr rtlCol="0" anchor="ctr"/>
+          <a:lstStyle/>
+          <a:p/>
+        </p:txBody>
+      </p:sp>
+      <p:sp>
+        <p:nvSpPr>
+          <p:cNvPr id="6" name="Rectangle 5"/>
+          <p:cNvSpPr/>
+          <p:nvPr/>
+        </p:nvSpPr>
+        <p:spPr>
+          <a:xfrm>
+            <a:off x="594360" y="1783080"/>
+            <a:ext cx="1828800" cy="1417320"/>
+          </a:xfrm>
+          <a:prstGeom prst="rect">
+            <a:avLst/>
+          </a:prstGeom>
+          <a:solidFill>
+            <a:srgbClr val="FFFDF7"/>
+          </a:solidFill>
+          <a:ln w="25400">
+            <a:solidFill>
+              <a:srgbClr val="000000"/>
+            </a:solidFill>
+          </a:ln>
+          <a:effectLst/>
+        </p:spPr>
+        <p:style>
+          <a:lnRef idx="1">
+            <a:schemeClr val="accent1"/>
+          </a:lnRef>
+          <a:fillRef idx="3">
+            <a:schemeClr val="accent1"/>
+          </a:fillRef>
+          <a:effectRef idx="2">
+            <a:schemeClr val="accent1"/>
+          </a:effectRef>
+          <a:fontRef idx="minor">
+            <a:schemeClr val="lt1"/>
+          </a:fontRef>
+        </p:style>
+        <p:txBody>
+          <a:bodyPr rtlCol="0" anchor="ctr"/>
+          <a:lstStyle/>
+          <a:p/>
+        </p:txBody>
+      </p:sp>
+      <p:sp>
+        <p:nvSpPr>
+          <p:cNvPr id="7" name="Rectangle 6"/>
+          <p:cNvSpPr/>
+          <p:nvPr/>
+        </p:nvSpPr>
+        <p:spPr>
+          <a:xfrm>
+            <a:off x="731520" y="2971800"/>
+            <a:ext cx="1554480" cy="0"/>
+          </a:xfrm>
+          <a:prstGeom prst="rect">
+            <a:avLst/>
+          </a:prstGeom>
+          <a:noFill/>
+          <a:ln w="19050">
+            <a:solidFill>
+              <a:srgbClr val="6B6B6B"/>
+            </a:solidFill>
+          </a:ln>
+          <a:effectLst/>
+        </p:spPr>
+        <p:style>
+          <a:lnRef idx="1">
+            <a:schemeClr val="accent1"/>
+          </a:lnRef>
+          <a:fillRef idx="3">
+            <a:schemeClr val="accent1"/>
+          </a:fillRef>
+          <a:effectRef idx="2">
+            <a:schemeClr val="accent1"/>
+          </a:effectRef>
+          <a:fontRef idx="minor">
+            <a:schemeClr val="lt1"/>
+          </a:fontRef>
+        </p:style>
+        <p:txBody>
+          <a:bodyPr rtlCol="0" anchor="ctr"/>
+          <a:lstStyle/>
+          <a:p>
+            <a:pPr algn="ctr"/>
+          </a:p>
+        </p:txBody>
+      </p:sp>
+      <p:sp>
+        <p:nvSpPr>
+          <p:cNvPr id="8" name="Rectangle 7"/>
+          <p:cNvSpPr/>
+          <p:nvPr/>
+        </p:nvSpPr>
+        <p:spPr>
+          <a:xfrm>
+            <a:off x="1005840" y="2468880"/>
+            <a:ext cx="1005840" cy="502920"/>
+          </a:xfrm>
+          <a:prstGeom prst="rect">
+            <a:avLst/>
+          </a:prstGeom>
+          <a:solidFill>
+            <a:srgbClr val="00D9E1"/>
+          </a:solidFill>
+          <a:ln w="25400">
+            <a:solidFill>
+              <a:srgbClr val="000000"/>
+            </a:solidFill>
+          </a:ln>
+          <a:effectLst/>
+        </p:spPr>
+        <p:style>
+          <a:lnRef idx="1">
+            <a:schemeClr val="accent1"/>
+          </a:lnRef>
+          <a:fillRef idx="3">
+            <a:schemeClr val="accent1"/>
+          </a:fillRef>
+          <a:effectRef idx="2">
+            <a:schemeClr val="accent1"/>
+          </a:effectRef>
+          <a:fontRef idx="minor">
+            <a:schemeClr val="lt1"/>
+          </a:fontRef>
+        </p:style>
+        <p:txBody>
+          <a:bodyPr rtlCol="0" anchor="ctr"/>
+          <a:lstStyle/>
+          <a:p/>
+        </p:txBody>
+      </p:sp>
+      <p:sp>
+        <p:nvSpPr>
+          <p:cNvPr id="9" name="Rectangle 8"/>
+          <p:cNvSpPr/>
+          <p:nvPr/>
+        </p:nvSpPr>
+        <p:spPr>
+          <a:xfrm>
+            <a:off x="594360" y="3310128"/>
+            <a:ext cx="1828800" cy="365760"/>
+          </a:xfrm>
+          <a:prstGeom prst="rect">
+            <a:avLst/>
+          </a:prstGeom>
+          <a:solidFill>
+            <a:srgbClr val="FFE500"/>
+          </a:solidFill>
+          <a:ln w="34925">
+            <a:solidFill>
+              <a:srgbClr val="000000"/>
+            </a:solidFill>
+          </a:ln>
+          <a:effectLst/>
+        </p:spPr>
+        <p:style>
+          <a:lnRef idx="1">
+            <a:schemeClr val="accent1"/>
+          </a:lnRef>
+          <a:fillRef idx="3">
+            <a:schemeClr val="accent1"/>
+          </a:fillRef>
+          <a:effectRef idx="2">
+            <a:schemeClr val="accent1"/>
+          </a:effectRef>
+          <a:fontRef idx="minor">
+            <a:schemeClr val="lt1"/>
+          </a:fontRef>
+        </p:style>
+        <p:txBody>
+          <a:bodyPr rtlCol="0" anchor="ctr"/>
+          <a:lstStyle/>
+          <a:p/>
+        </p:txBody>
+      </p:sp>
+      <p:sp>
+        <p:nvSpPr>
+          <p:cNvPr id="10" name="TextBox 9"/>
+          <p:cNvSpPr txBox="1"/>
+          <p:nvPr/>
+        </p:nvSpPr>
+        <p:spPr>
+          <a:xfrm>
+            <a:off x="594360" y="3392424"/>
+            <a:ext cx="1828800" cy="274320"/>
+          </a:xfrm>
+          <a:prstGeom prst="rect">
+            <a:avLst/>
+          </a:prstGeom>
+          <a:noFill/>
+        </p:spPr>
+        <p:txBody>
+          <a:bodyPr wrap="square" lIns="0" rIns="0" tIns="0" bIns="0" anchor="t">
+            <a:spAutoFit/>
+          </a:bodyPr>
+          <a:lstStyle/>
+          <a:p>
+            <a:pPr algn="ctr"/>
+            <a:r>
+              <a:rPr sz="1100" b="1">
+                <a:solidFill>
+                  <a:srgbClr val="000000"/>
+                </a:solidFill>
+                <a:latin typeface="Arial"/>
+              </a:rPr>
+              <a:t>01  PLACE</a:t>
+            </a:r>
+          </a:p>
+        </p:txBody>
+      </p:sp>
+      <p:sp>
+        <p:nvSpPr>
+          <p:cNvPr id="11" name="Right Arrow 10"/>
+          <p:cNvSpPr/>
+          <p:nvPr/>
+        </p:nvSpPr>
+        <p:spPr>
+          <a:xfrm>
+            <a:off x="2514600" y="2354580"/>
+            <a:ext cx="274320" cy="274320"/>
+          </a:xfrm>
+          <a:prstGeom prst="rightArrow">
+            <a:avLst/>
+          </a:prstGeom>
+          <a:solidFill>
+            <a:srgbClr val="000000"/>
+          </a:solidFill>
+          <a:ln>
+            <a:noFill/>
+          </a:ln>
+          <a:effectLst/>
+        </p:spPr>
+        <p:style>
+          <a:lnRef idx="1">
+            <a:schemeClr val="accent1"/>
+          </a:lnRef>
+          <a:fillRef idx="3">
+            <a:schemeClr val="accent1"/>
+          </a:fillRef>
+          <a:effectRef idx="2">
+            <a:schemeClr val="accent1"/>
+          </a:effectRef>
+          <a:fontRef idx="minor">
+            <a:schemeClr val="lt1"/>
+          </a:fontRef>
+        </p:style>
+        <p:txBody>
+          <a:bodyPr rtlCol="0" anchor="ctr"/>
+          <a:lstStyle/>
+          <a:p/>
+        </p:txBody>
+      </p:sp>
+      <p:sp>
+        <p:nvSpPr>
+          <p:cNvPr id="12" name="Rectangle 11"/>
+          <p:cNvSpPr/>
+          <p:nvPr/>
+        </p:nvSpPr>
+        <p:spPr>
+          <a:xfrm>
+            <a:off x="2948940" y="1851660"/>
+            <a:ext cx="1828800" cy="1417320"/>
+          </a:xfrm>
+          <a:prstGeom prst="rect">
+            <a:avLst/>
+          </a:prstGeom>
+          <a:solidFill>
+            <a:srgbClr val="000000"/>
+          </a:solidFill>
+          <a:ln w="6350">
+            <a:solidFill>
+              <a:srgbClr val="000000"/>
+            </a:solidFill>
+          </a:ln>
+          <a:effectLst/>
+        </p:spPr>
+        <p:style>
+          <a:lnRef idx="1">
+            <a:schemeClr val="accent1"/>
+          </a:lnRef>
+          <a:fillRef idx="3">
+            <a:schemeClr val="accent1"/>
+          </a:fillRef>
+          <a:effectRef idx="2">
+            <a:schemeClr val="accent1"/>
+          </a:effectRef>
+          <a:fontRef idx="minor">
+            <a:schemeClr val="lt1"/>
+          </a:fontRef>
+        </p:style>
+        <p:txBody>
+          <a:bodyPr rtlCol="0" anchor="ctr"/>
+          <a:lstStyle/>
+          <a:p/>
+        </p:txBody>
+      </p:sp>
+      <p:sp>
+        <p:nvSpPr>
+          <p:cNvPr id="13" name="Rectangle 12"/>
+          <p:cNvSpPr/>
+          <p:nvPr/>
+        </p:nvSpPr>
+        <p:spPr>
+          <a:xfrm>
+            <a:off x="2880360" y="1783080"/>
+            <a:ext cx="1828800" cy="1417320"/>
+          </a:xfrm>
+          <a:prstGeom prst="rect">
+            <a:avLst/>
+          </a:prstGeom>
+          <a:solidFill>
+            <a:srgbClr val="FFFDF7"/>
+          </a:solidFill>
+          <a:ln w="25400">
+            <a:solidFill>
+              <a:srgbClr val="000000"/>
+            </a:solidFill>
+          </a:ln>
+          <a:effectLst/>
+        </p:spPr>
+        <p:style>
+          <a:lnRef idx="1">
+            <a:schemeClr val="accent1"/>
+          </a:lnRef>
+          <a:fillRef idx="3">
+            <a:schemeClr val="accent1"/>
+          </a:fillRef>
+          <a:effectRef idx="2">
+            <a:schemeClr val="accent1"/>
+          </a:effectRef>
+          <a:fontRef idx="minor">
+            <a:schemeClr val="lt1"/>
+          </a:fontRef>
+        </p:style>
+        <p:txBody>
+          <a:bodyPr rtlCol="0" anchor="ctr"/>
+          <a:lstStyle/>
+          <a:p/>
+        </p:txBody>
+      </p:sp>
+      <p:sp>
+        <p:nvSpPr>
+          <p:cNvPr id="14" name="Rectangle 13"/>
+          <p:cNvSpPr/>
+          <p:nvPr/>
+        </p:nvSpPr>
+        <p:spPr>
+          <a:xfrm>
+            <a:off x="3017520" y="2971800"/>
+            <a:ext cx="1554480" cy="0"/>
+          </a:xfrm>
+          <a:prstGeom prst="rect">
+            <a:avLst/>
+          </a:prstGeom>
+          <a:noFill/>
+          <a:ln w="19050">
+            <a:solidFill>
+              <a:srgbClr val="6B6B6B"/>
+            </a:solidFill>
+          </a:ln>
+          <a:effectLst/>
+        </p:spPr>
+        <p:style>
+          <a:lnRef idx="1">
+            <a:schemeClr val="accent1"/>
+          </a:lnRef>
+          <a:fillRef idx="3">
+            <a:schemeClr val="accent1"/>
+          </a:fillRef>
+          <a:effectRef idx="2">
+            <a:schemeClr val="accent1"/>
+          </a:effectRef>
+          <a:fontRef idx="minor">
+            <a:schemeClr val="lt1"/>
+          </a:fontRef>
+        </p:style>
+        <p:txBody>
+          <a:bodyPr rtlCol="0" anchor="ctr"/>
+          <a:lstStyle/>
+          <a:p>
+            <a:pPr algn="ctr"/>
+          </a:p>
+        </p:txBody>
+      </p:sp>
+      <p:sp>
+        <p:nvSpPr>
+          <p:cNvPr id="15" name="Rectangle 14"/>
+          <p:cNvSpPr/>
+          <p:nvPr/>
+        </p:nvSpPr>
+        <p:spPr>
+          <a:xfrm>
+            <a:off x="3291840" y="2468880"/>
+            <a:ext cx="1005840" cy="502920"/>
+          </a:xfrm>
+          <a:prstGeom prst="rect">
+            <a:avLst/>
+          </a:prstGeom>
+          <a:solidFill>
+            <a:srgbClr val="F4F4EE"/>
+          </a:solidFill>
+          <a:ln w="25400">
+            <a:solidFill>
+              <a:srgbClr val="000000"/>
+            </a:solidFill>
+          </a:ln>
+          <a:effectLst/>
+        </p:spPr>
+        <p:style>
+          <a:lnRef idx="1">
+            <a:schemeClr val="accent1"/>
+          </a:lnRef>
+          <a:fillRef idx="3">
+            <a:schemeClr val="accent1"/>
+          </a:fillRef>
+          <a:effectRef idx="2">
+            <a:schemeClr val="accent1"/>
+          </a:effectRef>
+          <a:fontRef idx="minor">
+            <a:schemeClr val="lt1"/>
+          </a:fontRef>
+        </p:style>
+        <p:txBody>
+          <a:bodyPr rtlCol="0" anchor="ctr"/>
+          <a:lstStyle/>
+          <a:p/>
+        </p:txBody>
+      </p:sp>
+      <p:sp>
+        <p:nvSpPr>
+          <p:cNvPr id="16" name="Rectangle 15"/>
+          <p:cNvSpPr/>
+          <p:nvPr/>
+        </p:nvSpPr>
+        <p:spPr>
+          <a:xfrm>
+            <a:off x="3566160" y="2057400"/>
+            <a:ext cx="457200" cy="411480"/>
+          </a:xfrm>
+          <a:prstGeom prst="rect">
+            <a:avLst/>
+          </a:prstGeom>
+          <a:solidFill>
+            <a:srgbClr val="00D9E1"/>
+          </a:solidFill>
+          <a:ln w="25400">
+            <a:solidFill>
+              <a:srgbClr val="000000"/>
+            </a:solidFill>
+          </a:ln>
+          <a:effectLst/>
+        </p:spPr>
+        <p:style>
+          <a:lnRef idx="1">
+            <a:schemeClr val="accent1"/>
+          </a:lnRef>
+          <a:fillRef idx="3">
+            <a:schemeClr val="accent1"/>
+          </a:fillRef>
+          <a:effectRef idx="2">
+            <a:schemeClr val="accent1"/>
+          </a:effectRef>
+          <a:fontRef idx="minor">
+            <a:schemeClr val="lt1"/>
+          </a:fontRef>
+        </p:style>
+        <p:txBody>
+          <a:bodyPr rtlCol="0" anchor="ctr"/>
+          <a:lstStyle/>
+          <a:p/>
+        </p:txBody>
+      </p:sp>
+      <p:sp>
+        <p:nvSpPr>
+          <p:cNvPr id="17" name="Rectangle 16"/>
+          <p:cNvSpPr/>
+          <p:nvPr/>
+        </p:nvSpPr>
+        <p:spPr>
+          <a:xfrm>
+            <a:off x="2880360" y="3310128"/>
+            <a:ext cx="1828800" cy="365760"/>
+          </a:xfrm>
+          <a:prstGeom prst="rect">
+            <a:avLst/>
+          </a:prstGeom>
+          <a:solidFill>
+            <a:srgbClr val="FFE500"/>
+          </a:solidFill>
+          <a:ln w="34925">
+            <a:solidFill>
+              <a:srgbClr val="000000"/>
+            </a:solidFill>
+          </a:ln>
+          <a:effectLst/>
+        </p:spPr>
+        <p:style>
+          <a:lnRef idx="1">
+            <a:schemeClr val="accent1"/>
+          </a:lnRef>
+          <a:fillRef idx="3">
+            <a:schemeClr val="accent1"/>
+          </a:fillRef>
+          <a:effectRef idx="2">
+            <a:schemeClr val="accent1"/>
+          </a:effectRef>
+          <a:fontRef idx="minor">
+            <a:schemeClr val="lt1"/>
+          </a:fontRef>
+        </p:style>
+        <p:txBody>
+          <a:bodyPr rtlCol="0" anchor="ctr"/>
+          <a:lstStyle/>
+          <a:p/>
+        </p:txBody>
+      </p:sp>
+      <p:sp>
+        <p:nvSpPr>
+          <p:cNvPr id="18" name="TextBox 17"/>
+          <p:cNvSpPr txBox="1"/>
+          <p:nvPr/>
+        </p:nvSpPr>
+        <p:spPr>
+          <a:xfrm>
+            <a:off x="2880360" y="3392424"/>
+            <a:ext cx="1828800" cy="274320"/>
+          </a:xfrm>
+          <a:prstGeom prst="rect">
+            <a:avLst/>
+          </a:prstGeom>
+          <a:noFill/>
+        </p:spPr>
+        <p:txBody>
+          <a:bodyPr wrap="square" lIns="0" rIns="0" tIns="0" bIns="0" anchor="t">
+            <a:spAutoFit/>
+          </a:bodyPr>
+          <a:lstStyle/>
+          <a:p>
+            <a:pPr algn="ctr"/>
+            <a:r>
+              <a:rPr sz="1100" b="1">
+                <a:solidFill>
+                  <a:srgbClr val="000000"/>
+                </a:solidFill>
+                <a:latin typeface="Arial"/>
+              </a:rPr>
+              <a:t>02  STACK</a:t>
+            </a:r>
+          </a:p>
+        </p:txBody>
+      </p:sp>
+      <p:sp>
+        <p:nvSpPr>
+          <p:cNvPr id="19" name="Right Arrow 18"/>
+          <p:cNvSpPr/>
+          <p:nvPr/>
+        </p:nvSpPr>
+        <p:spPr>
+          <a:xfrm>
+            <a:off x="4800600" y="2354580"/>
+            <a:ext cx="274320" cy="274320"/>
+          </a:xfrm>
+          <a:prstGeom prst="rightArrow">
+            <a:avLst/>
+          </a:prstGeom>
+          <a:solidFill>
+            <a:srgbClr val="000000"/>
+          </a:solidFill>
+          <a:ln>
+            <a:noFill/>
+          </a:ln>
+          <a:effectLst/>
+        </p:spPr>
+        <p:style>
+          <a:lnRef idx="1">
+            <a:schemeClr val="accent1"/>
+          </a:lnRef>
+          <a:fillRef idx="3">
+            <a:schemeClr val="accent1"/>
+          </a:fillRef>
+          <a:effectRef idx="2">
+            <a:schemeClr val="accent1"/>
+          </a:effectRef>
+          <a:fontRef idx="minor">
+            <a:schemeClr val="lt1"/>
+          </a:fontRef>
+        </p:style>
+        <p:txBody>
+          <a:bodyPr rtlCol="0" anchor="ctr"/>
+          <a:lstStyle/>
+          <a:p/>
+        </p:txBody>
+      </p:sp>
+      <p:sp>
+        <p:nvSpPr>
+          <p:cNvPr id="20" name="Rectangle 19"/>
+          <p:cNvSpPr/>
+          <p:nvPr/>
+        </p:nvSpPr>
+        <p:spPr>
+          <a:xfrm>
+            <a:off x="5234940" y="1851660"/>
+            <a:ext cx="1828800" cy="1417320"/>
+          </a:xfrm>
+          <a:prstGeom prst="rect">
+            <a:avLst/>
+          </a:prstGeom>
+          <a:solidFill>
+            <a:srgbClr val="000000"/>
+          </a:solidFill>
+          <a:ln w="6350">
+            <a:solidFill>
+              <a:srgbClr val="000000"/>
+            </a:solidFill>
+          </a:ln>
+          <a:effectLst/>
+        </p:spPr>
+        <p:style>
+          <a:lnRef idx="1">
+            <a:schemeClr val="accent1"/>
+          </a:lnRef>
+          <a:fillRef idx="3">
+            <a:schemeClr val="accent1"/>
+          </a:fillRef>
+          <a:effectRef idx="2">
+            <a:schemeClr val="accent1"/>
+          </a:effectRef>
+          <a:fontRef idx="minor">
+            <a:schemeClr val="lt1"/>
+          </a:fontRef>
+        </p:style>
+        <p:txBody>
+          <a:bodyPr rtlCol="0" anchor="ctr"/>
+          <a:lstStyle/>
+          <a:p/>
+        </p:txBody>
+      </p:sp>
+      <p:sp>
+        <p:nvSpPr>
+          <p:cNvPr id="21" name="Rectangle 20"/>
+          <p:cNvSpPr/>
+          <p:nvPr/>
+        </p:nvSpPr>
+        <p:spPr>
+          <a:xfrm>
+            <a:off x="5166360" y="1783080"/>
+            <a:ext cx="1828800" cy="1417320"/>
+          </a:xfrm>
+          <a:prstGeom prst="rect">
+            <a:avLst/>
+          </a:prstGeom>
+          <a:solidFill>
+            <a:srgbClr val="FFFDF7"/>
+          </a:solidFill>
+          <a:ln w="25400">
+            <a:solidFill>
+              <a:srgbClr val="000000"/>
+            </a:solidFill>
+          </a:ln>
+          <a:effectLst/>
+        </p:spPr>
+        <p:style>
+          <a:lnRef idx="1">
+            <a:schemeClr val="accent1"/>
+          </a:lnRef>
+          <a:fillRef idx="3">
+            <a:schemeClr val="accent1"/>
+          </a:fillRef>
+          <a:effectRef idx="2">
+            <a:schemeClr val="accent1"/>
+          </a:effectRef>
+          <a:fontRef idx="minor">
+            <a:schemeClr val="lt1"/>
+          </a:fontRef>
+        </p:style>
+        <p:txBody>
+          <a:bodyPr rtlCol="0" anchor="ctr"/>
+          <a:lstStyle/>
+          <a:p/>
+        </p:txBody>
+      </p:sp>
+      <p:sp>
+        <p:nvSpPr>
+          <p:cNvPr id="22" name="Rectangle 21"/>
+          <p:cNvSpPr/>
+          <p:nvPr/>
+        </p:nvSpPr>
+        <p:spPr>
+          <a:xfrm>
+            <a:off x="5303520" y="2971800"/>
+            <a:ext cx="1554480" cy="0"/>
+          </a:xfrm>
+          <a:prstGeom prst="rect">
+            <a:avLst/>
+          </a:prstGeom>
+          <a:noFill/>
+          <a:ln w="19050">
+            <a:solidFill>
+              <a:srgbClr val="6B6B6B"/>
+            </a:solidFill>
+          </a:ln>
+          <a:effectLst/>
+        </p:spPr>
+        <p:style>
+          <a:lnRef idx="1">
+            <a:schemeClr val="accent1"/>
+          </a:lnRef>
+          <a:fillRef idx="3">
+            <a:schemeClr val="accent1"/>
+          </a:fillRef>
+          <a:effectRef idx="2">
+            <a:schemeClr val="accent1"/>
+          </a:effectRef>
+          <a:fontRef idx="minor">
+            <a:schemeClr val="lt1"/>
+          </a:fontRef>
+        </p:style>
+        <p:txBody>
+          <a:bodyPr rtlCol="0" anchor="ctr"/>
+          <a:lstStyle/>
+          <a:p>
+            <a:pPr algn="ctr"/>
+          </a:p>
+        </p:txBody>
+      </p:sp>
+      <p:sp>
+        <p:nvSpPr>
+          <p:cNvPr id="23" name="Rectangle 22"/>
+          <p:cNvSpPr/>
+          <p:nvPr/>
+        </p:nvSpPr>
+        <p:spPr>
+          <a:xfrm>
+            <a:off x="5577840" y="2468880"/>
+            <a:ext cx="1005840" cy="502920"/>
+          </a:xfrm>
+          <a:prstGeom prst="rect">
+            <a:avLst/>
+          </a:prstGeom>
+          <a:solidFill>
+            <a:srgbClr val="F4F4EE"/>
+          </a:solidFill>
+          <a:ln w="25400">
+            <a:solidFill>
+              <a:srgbClr val="000000"/>
+            </a:solidFill>
+          </a:ln>
+          <a:effectLst/>
+        </p:spPr>
+        <p:style>
+          <a:lnRef idx="1">
+            <a:schemeClr val="accent1"/>
+          </a:lnRef>
+          <a:fillRef idx="3">
+            <a:schemeClr val="accent1"/>
+          </a:fillRef>
+          <a:effectRef idx="2">
+            <a:schemeClr val="accent1"/>
+          </a:effectRef>
+          <a:fontRef idx="minor">
+            <a:schemeClr val="lt1"/>
+          </a:fontRef>
+        </p:style>
+        <p:txBody>
+          <a:bodyPr rtlCol="0" anchor="ctr"/>
+          <a:lstStyle/>
+          <a:p/>
+        </p:txBody>
+      </p:sp>
+      <p:sp>
+        <p:nvSpPr>
+          <p:cNvPr id="24" name="Rectangle 23"/>
+          <p:cNvSpPr/>
+          <p:nvPr/>
+        </p:nvSpPr>
+        <p:spPr>
+          <a:xfrm>
+            <a:off x="5852160" y="2057400"/>
+            <a:ext cx="457200" cy="411480"/>
+          </a:xfrm>
+          <a:prstGeom prst="rect">
+            <a:avLst/>
+          </a:prstGeom>
+          <a:noFill/>
+          <a:ln w="15875">
+            <a:solidFill>
+              <a:srgbClr val="B4B4AC"/>
+            </a:solidFill>
+          </a:ln>
+          <a:effectLst/>
+        </p:spPr>
+        <p:style>
+          <a:lnRef idx="1">
+            <a:schemeClr val="accent1"/>
+          </a:lnRef>
+          <a:fillRef idx="3">
+            <a:schemeClr val="accent1"/>
+          </a:fillRef>
+          <a:effectRef idx="2">
+            <a:schemeClr val="accent1"/>
+          </a:effectRef>
+          <a:fontRef idx="minor">
+            <a:schemeClr val="lt1"/>
+          </a:fontRef>
+        </p:style>
+        <p:txBody>
+          <a:bodyPr rtlCol="0" anchor="ctr"/>
+          <a:lstStyle/>
+          <a:p/>
+        </p:txBody>
+      </p:sp>
+      <p:sp>
+        <p:nvSpPr>
+          <p:cNvPr id="25" name="Rectangle 24"/>
+          <p:cNvSpPr/>
+          <p:nvPr/>
+        </p:nvSpPr>
+        <p:spPr>
+          <a:xfrm>
+            <a:off x="6126480" y="2057400"/>
+            <a:ext cx="457200" cy="411480"/>
+          </a:xfrm>
+          <a:prstGeom prst="rect">
+            <a:avLst/>
+          </a:prstGeom>
+          <a:solidFill>
+            <a:srgbClr val="00D9E1"/>
+          </a:solidFill>
+          <a:ln w="25400">
+            <a:solidFill>
+              <a:srgbClr val="000000"/>
+            </a:solidFill>
+          </a:ln>
+          <a:effectLst/>
+        </p:spPr>
+        <p:style>
+          <a:lnRef idx="1">
+            <a:schemeClr val="accent1"/>
+          </a:lnRef>
+          <a:fillRef idx="3">
+            <a:schemeClr val="accent1"/>
+          </a:fillRef>
+          <a:effectRef idx="2">
+            <a:schemeClr val="accent1"/>
+          </a:effectRef>
+          <a:fontRef idx="minor">
+            <a:schemeClr val="lt1"/>
+          </a:fontRef>
+        </p:style>
+        <p:txBody>
+          <a:bodyPr rtlCol="0" anchor="ctr"/>
+          <a:lstStyle/>
+          <a:p/>
+        </p:txBody>
+      </p:sp>
+      <p:sp>
+        <p:nvSpPr>
+          <p:cNvPr id="26" name="Rectangle 25"/>
+          <p:cNvSpPr/>
+          <p:nvPr/>
+        </p:nvSpPr>
+        <p:spPr>
+          <a:xfrm>
+            <a:off x="5166360" y="3310128"/>
+            <a:ext cx="1828800" cy="365760"/>
+          </a:xfrm>
+          <a:prstGeom prst="rect">
+            <a:avLst/>
+          </a:prstGeom>
+          <a:solidFill>
+            <a:srgbClr val="FFE500"/>
+          </a:solidFill>
+          <a:ln w="34925">
+            <a:solidFill>
+              <a:srgbClr val="000000"/>
+            </a:solidFill>
+          </a:ln>
+          <a:effectLst/>
+        </p:spPr>
+        <p:style>
+          <a:lnRef idx="1">
+            <a:schemeClr val="accent1"/>
+          </a:lnRef>
+          <a:fillRef idx="3">
+            <a:schemeClr val="accent1"/>
+          </a:fillRef>
+          <a:effectRef idx="2">
+            <a:schemeClr val="accent1"/>
+          </a:effectRef>
+          <a:fontRef idx="minor">
+            <a:schemeClr val="lt1"/>
+          </a:fontRef>
+        </p:style>
+        <p:txBody>
+          <a:bodyPr rtlCol="0" anchor="ctr"/>
+          <a:lstStyle/>
+          <a:p/>
+        </p:txBody>
+      </p:sp>
+      <p:sp>
+        <p:nvSpPr>
+          <p:cNvPr id="27" name="TextBox 26"/>
+          <p:cNvSpPr txBox="1"/>
+          <p:nvPr/>
+        </p:nvSpPr>
+        <p:spPr>
+          <a:xfrm>
+            <a:off x="5166360" y="3392424"/>
+            <a:ext cx="1828800" cy="274320"/>
+          </a:xfrm>
+          <a:prstGeom prst="rect">
+            <a:avLst/>
+          </a:prstGeom>
+          <a:noFill/>
+        </p:spPr>
+        <p:txBody>
+          <a:bodyPr wrap="square" lIns="0" rIns="0" tIns="0" bIns="0" anchor="t">
+            <a:spAutoFit/>
+          </a:bodyPr>
+          <a:lstStyle/>
+          <a:p>
+            <a:pPr algn="ctr"/>
+            <a:r>
+              <a:rPr sz="1100" b="1">
+                <a:solidFill>
+                  <a:srgbClr val="000000"/>
+                </a:solidFill>
+                <a:latin typeface="Arial"/>
+              </a:rPr>
+              <a:t>03  SHIFT</a:t>
+            </a:r>
+          </a:p>
+        </p:txBody>
+      </p:sp>
+      <p:sp>
+        <p:nvSpPr>
+          <p:cNvPr id="28" name="Right Arrow 27"/>
+          <p:cNvSpPr/>
+          <p:nvPr/>
+        </p:nvSpPr>
+        <p:spPr>
+          <a:xfrm>
+            <a:off x="7086600" y="2354580"/>
+            <a:ext cx="274320" cy="274320"/>
+          </a:xfrm>
+          <a:prstGeom prst="rightArrow">
+            <a:avLst/>
+          </a:prstGeom>
+          <a:solidFill>
+            <a:srgbClr val="000000"/>
+          </a:solidFill>
+          <a:ln>
+            <a:noFill/>
+          </a:ln>
+          <a:effectLst/>
+        </p:spPr>
+        <p:style>
+          <a:lnRef idx="1">
+            <a:schemeClr val="accent1"/>
+          </a:lnRef>
+          <a:fillRef idx="3">
+            <a:schemeClr val="accent1"/>
+          </a:fillRef>
+          <a:effectRef idx="2">
+            <a:schemeClr val="accent1"/>
+          </a:effectRef>
+          <a:fontRef idx="minor">
+            <a:schemeClr val="lt1"/>
+          </a:fontRef>
+        </p:style>
+        <p:txBody>
+          <a:bodyPr rtlCol="0" anchor="ctr"/>
+          <a:lstStyle/>
+          <a:p/>
+        </p:txBody>
+      </p:sp>
+      <p:sp>
+        <p:nvSpPr>
+          <p:cNvPr id="29" name="Rectangle 28"/>
+          <p:cNvSpPr/>
+          <p:nvPr/>
+        </p:nvSpPr>
+        <p:spPr>
+          <a:xfrm>
+            <a:off x="7520940" y="1851660"/>
+            <a:ext cx="1828800" cy="1417320"/>
+          </a:xfrm>
+          <a:prstGeom prst="rect">
+            <a:avLst/>
+          </a:prstGeom>
+          <a:solidFill>
+            <a:srgbClr val="000000"/>
+          </a:solidFill>
+          <a:ln w="6350">
+            <a:solidFill>
+              <a:srgbClr val="000000"/>
+            </a:solidFill>
+          </a:ln>
+          <a:effectLst/>
+        </p:spPr>
+        <p:style>
+          <a:lnRef idx="1">
+            <a:schemeClr val="accent1"/>
+          </a:lnRef>
+          <a:fillRef idx="3">
+            <a:schemeClr val="accent1"/>
+          </a:fillRef>
+          <a:effectRef idx="2">
+            <a:schemeClr val="accent1"/>
+          </a:effectRef>
+          <a:fontRef idx="minor">
+            <a:schemeClr val="lt1"/>
+          </a:fontRef>
+        </p:style>
+        <p:txBody>
+          <a:bodyPr rtlCol="0" anchor="ctr"/>
+          <a:lstStyle/>
+          <a:p/>
+        </p:txBody>
+      </p:sp>
+      <p:sp>
+        <p:nvSpPr>
+          <p:cNvPr id="30" name="Rectangle 29"/>
+          <p:cNvSpPr/>
+          <p:nvPr/>
+        </p:nvSpPr>
+        <p:spPr>
+          <a:xfrm>
+            <a:off x="7452360" y="1783080"/>
+            <a:ext cx="1828800" cy="1417320"/>
+          </a:xfrm>
+          <a:prstGeom prst="rect">
+            <a:avLst/>
+          </a:prstGeom>
+          <a:solidFill>
+            <a:srgbClr val="FFFDF7"/>
+          </a:solidFill>
+          <a:ln w="25400">
+            <a:solidFill>
+              <a:srgbClr val="000000"/>
+            </a:solidFill>
+          </a:ln>
+          <a:effectLst/>
+        </p:spPr>
+        <p:style>
+          <a:lnRef idx="1">
+            <a:schemeClr val="accent1"/>
+          </a:lnRef>
+          <a:fillRef idx="3">
+            <a:schemeClr val="accent1"/>
+          </a:fillRef>
+          <a:effectRef idx="2">
+            <a:schemeClr val="accent1"/>
+          </a:effectRef>
+          <a:fontRef idx="minor">
+            <a:schemeClr val="lt1"/>
+          </a:fontRef>
+        </p:style>
+        <p:txBody>
+          <a:bodyPr rtlCol="0" anchor="ctr"/>
+          <a:lstStyle/>
+          <a:p/>
+        </p:txBody>
+      </p:sp>
+      <p:sp>
+        <p:nvSpPr>
+          <p:cNvPr id="31" name="Rectangle 30"/>
+          <p:cNvSpPr/>
+          <p:nvPr/>
+        </p:nvSpPr>
+        <p:spPr>
+          <a:xfrm>
+            <a:off x="7589520" y="2971800"/>
+            <a:ext cx="1554480" cy="0"/>
+          </a:xfrm>
+          <a:prstGeom prst="rect">
+            <a:avLst/>
+          </a:prstGeom>
+          <a:noFill/>
+          <a:ln w="19050">
+            <a:solidFill>
+              <a:srgbClr val="6B6B6B"/>
+            </a:solidFill>
+          </a:ln>
+          <a:effectLst/>
+        </p:spPr>
+        <p:style>
+          <a:lnRef idx="1">
+            <a:schemeClr val="accent1"/>
+          </a:lnRef>
+          <a:fillRef idx="3">
+            <a:schemeClr val="accent1"/>
+          </a:fillRef>
+          <a:effectRef idx="2">
+            <a:schemeClr val="accent1"/>
+          </a:effectRef>
+          <a:fontRef idx="minor">
+            <a:schemeClr val="lt1"/>
+          </a:fontRef>
+        </p:style>
+        <p:txBody>
+          <a:bodyPr rtlCol="0" anchor="ctr"/>
+          <a:lstStyle/>
+          <a:p>
+            <a:pPr algn="ctr"/>
+          </a:p>
+        </p:txBody>
+      </p:sp>
+      <p:sp>
+        <p:nvSpPr>
+          <p:cNvPr id="32" name="Rectangle 31"/>
+          <p:cNvSpPr/>
+          <p:nvPr/>
+        </p:nvSpPr>
+        <p:spPr>
+          <a:xfrm>
+            <a:off x="7863840" y="2468880"/>
+            <a:ext cx="1005840" cy="502920"/>
+          </a:xfrm>
+          <a:prstGeom prst="rect">
+            <a:avLst/>
+          </a:prstGeom>
+          <a:solidFill>
+            <a:srgbClr val="F4F4EE"/>
+          </a:solidFill>
+          <a:ln w="25400">
+            <a:solidFill>
+              <a:srgbClr val="000000"/>
+            </a:solidFill>
+          </a:ln>
+          <a:effectLst/>
+        </p:spPr>
+        <p:style>
+          <a:lnRef idx="1">
+            <a:schemeClr val="accent1"/>
+          </a:lnRef>
+          <a:fillRef idx="3">
+            <a:schemeClr val="accent1"/>
+          </a:fillRef>
+          <a:effectRef idx="2">
+            <a:schemeClr val="accent1"/>
+          </a:effectRef>
+          <a:fontRef idx="minor">
+            <a:schemeClr val="lt1"/>
+          </a:fontRef>
+        </p:style>
+        <p:txBody>
+          <a:bodyPr rtlCol="0" anchor="ctr"/>
+          <a:lstStyle/>
+          <a:p/>
+        </p:txBody>
+      </p:sp>
+      <p:sp>
+        <p:nvSpPr>
+          <p:cNvPr id="33" name="Rectangle 32"/>
+          <p:cNvSpPr/>
+          <p:nvPr/>
+        </p:nvSpPr>
+        <p:spPr>
+          <a:xfrm>
+            <a:off x="8412480" y="2057400"/>
+            <a:ext cx="457200" cy="411480"/>
+          </a:xfrm>
+          <a:prstGeom prst="rect">
+            <a:avLst/>
+          </a:prstGeom>
+          <a:solidFill>
+            <a:srgbClr val="F4F4EE"/>
+          </a:solidFill>
+          <a:ln w="25400">
+            <a:solidFill>
+              <a:srgbClr val="000000"/>
+            </a:solidFill>
+          </a:ln>
+          <a:effectLst/>
+        </p:spPr>
+        <p:style>
+          <a:lnRef idx="1">
+            <a:schemeClr val="accent1"/>
+          </a:lnRef>
+          <a:fillRef idx="3">
+            <a:schemeClr val="accent1"/>
+          </a:fillRef>
+          <a:effectRef idx="2">
+            <a:schemeClr val="accent1"/>
+          </a:effectRef>
+          <a:fontRef idx="minor">
+            <a:schemeClr val="lt1"/>
+          </a:fontRef>
+        </p:style>
+        <p:txBody>
+          <a:bodyPr rtlCol="0" anchor="ctr"/>
+          <a:lstStyle/>
+          <a:p/>
+        </p:txBody>
+      </p:sp>
+      <p:sp>
+        <p:nvSpPr>
+          <p:cNvPr id="34" name="Rectangle 33"/>
+          <p:cNvSpPr/>
+          <p:nvPr/>
+        </p:nvSpPr>
+        <p:spPr>
+          <a:xfrm>
+            <a:off x="7754112" y="2679192"/>
+            <a:ext cx="457200" cy="292608"/>
+          </a:xfrm>
+          <a:prstGeom prst="rect">
+            <a:avLst/>
+          </a:prstGeom>
+          <a:solidFill>
+            <a:srgbClr val="FF4D8D"/>
+          </a:solidFill>
+          <a:ln w="25400">
+            <a:solidFill>
+              <a:srgbClr val="000000"/>
+            </a:solidFill>
+          </a:ln>
+          <a:effectLst/>
+        </p:spPr>
+        <p:style>
+          <a:lnRef idx="1">
+            <a:schemeClr val="accent1"/>
+          </a:lnRef>
+          <a:fillRef idx="3">
+            <a:schemeClr val="accent1"/>
+          </a:fillRef>
+          <a:effectRef idx="2">
+            <a:schemeClr val="accent1"/>
+          </a:effectRef>
+          <a:fontRef idx="minor">
+            <a:schemeClr val="lt1"/>
+          </a:fontRef>
+        </p:style>
+        <p:txBody>
+          <a:bodyPr rtlCol="0" anchor="ctr"/>
+          <a:lstStyle/>
+          <a:p/>
+        </p:txBody>
+      </p:sp>
+      <p:sp>
+        <p:nvSpPr>
+          <p:cNvPr id="35" name="Rectangle 34"/>
+          <p:cNvSpPr/>
+          <p:nvPr/>
+        </p:nvSpPr>
+        <p:spPr>
+          <a:xfrm>
+            <a:off x="7452360" y="3310128"/>
+            <a:ext cx="1828800" cy="365760"/>
+          </a:xfrm>
+          <a:prstGeom prst="rect">
+            <a:avLst/>
+          </a:prstGeom>
+          <a:solidFill>
+            <a:srgbClr val="FFE500"/>
+          </a:solidFill>
+          <a:ln w="34925">
+            <a:solidFill>
+              <a:srgbClr val="000000"/>
+            </a:solidFill>
+          </a:ln>
+          <a:effectLst/>
+        </p:spPr>
+        <p:style>
+          <a:lnRef idx="1">
+            <a:schemeClr val="accent1"/>
+          </a:lnRef>
+          <a:fillRef idx="3">
+            <a:schemeClr val="accent1"/>
+          </a:fillRef>
+          <a:effectRef idx="2">
+            <a:schemeClr val="accent1"/>
+          </a:effectRef>
+          <a:fontRef idx="minor">
+            <a:schemeClr val="lt1"/>
+          </a:fontRef>
+        </p:style>
+        <p:txBody>
+          <a:bodyPr rtlCol="0" anchor="ctr"/>
+          <a:lstStyle/>
+          <a:p/>
+        </p:txBody>
+      </p:sp>
+      <p:sp>
+        <p:nvSpPr>
+          <p:cNvPr id="36" name="TextBox 35"/>
+          <p:cNvSpPr txBox="1"/>
+          <p:nvPr/>
+        </p:nvSpPr>
+        <p:spPr>
+          <a:xfrm>
+            <a:off x="7452360" y="3392424"/>
+            <a:ext cx="1828800" cy="274320"/>
+          </a:xfrm>
+          <a:prstGeom prst="rect">
+            <a:avLst/>
+          </a:prstGeom>
+          <a:noFill/>
+        </p:spPr>
+        <p:txBody>
+          <a:bodyPr wrap="square" lIns="0" rIns="0" tIns="0" bIns="0" anchor="t">
+            <a:spAutoFit/>
+          </a:bodyPr>
+          <a:lstStyle/>
+          <a:p>
+            <a:pPr algn="ctr"/>
+            <a:r>
+              <a:rPr sz="1100" b="1">
+                <a:solidFill>
+                  <a:srgbClr val="000000"/>
+                </a:solidFill>
+                <a:latin typeface="Arial"/>
+              </a:rPr>
+              <a:t>04  CARVE</a:t>
+            </a:r>
+          </a:p>
+        </p:txBody>
+      </p:sp>
+      <p:sp>
+        <p:nvSpPr>
+          <p:cNvPr id="37" name="Right Arrow 36"/>
+          <p:cNvSpPr/>
+          <p:nvPr/>
+        </p:nvSpPr>
+        <p:spPr>
+          <a:xfrm>
+            <a:off x="9372600" y="2354580"/>
+            <a:ext cx="274320" cy="274320"/>
+          </a:xfrm>
+          <a:prstGeom prst="rightArrow">
+            <a:avLst/>
+          </a:prstGeom>
+          <a:solidFill>
+            <a:srgbClr val="000000"/>
+          </a:solidFill>
+          <a:ln>
+            <a:noFill/>
+          </a:ln>
+          <a:effectLst/>
+        </p:spPr>
+        <p:style>
+          <a:lnRef idx="1">
+            <a:schemeClr val="accent1"/>
+          </a:lnRef>
+          <a:fillRef idx="3">
+            <a:schemeClr val="accent1"/>
+          </a:fillRef>
+          <a:effectRef idx="2">
+            <a:schemeClr val="accent1"/>
+          </a:effectRef>
+          <a:fontRef idx="minor">
+            <a:schemeClr val="lt1"/>
+          </a:fontRef>
+        </p:style>
+        <p:txBody>
+          <a:bodyPr rtlCol="0" anchor="ctr"/>
+          <a:lstStyle/>
+          <a:p/>
+        </p:txBody>
+      </p:sp>
+      <p:sp>
+        <p:nvSpPr>
+          <p:cNvPr id="38" name="Rectangle 37"/>
+          <p:cNvSpPr/>
+          <p:nvPr/>
+        </p:nvSpPr>
+        <p:spPr>
+          <a:xfrm>
+            <a:off x="9806940" y="1851660"/>
+            <a:ext cx="1828800" cy="1417320"/>
+          </a:xfrm>
+          <a:prstGeom prst="rect">
+            <a:avLst/>
+          </a:prstGeom>
+          <a:solidFill>
+            <a:srgbClr val="000000"/>
+          </a:solidFill>
+          <a:ln w="6350">
+            <a:solidFill>
+              <a:srgbClr val="000000"/>
+            </a:solidFill>
+          </a:ln>
+          <a:effectLst/>
+        </p:spPr>
+        <p:style>
+          <a:lnRef idx="1">
+            <a:schemeClr val="accent1"/>
+          </a:lnRef>
+          <a:fillRef idx="3">
+            <a:schemeClr val="accent1"/>
+          </a:fillRef>
+          <a:effectRef idx="2">
+            <a:schemeClr val="accent1"/>
+          </a:effectRef>
+          <a:fontRef idx="minor">
+            <a:schemeClr val="lt1"/>
+          </a:fontRef>
+        </p:style>
+        <p:txBody>
+          <a:bodyPr rtlCol="0" anchor="ctr"/>
+          <a:lstStyle/>
+          <a:p/>
+        </p:txBody>
+      </p:sp>
+      <p:sp>
+        <p:nvSpPr>
+          <p:cNvPr id="39" name="Rectangle 38"/>
+          <p:cNvSpPr/>
+          <p:nvPr/>
+        </p:nvSpPr>
+        <p:spPr>
+          <a:xfrm>
+            <a:off x="9738360" y="1783080"/>
+            <a:ext cx="1828800" cy="1417320"/>
+          </a:xfrm>
+          <a:prstGeom prst="rect">
+            <a:avLst/>
+          </a:prstGeom>
+          <a:solidFill>
+            <a:srgbClr val="FFFDF7"/>
+          </a:solidFill>
+          <a:ln w="25400">
+            <a:solidFill>
+              <a:srgbClr val="000000"/>
+            </a:solidFill>
+          </a:ln>
+          <a:effectLst/>
+        </p:spPr>
+        <p:style>
+          <a:lnRef idx="1">
+            <a:schemeClr val="accent1"/>
+          </a:lnRef>
+          <a:fillRef idx="3">
+            <a:schemeClr val="accent1"/>
+          </a:fillRef>
+          <a:effectRef idx="2">
+            <a:schemeClr val="accent1"/>
+          </a:effectRef>
+          <a:fontRef idx="minor">
+            <a:schemeClr val="lt1"/>
+          </a:fontRef>
+        </p:style>
+        <p:txBody>
+          <a:bodyPr rtlCol="0" anchor="ctr"/>
+          <a:lstStyle/>
+          <a:p/>
+        </p:txBody>
+      </p:sp>
+      <p:sp>
+        <p:nvSpPr>
+          <p:cNvPr id="40" name="Rectangle 39"/>
+          <p:cNvSpPr/>
+          <p:nvPr/>
+        </p:nvSpPr>
+        <p:spPr>
+          <a:xfrm>
+            <a:off x="9875520" y="2971800"/>
+            <a:ext cx="1554480" cy="0"/>
+          </a:xfrm>
+          <a:prstGeom prst="rect">
+            <a:avLst/>
+          </a:prstGeom>
+          <a:noFill/>
+          <a:ln w="19050">
+            <a:solidFill>
+              <a:srgbClr val="6B6B6B"/>
+            </a:solidFill>
+          </a:ln>
+          <a:effectLst/>
+        </p:spPr>
+        <p:style>
+          <a:lnRef idx="1">
+            <a:schemeClr val="accent1"/>
+          </a:lnRef>
+          <a:fillRef idx="3">
+            <a:schemeClr val="accent1"/>
+          </a:fillRef>
+          <a:effectRef idx="2">
+            <a:schemeClr val="accent1"/>
+          </a:effectRef>
+          <a:fontRef idx="minor">
+            <a:schemeClr val="lt1"/>
+          </a:fontRef>
+        </p:style>
+        <p:txBody>
+          <a:bodyPr rtlCol="0" anchor="ctr"/>
+          <a:lstStyle/>
+          <a:p>
+            <a:pPr algn="ctr"/>
+          </a:p>
+        </p:txBody>
+      </p:sp>
+      <p:sp>
+        <p:nvSpPr>
+          <p:cNvPr id="41" name="Freeform 40"/>
+          <p:cNvSpPr/>
+          <p:nvPr/>
+        </p:nvSpPr>
+        <p:spPr>
+          <a:xfrm>
+            <a:off x="10149840" y="2057400"/>
+            <a:ext cx="1005840" cy="914400"/>
+          </a:xfrm>
+          <a:custGeom>
+            <a:avLst/>
+            <a:gdLst/>
+            <a:ahLst/>
+            <a:cxnLst/>
+            <a:rect l="l" t="t" r="r" b="b"/>
+            <a:pathLst>
+              <a:path w="1005840" h="914400">
+                <a:moveTo>
+                  <a:pt x="347472" y="914400"/>
+                </a:moveTo>
+                <a:lnTo>
+                  <a:pt x="1005840" y="914400"/>
+                </a:lnTo>
+                <a:lnTo>
+                  <a:pt x="1005840" y="0"/>
+                </a:lnTo>
+                <a:lnTo>
+                  <a:pt x="548640" y="0"/>
+                </a:lnTo>
+                <a:lnTo>
+                  <a:pt x="548640" y="411480"/>
+                </a:lnTo>
+                <a:lnTo>
+                  <a:pt x="0" y="411480"/>
+                </a:lnTo>
+                <a:lnTo>
+                  <a:pt x="0" y="621792"/>
+                </a:lnTo>
+                <a:lnTo>
+                  <a:pt x="347472" y="621792"/>
+                </a:lnTo>
+                <a:close/>
+              </a:path>
+            </a:pathLst>
+          </a:custGeom>
+          <a:solidFill>
+            <a:srgbClr val="C6F035"/>
+          </a:solidFill>
+          <a:ln w="25400">
+            <a:solidFill>
+              <a:srgbClr val="000000"/>
+            </a:solidFill>
+          </a:ln>
+          <a:effectLst/>
+        </p:spPr>
+        <p:style>
+          <a:lnRef idx="1">
+            <a:schemeClr val="accent1"/>
+          </a:lnRef>
+          <a:fillRef idx="3">
+            <a:schemeClr val="accent1"/>
+          </a:fillRef>
+          <a:effectRef idx="2">
+            <a:schemeClr val="accent1"/>
+          </a:effectRef>
+          <a:fontRef idx="minor">
+            <a:schemeClr val="lt1"/>
+          </a:fontRef>
+        </p:style>
+        <p:txBody>
+          <a:bodyPr rtlCol="0" anchor="ctr"/>
+          <a:lstStyle/>
+          <a:p>
+            <a:pPr algn="ctr"/>
+          </a:p>
+        </p:txBody>
+      </p:sp>
+      <p:sp>
+        <p:nvSpPr>
+          <p:cNvPr id="42" name="Rectangle 41"/>
+          <p:cNvSpPr/>
+          <p:nvPr/>
+        </p:nvSpPr>
+        <p:spPr>
+          <a:xfrm>
+            <a:off x="9738360" y="3310128"/>
+            <a:ext cx="1828800" cy="365760"/>
+          </a:xfrm>
+          <a:prstGeom prst="rect">
+            <a:avLst/>
+          </a:prstGeom>
+          <a:solidFill>
+            <a:srgbClr val="C6F035"/>
+          </a:solidFill>
+          <a:ln w="34925">
+            <a:solidFill>
+              <a:srgbClr val="000000"/>
+            </a:solidFill>
+          </a:ln>
+          <a:effectLst/>
+        </p:spPr>
+        <p:style>
+          <a:lnRef idx="1">
+            <a:schemeClr val="accent1"/>
+          </a:lnRef>
+          <a:fillRef idx="3">
+            <a:schemeClr val="accent1"/>
+          </a:fillRef>
+          <a:effectRef idx="2">
+            <a:schemeClr val="accent1"/>
+          </a:effectRef>
+          <a:fontRef idx="minor">
+            <a:schemeClr val="lt1"/>
+          </a:fontRef>
+        </p:style>
+        <p:txBody>
+          <a:bodyPr rtlCol="0" anchor="ctr"/>
+          <a:lstStyle/>
+          <a:p/>
+        </p:txBody>
+      </p:sp>
+      <p:sp>
+        <p:nvSpPr>
+          <p:cNvPr id="43" name="TextBox 42"/>
+          <p:cNvSpPr txBox="1"/>
+          <p:nvPr/>
+        </p:nvSpPr>
+        <p:spPr>
+          <a:xfrm>
+            <a:off x="9738360" y="3392424"/>
+            <a:ext cx="1828800" cy="274320"/>
+          </a:xfrm>
+          <a:prstGeom prst="rect">
+            <a:avLst/>
+          </a:prstGeom>
+          <a:noFill/>
+        </p:spPr>
+        <p:txBody>
+          <a:bodyPr wrap="square" lIns="0" rIns="0" tIns="0" bIns="0" anchor="t">
+            <a:spAutoFit/>
+          </a:bodyPr>
+          <a:lstStyle/>
+          <a:p>
+            <a:pPr algn="ctr"/>
+            <a:r>
+              <a:rPr sz="1100" b="1">
+                <a:solidFill>
+                  <a:srgbClr val="000000"/>
+                </a:solidFill>
+                <a:latin typeface="Arial"/>
+              </a:rPr>
+              <a:t>05  KEEP</a:t>
+            </a:r>
+          </a:p>
+        </p:txBody>
+      </p:sp>
+      <p:sp>
+        <p:nvSpPr>
+          <p:cNvPr id="44" name="Rectangle 43"/>
+          <p:cNvSpPr/>
+          <p:nvPr/>
+        </p:nvSpPr>
+        <p:spPr>
+          <a:xfrm>
+            <a:off x="662940" y="3909060"/>
+            <a:ext cx="1600200" cy="512064"/>
+          </a:xfrm>
+          <a:prstGeom prst="rect">
+            <a:avLst/>
+          </a:prstGeom>
+          <a:solidFill>
+            <a:srgbClr val="000000"/>
+          </a:solidFill>
+          <a:ln w="6350">
+            <a:solidFill>
+              <a:srgbClr val="000000"/>
+            </a:solidFill>
+          </a:ln>
+          <a:effectLst/>
+        </p:spPr>
+        <p:style>
+          <a:lnRef idx="1">
+            <a:schemeClr val="accent1"/>
+          </a:lnRef>
+          <a:fillRef idx="3">
+            <a:schemeClr val="accent1"/>
+          </a:fillRef>
+          <a:effectRef idx="2">
+            <a:schemeClr val="accent1"/>
+          </a:effectRef>
+          <a:fontRef idx="minor">
+            <a:schemeClr val="lt1"/>
+          </a:fontRef>
+        </p:style>
+        <p:txBody>
+          <a:bodyPr rtlCol="0" anchor="ctr"/>
+          <a:lstStyle/>
+          <a:p/>
+        </p:txBody>
+      </p:sp>
+      <p:sp>
+        <p:nvSpPr>
+          <p:cNvPr id="45" name="Rectangle 44"/>
+          <p:cNvSpPr/>
+          <p:nvPr/>
+        </p:nvSpPr>
+        <p:spPr>
+          <a:xfrm>
+            <a:off x="594360" y="3840480"/>
+            <a:ext cx="1600200" cy="512064"/>
+          </a:xfrm>
+          <a:prstGeom prst="rect">
+            <a:avLst/>
+          </a:prstGeom>
+          <a:solidFill>
+            <a:srgbClr val="00D9E1"/>
+          </a:solidFill>
+          <a:ln w="34925">
+            <a:solidFill>
+              <a:srgbClr val="000000"/>
+            </a:solidFill>
+          </a:ln>
+          <a:effectLst/>
+        </p:spPr>
+        <p:style>
+          <a:lnRef idx="1">
+            <a:schemeClr val="accent1"/>
+          </a:lnRef>
+          <a:fillRef idx="3">
+            <a:schemeClr val="accent1"/>
+          </a:fillRef>
+          <a:effectRef idx="2">
+            <a:schemeClr val="accent1"/>
+          </a:effectRef>
+          <a:fontRef idx="minor">
+            <a:schemeClr val="lt1"/>
+          </a:fontRef>
+        </p:style>
+        <p:txBody>
+          <a:bodyPr rtlCol="0" anchor="ctr"/>
+          <a:lstStyle/>
+          <a:p/>
+        </p:txBody>
+      </p:sp>
+      <p:sp>
+        <p:nvSpPr>
+          <p:cNvPr id="46" name="TextBox 45"/>
+          <p:cNvSpPr txBox="1"/>
+          <p:nvPr/>
+        </p:nvSpPr>
+        <p:spPr>
+          <a:xfrm>
+            <a:off x="594360" y="3995928"/>
+            <a:ext cx="1600200" cy="274320"/>
+          </a:xfrm>
+          <a:prstGeom prst="rect">
+            <a:avLst/>
+          </a:prstGeom>
+          <a:noFill/>
+        </p:spPr>
+        <p:txBody>
+          <a:bodyPr wrap="square" lIns="0" rIns="0" tIns="0" bIns="0" anchor="t">
+            <a:spAutoFit/>
+          </a:bodyPr>
+          <a:lstStyle/>
+          <a:p>
+            <a:pPr algn="ctr"/>
+            <a:r>
+              <a:rPr sz="1100" b="1">
+                <a:solidFill>
+                  <a:srgbClr val="000000"/>
+                </a:solidFill>
+                <a:latin typeface="Arial"/>
+              </a:rPr>
+              <a:t>FRAMES</a:t>
+            </a:r>
+          </a:p>
+        </p:txBody>
+      </p:sp>
+      <p:sp>
+        <p:nvSpPr>
+          <p:cNvPr id="47" name="TextBox 46"/>
+          <p:cNvSpPr txBox="1"/>
+          <p:nvPr/>
+        </p:nvSpPr>
+        <p:spPr>
+          <a:xfrm>
+            <a:off x="2377440" y="3840480"/>
+            <a:ext cx="3566159" cy="512064"/>
+          </a:xfrm>
+          <a:prstGeom prst="rect">
+            <a:avLst/>
+          </a:prstGeom>
+          <a:noFill/>
+        </p:spPr>
+        <p:txBody>
+          <a:bodyPr wrap="square" lIns="0" rIns="0" tIns="0" bIns="0" anchor="ctr">
+            <a:spAutoFit/>
+          </a:bodyPr>
+          <a:lstStyle/>
+          <a:p>
+            <a:pPr algn="l"/>
+            <a:r>
+              <a:rPr sz="1250">
+                <a:solidFill>
+                  <a:srgbClr val="000000"/>
+                </a:solidFill>
+                <a:latin typeface="Calibri"/>
+              </a:rPr>
+              <a:t>Eight or nine, numbered, all the same size, in one row or a grid.</a:t>
+            </a:r>
+          </a:p>
+        </p:txBody>
+      </p:sp>
+      <p:sp>
+        <p:nvSpPr>
+          <p:cNvPr id="48" name="Rectangle 47"/>
+          <p:cNvSpPr/>
+          <p:nvPr/>
+        </p:nvSpPr>
+        <p:spPr>
+          <a:xfrm>
+            <a:off x="6286500" y="3909060"/>
+            <a:ext cx="1600200" cy="512064"/>
+          </a:xfrm>
+          <a:prstGeom prst="rect">
+            <a:avLst/>
+          </a:prstGeom>
+          <a:solidFill>
+            <a:srgbClr val="000000"/>
+          </a:solidFill>
+          <a:ln w="6350">
+            <a:solidFill>
+              <a:srgbClr val="000000"/>
+            </a:solidFill>
+          </a:ln>
+          <a:effectLst/>
+        </p:spPr>
+        <p:style>
+          <a:lnRef idx="1">
+            <a:schemeClr val="accent1"/>
+          </a:lnRef>
+          <a:fillRef idx="3">
+            <a:schemeClr val="accent1"/>
+          </a:fillRef>
+          <a:effectRef idx="2">
+            <a:schemeClr val="accent1"/>
+          </a:effectRef>
+          <a:fontRef idx="minor">
+            <a:schemeClr val="lt1"/>
+          </a:fontRef>
+        </p:style>
+        <p:txBody>
+          <a:bodyPr rtlCol="0" anchor="ctr"/>
+          <a:lstStyle/>
+          <a:p/>
+        </p:txBody>
+      </p:sp>
+      <p:sp>
+        <p:nvSpPr>
+          <p:cNvPr id="49" name="Rectangle 48"/>
+          <p:cNvSpPr/>
+          <p:nvPr/>
+        </p:nvSpPr>
+        <p:spPr>
+          <a:xfrm>
+            <a:off x="6217920" y="3840480"/>
+            <a:ext cx="1600200" cy="512064"/>
+          </a:xfrm>
+          <a:prstGeom prst="rect">
+            <a:avLst/>
+          </a:prstGeom>
+          <a:solidFill>
+            <a:srgbClr val="C6F035"/>
+          </a:solidFill>
+          <a:ln w="34925">
+            <a:solidFill>
+              <a:srgbClr val="000000"/>
+            </a:solidFill>
+          </a:ln>
+          <a:effectLst/>
+        </p:spPr>
+        <p:style>
+          <a:lnRef idx="1">
+            <a:schemeClr val="accent1"/>
+          </a:lnRef>
+          <a:fillRef idx="3">
+            <a:schemeClr val="accent1"/>
+          </a:fillRef>
+          <a:effectRef idx="2">
+            <a:schemeClr val="accent1"/>
+          </a:effectRef>
+          <a:fontRef idx="minor">
+            <a:schemeClr val="lt1"/>
+          </a:fontRef>
+        </p:style>
+        <p:txBody>
+          <a:bodyPr rtlCol="0" anchor="ctr"/>
+          <a:lstStyle/>
+          <a:p/>
+        </p:txBody>
+      </p:sp>
+      <p:sp>
+        <p:nvSpPr>
+          <p:cNvPr id="50" name="TextBox 49"/>
+          <p:cNvSpPr txBox="1"/>
+          <p:nvPr/>
+        </p:nvSpPr>
+        <p:spPr>
+          <a:xfrm>
+            <a:off x="6217920" y="3995928"/>
+            <a:ext cx="1600200" cy="274320"/>
+          </a:xfrm>
+          <a:prstGeom prst="rect">
+            <a:avLst/>
+          </a:prstGeom>
+          <a:noFill/>
+        </p:spPr>
+        <p:txBody>
+          <a:bodyPr wrap="square" lIns="0" rIns="0" tIns="0" bIns="0" anchor="t">
+            <a:spAutoFit/>
+          </a:bodyPr>
+          <a:lstStyle/>
+          <a:p>
+            <a:pPr algn="ctr"/>
+            <a:r>
+              <a:rPr sz="1100" b="1">
+                <a:solidFill>
+                  <a:srgbClr val="000000"/>
+                </a:solidFill>
+                <a:latin typeface="Arial"/>
+              </a:rPr>
+              <a:t>ONE MOVE</a:t>
+            </a:r>
+          </a:p>
+        </p:txBody>
+      </p:sp>
+      <p:sp>
+        <p:nvSpPr>
+          <p:cNvPr id="51" name="TextBox 50"/>
+          <p:cNvSpPr txBox="1"/>
+          <p:nvPr/>
+        </p:nvSpPr>
+        <p:spPr>
+          <a:xfrm>
+            <a:off x="8001000" y="3840480"/>
+            <a:ext cx="3566159" cy="512064"/>
+          </a:xfrm>
+          <a:prstGeom prst="rect">
+            <a:avLst/>
+          </a:prstGeom>
+          <a:noFill/>
+        </p:spPr>
+        <p:txBody>
+          <a:bodyPr wrap="square" lIns="0" rIns="0" tIns="0" bIns="0" anchor="ctr">
+            <a:spAutoFit/>
+          </a:bodyPr>
+          <a:lstStyle/>
+          <a:p>
+            <a:pPr algn="l"/>
+            <a:r>
+              <a:rPr sz="1250">
+                <a:solidFill>
+                  <a:srgbClr val="000000"/>
+                </a:solidFill>
+                <a:latin typeface="Calibri"/>
+              </a:rPr>
+              <a:t>One operation per frame. If a frame needs two verbs, split it.</a:t>
+            </a:r>
+          </a:p>
+        </p:txBody>
+      </p:sp>
+      <p:sp>
+        <p:nvSpPr>
+          <p:cNvPr id="52" name="Rectangle 51"/>
+          <p:cNvSpPr/>
+          <p:nvPr/>
+        </p:nvSpPr>
+        <p:spPr>
+          <a:xfrm>
+            <a:off x="662940" y="4567428"/>
+            <a:ext cx="1600200" cy="512064"/>
+          </a:xfrm>
+          <a:prstGeom prst="rect">
+            <a:avLst/>
+          </a:prstGeom>
+          <a:solidFill>
+            <a:srgbClr val="000000"/>
+          </a:solidFill>
+          <a:ln w="6350">
+            <a:solidFill>
+              <a:srgbClr val="000000"/>
+            </a:solidFill>
+          </a:ln>
+          <a:effectLst/>
+        </p:spPr>
+        <p:style>
+          <a:lnRef idx="1">
+            <a:schemeClr val="accent1"/>
+          </a:lnRef>
+          <a:fillRef idx="3">
+            <a:schemeClr val="accent1"/>
+          </a:fillRef>
+          <a:effectRef idx="2">
+            <a:schemeClr val="accent1"/>
+          </a:effectRef>
+          <a:fontRef idx="minor">
+            <a:schemeClr val="lt1"/>
+          </a:fontRef>
+        </p:style>
+        <p:txBody>
+          <a:bodyPr rtlCol="0" anchor="ctr"/>
+          <a:lstStyle/>
+          <a:p/>
+        </p:txBody>
+      </p:sp>
+      <p:sp>
+        <p:nvSpPr>
+          <p:cNvPr id="53" name="Rectangle 52"/>
+          <p:cNvSpPr/>
+          <p:nvPr/>
+        </p:nvSpPr>
+        <p:spPr>
+          <a:xfrm>
+            <a:off x="594360" y="4498848"/>
+            <a:ext cx="1600200" cy="512064"/>
+          </a:xfrm>
+          <a:prstGeom prst="rect">
+            <a:avLst/>
+          </a:prstGeom>
+          <a:solidFill>
+            <a:srgbClr val="FFE500"/>
+          </a:solidFill>
+          <a:ln w="34925">
+            <a:solidFill>
+              <a:srgbClr val="000000"/>
+            </a:solidFill>
+          </a:ln>
+          <a:effectLst/>
+        </p:spPr>
+        <p:style>
+          <a:lnRef idx="1">
+            <a:schemeClr val="accent1"/>
+          </a:lnRef>
+          <a:fillRef idx="3">
+            <a:schemeClr val="accent1"/>
+          </a:fillRef>
+          <a:effectRef idx="2">
+            <a:schemeClr val="accent1"/>
+          </a:effectRef>
+          <a:fontRef idx="minor">
+            <a:schemeClr val="lt1"/>
+          </a:fontRef>
+        </p:style>
+        <p:txBody>
+          <a:bodyPr rtlCol="0" anchor="ctr"/>
+          <a:lstStyle/>
+          <a:p/>
+        </p:txBody>
+      </p:sp>
+      <p:sp>
+        <p:nvSpPr>
+          <p:cNvPr id="54" name="TextBox 53"/>
+          <p:cNvSpPr txBox="1"/>
+          <p:nvPr/>
+        </p:nvSpPr>
+        <p:spPr>
+          <a:xfrm>
+            <a:off x="594360" y="4654296"/>
+            <a:ext cx="1600200" cy="274320"/>
+          </a:xfrm>
+          <a:prstGeom prst="rect">
+            <a:avLst/>
+          </a:prstGeom>
+          <a:noFill/>
+        </p:spPr>
+        <p:txBody>
+          <a:bodyPr wrap="square" lIns="0" rIns="0" tIns="0" bIns="0" anchor="t">
+            <a:spAutoFit/>
+          </a:bodyPr>
+          <a:lstStyle/>
+          <a:p>
+            <a:pPr algn="ctr"/>
+            <a:r>
+              <a:rPr sz="1100" b="1">
+                <a:solidFill>
+                  <a:srgbClr val="000000"/>
+                </a:solidFill>
+                <a:latin typeface="Arial"/>
+              </a:rPr>
+              <a:t>SAME VIEW</a:t>
+            </a:r>
+          </a:p>
+        </p:txBody>
+      </p:sp>
+      <p:sp>
+        <p:nvSpPr>
+          <p:cNvPr id="55" name="TextBox 54"/>
+          <p:cNvSpPr txBox="1"/>
+          <p:nvPr/>
+        </p:nvSpPr>
+        <p:spPr>
+          <a:xfrm>
+            <a:off x="2377440" y="4498848"/>
+            <a:ext cx="3566159" cy="512064"/>
+          </a:xfrm>
+          <a:prstGeom prst="rect">
+            <a:avLst/>
+          </a:prstGeom>
+          <a:noFill/>
+        </p:spPr>
+        <p:txBody>
+          <a:bodyPr wrap="square" lIns="0" rIns="0" tIns="0" bIns="0" anchor="ctr">
+            <a:spAutoFit/>
+          </a:bodyPr>
+          <a:lstStyle/>
+          <a:p>
+            <a:pPr algn="l"/>
+            <a:r>
+              <a:rPr sz="1250">
+                <a:solidFill>
+                  <a:srgbClr val="000000"/>
+                </a:solidFill>
+                <a:latin typeface="Calibri"/>
+              </a:rPr>
+              <a:t>Same camera, same scale in every frame, so only the move changes.</a:t>
+            </a:r>
+          </a:p>
+        </p:txBody>
+      </p:sp>
+      <p:sp>
+        <p:nvSpPr>
+          <p:cNvPr id="56" name="Rectangle 55"/>
+          <p:cNvSpPr/>
+          <p:nvPr/>
+        </p:nvSpPr>
+        <p:spPr>
+          <a:xfrm>
+            <a:off x="6286500" y="4567428"/>
+            <a:ext cx="1600200" cy="512064"/>
+          </a:xfrm>
+          <a:prstGeom prst="rect">
+            <a:avLst/>
+          </a:prstGeom>
+          <a:solidFill>
+            <a:srgbClr val="000000"/>
+          </a:solidFill>
+          <a:ln w="6350">
+            <a:solidFill>
+              <a:srgbClr val="000000"/>
+            </a:solidFill>
+          </a:ln>
+          <a:effectLst/>
+        </p:spPr>
+        <p:style>
+          <a:lnRef idx="1">
+            <a:schemeClr val="accent1"/>
+          </a:lnRef>
+          <a:fillRef idx="3">
+            <a:schemeClr val="accent1"/>
+          </a:fillRef>
+          <a:effectRef idx="2">
+            <a:schemeClr val="accent1"/>
+          </a:effectRef>
+          <a:fontRef idx="minor">
+            <a:schemeClr val="lt1"/>
+          </a:fontRef>
+        </p:style>
+        <p:txBody>
+          <a:bodyPr rtlCol="0" anchor="ctr"/>
+          <a:lstStyle/>
+          <a:p/>
+        </p:txBody>
+      </p:sp>
+      <p:sp>
+        <p:nvSpPr>
+          <p:cNvPr id="57" name="Rectangle 56"/>
+          <p:cNvSpPr/>
+          <p:nvPr/>
+        </p:nvSpPr>
+        <p:spPr>
+          <a:xfrm>
+            <a:off x="6217920" y="4498848"/>
+            <a:ext cx="1600200" cy="512064"/>
+          </a:xfrm>
+          <a:prstGeom prst="rect">
+            <a:avLst/>
+          </a:prstGeom>
+          <a:solidFill>
+            <a:srgbClr val="FF4D8D"/>
+          </a:solidFill>
+          <a:ln w="34925">
+            <a:solidFill>
+              <a:srgbClr val="000000"/>
+            </a:solidFill>
+          </a:ln>
+          <a:effectLst/>
+        </p:spPr>
+        <p:style>
+          <a:lnRef idx="1">
+            <a:schemeClr val="accent1"/>
+          </a:lnRef>
+          <a:fillRef idx="3">
+            <a:schemeClr val="accent1"/>
+          </a:fillRef>
+          <a:effectRef idx="2">
+            <a:schemeClr val="accent1"/>
+          </a:effectRef>
+          <a:fontRef idx="minor">
+            <a:schemeClr val="lt1"/>
+          </a:fontRef>
+        </p:style>
+        <p:txBody>
+          <a:bodyPr rtlCol="0" anchor="ctr"/>
+          <a:lstStyle/>
+          <a:p/>
+        </p:txBody>
+      </p:sp>
+      <p:sp>
+        <p:nvSpPr>
+          <p:cNvPr id="58" name="TextBox 57"/>
+          <p:cNvSpPr txBox="1"/>
+          <p:nvPr/>
+        </p:nvSpPr>
+        <p:spPr>
+          <a:xfrm>
+            <a:off x="6217920" y="4654296"/>
+            <a:ext cx="1600200" cy="274320"/>
+          </a:xfrm>
+          <a:prstGeom prst="rect">
+            <a:avLst/>
+          </a:prstGeom>
+          <a:noFill/>
+        </p:spPr>
+        <p:txBody>
+          <a:bodyPr wrap="square" lIns="0" rIns="0" tIns="0" bIns="0" anchor="t">
+            <a:spAutoFit/>
+          </a:bodyPr>
+          <a:lstStyle/>
+          <a:p>
+            <a:pPr algn="ctr"/>
+            <a:r>
+              <a:rPr sz="1100" b="1">
+                <a:solidFill>
+                  <a:srgbClr val="000000"/>
+                </a:solidFill>
+                <a:latin typeface="Arial"/>
+              </a:rPr>
+              <a:t>VERBS</a:t>
+            </a:r>
+          </a:p>
+        </p:txBody>
+      </p:sp>
+      <p:sp>
+        <p:nvSpPr>
+          <p:cNvPr id="59" name="TextBox 58"/>
+          <p:cNvSpPr txBox="1"/>
+          <p:nvPr/>
+        </p:nvSpPr>
+        <p:spPr>
+          <a:xfrm>
+            <a:off x="8001000" y="4498848"/>
+            <a:ext cx="3566159" cy="512064"/>
+          </a:xfrm>
+          <a:prstGeom prst="rect">
+            <a:avLst/>
+          </a:prstGeom>
+          <a:noFill/>
+        </p:spPr>
+        <p:txBody>
+          <a:bodyPr wrap="square" lIns="0" rIns="0" tIns="0" bIns="0" anchor="ctr">
+            <a:spAutoFit/>
+          </a:bodyPr>
+          <a:lstStyle/>
+          <a:p>
+            <a:pPr algn="l"/>
+            <a:r>
+              <a:rPr sz="1250">
+                <a:solidFill>
+                  <a:srgbClr val="000000"/>
+                </a:solidFill>
+                <a:latin typeface="Calibri"/>
+              </a:rPr>
+              <a:t>Caption each frame with one verb: place, stack, shift, turn, carve.</a:t>
+            </a:r>
+          </a:p>
+        </p:txBody>
+      </p:sp>
+      <p:sp>
+        <p:nvSpPr>
+          <p:cNvPr id="60" name="Rectangle 59"/>
+          <p:cNvSpPr/>
+          <p:nvPr/>
+        </p:nvSpPr>
+        <p:spPr>
+          <a:xfrm>
+            <a:off x="662940" y="5225796"/>
+            <a:ext cx="1600200" cy="512064"/>
+          </a:xfrm>
+          <a:prstGeom prst="rect">
+            <a:avLst/>
+          </a:prstGeom>
+          <a:solidFill>
+            <a:srgbClr val="000000"/>
+          </a:solidFill>
+          <a:ln w="6350">
+            <a:solidFill>
+              <a:srgbClr val="000000"/>
+            </a:solidFill>
+          </a:ln>
+          <a:effectLst/>
+        </p:spPr>
+        <p:style>
+          <a:lnRef idx="1">
+            <a:schemeClr val="accent1"/>
+          </a:lnRef>
+          <a:fillRef idx="3">
+            <a:schemeClr val="accent1"/>
+          </a:fillRef>
+          <a:effectRef idx="2">
+            <a:schemeClr val="accent1"/>
+          </a:effectRef>
+          <a:fontRef idx="minor">
+            <a:schemeClr val="lt1"/>
+          </a:fontRef>
+        </p:style>
+        <p:txBody>
+          <a:bodyPr rtlCol="0" anchor="ctr"/>
+          <a:lstStyle/>
+          <a:p/>
+        </p:txBody>
+      </p:sp>
+      <p:sp>
+        <p:nvSpPr>
+          <p:cNvPr id="61" name="Rectangle 60"/>
+          <p:cNvSpPr/>
+          <p:nvPr/>
+        </p:nvSpPr>
+        <p:spPr>
+          <a:xfrm>
+            <a:off x="594360" y="5157216"/>
+            <a:ext cx="1600200" cy="512064"/>
+          </a:xfrm>
+          <a:prstGeom prst="rect">
+            <a:avLst/>
+          </a:prstGeom>
+          <a:solidFill>
+            <a:srgbClr val="00D9E1"/>
+          </a:solidFill>
+          <a:ln w="34925">
+            <a:solidFill>
+              <a:srgbClr val="000000"/>
+            </a:solidFill>
+          </a:ln>
+          <a:effectLst/>
+        </p:spPr>
+        <p:style>
+          <a:lnRef idx="1">
+            <a:schemeClr val="accent1"/>
+          </a:lnRef>
+          <a:fillRef idx="3">
+            <a:schemeClr val="accent1"/>
+          </a:fillRef>
+          <a:effectRef idx="2">
+            <a:schemeClr val="accent1"/>
+          </a:effectRef>
+          <a:fontRef idx="minor">
+            <a:schemeClr val="lt1"/>
+          </a:fontRef>
+        </p:style>
+        <p:txBody>
+          <a:bodyPr rtlCol="0" anchor="ctr"/>
+          <a:lstStyle/>
+          <a:p/>
+        </p:txBody>
+      </p:sp>
+      <p:sp>
+        <p:nvSpPr>
+          <p:cNvPr id="62" name="TextBox 61"/>
+          <p:cNvSpPr txBox="1"/>
+          <p:nvPr/>
+        </p:nvSpPr>
+        <p:spPr>
+          <a:xfrm>
+            <a:off x="594360" y="5312664"/>
+            <a:ext cx="1600200" cy="274320"/>
+          </a:xfrm>
+          <a:prstGeom prst="rect">
+            <a:avLst/>
+          </a:prstGeom>
+          <a:noFill/>
+        </p:spPr>
+        <p:txBody>
+          <a:bodyPr wrap="square" lIns="0" rIns="0" tIns="0" bIns="0" anchor="t">
+            <a:spAutoFit/>
+          </a:bodyPr>
+          <a:lstStyle/>
+          <a:p>
+            <a:pPr algn="ctr"/>
+            <a:r>
+              <a:rPr sz="1100" b="1">
+                <a:solidFill>
+                  <a:srgbClr val="000000"/>
+                </a:solidFill>
+                <a:latin typeface="Arial"/>
+              </a:rPr>
+              <a:t>ARROWS</a:t>
+            </a:r>
+          </a:p>
+        </p:txBody>
+      </p:sp>
+      <p:sp>
+        <p:nvSpPr>
+          <p:cNvPr id="63" name="TextBox 62"/>
+          <p:cNvSpPr txBox="1"/>
+          <p:nvPr/>
+        </p:nvSpPr>
+        <p:spPr>
+          <a:xfrm>
+            <a:off x="2377440" y="5157216"/>
+            <a:ext cx="3566159" cy="512064"/>
+          </a:xfrm>
+          <a:prstGeom prst="rect">
+            <a:avLst/>
+          </a:prstGeom>
+          <a:noFill/>
+        </p:spPr>
+        <p:txBody>
+          <a:bodyPr wrap="square" lIns="0" rIns="0" tIns="0" bIns="0" anchor="ctr">
+            <a:spAutoFit/>
+          </a:bodyPr>
+          <a:lstStyle/>
+          <a:p>
+            <a:pPr algn="l"/>
+            <a:r>
+              <a:rPr sz="1250">
+                <a:solidFill>
+                  <a:srgbClr val="000000"/>
+                </a:solidFill>
+                <a:latin typeface="Calibri"/>
+              </a:rPr>
+              <a:t>Arrows or numbers carry the order. Nobody should have to guess it.</a:t>
+            </a:r>
+          </a:p>
+        </p:txBody>
+      </p:sp>
+      <p:sp>
+        <p:nvSpPr>
+          <p:cNvPr id="64" name="Rectangle 63"/>
+          <p:cNvSpPr/>
+          <p:nvPr/>
+        </p:nvSpPr>
+        <p:spPr>
+          <a:xfrm>
+            <a:off x="6286500" y="5225796"/>
+            <a:ext cx="1600200" cy="512064"/>
+          </a:xfrm>
+          <a:prstGeom prst="rect">
+            <a:avLst/>
+          </a:prstGeom>
+          <a:solidFill>
+            <a:srgbClr val="000000"/>
+          </a:solidFill>
+          <a:ln w="6350">
+            <a:solidFill>
+              <a:srgbClr val="000000"/>
+            </a:solidFill>
+          </a:ln>
+          <a:effectLst/>
+        </p:spPr>
+        <p:style>
+          <a:lnRef idx="1">
+            <a:schemeClr val="accent1"/>
+          </a:lnRef>
+          <a:fillRef idx="3">
+            <a:schemeClr val="accent1"/>
+          </a:fillRef>
+          <a:effectRef idx="2">
+            <a:schemeClr val="accent1"/>
+          </a:effectRef>
+          <a:fontRef idx="minor">
+            <a:schemeClr val="lt1"/>
+          </a:fontRef>
+        </p:style>
+        <p:txBody>
+          <a:bodyPr rtlCol="0" anchor="ctr"/>
+          <a:lstStyle/>
+          <a:p/>
+        </p:txBody>
+      </p:sp>
+      <p:sp>
+        <p:nvSpPr>
+          <p:cNvPr id="65" name="Rectangle 64"/>
+          <p:cNvSpPr/>
+          <p:nvPr/>
+        </p:nvSpPr>
+        <p:spPr>
+          <a:xfrm>
+            <a:off x="6217920" y="5157216"/>
+            <a:ext cx="1600200" cy="512064"/>
+          </a:xfrm>
+          <a:prstGeom prst="rect">
+            <a:avLst/>
+          </a:prstGeom>
+          <a:solidFill>
+            <a:srgbClr val="C6F035"/>
+          </a:solidFill>
+          <a:ln w="34925">
+            <a:solidFill>
+              <a:srgbClr val="000000"/>
+            </a:solidFill>
+          </a:ln>
+          <a:effectLst/>
+        </p:spPr>
+        <p:style>
+          <a:lnRef idx="1">
+            <a:schemeClr val="accent1"/>
+          </a:lnRef>
+          <a:fillRef idx="3">
+            <a:schemeClr val="accent1"/>
+          </a:fillRef>
+          <a:effectRef idx="2">
+            <a:schemeClr val="accent1"/>
+          </a:effectRef>
+          <a:fontRef idx="minor">
+            <a:schemeClr val="lt1"/>
+          </a:fontRef>
+        </p:style>
+        <p:txBody>
+          <a:bodyPr rtlCol="0" anchor="ctr"/>
+          <a:lstStyle/>
+          <a:p/>
+        </p:txBody>
+      </p:sp>
+      <p:sp>
+        <p:nvSpPr>
+          <p:cNvPr id="66" name="TextBox 65"/>
+          <p:cNvSpPr txBox="1"/>
+          <p:nvPr/>
+        </p:nvSpPr>
+        <p:spPr>
+          <a:xfrm>
+            <a:off x="6217920" y="5312664"/>
+            <a:ext cx="1600200" cy="274320"/>
+          </a:xfrm>
+          <a:prstGeom prst="rect">
+            <a:avLst/>
+          </a:prstGeom>
+          <a:noFill/>
+        </p:spPr>
+        <p:txBody>
+          <a:bodyPr wrap="square" lIns="0" rIns="0" tIns="0" bIns="0" anchor="t">
+            <a:spAutoFit/>
+          </a:bodyPr>
+          <a:lstStyle/>
+          <a:p>
+            <a:pPr algn="ctr"/>
+            <a:r>
+              <a:rPr sz="1100" b="1">
+                <a:solidFill>
+                  <a:srgbClr val="000000"/>
+                </a:solidFill>
+                <a:latin typeface="Arial"/>
+              </a:rPr>
+              <a:t>KEPT / REMOVED</a:t>
+            </a:r>
+          </a:p>
+        </p:txBody>
+      </p:sp>
+      <p:sp>
+        <p:nvSpPr>
+          <p:cNvPr id="67" name="TextBox 66"/>
+          <p:cNvSpPr txBox="1"/>
+          <p:nvPr/>
+        </p:nvSpPr>
+        <p:spPr>
+          <a:xfrm>
+            <a:off x="8001000" y="5157216"/>
+            <a:ext cx="3566159" cy="512064"/>
+          </a:xfrm>
+          <a:prstGeom prst="rect">
+            <a:avLst/>
+          </a:prstGeom>
+          <a:noFill/>
+        </p:spPr>
+        <p:txBody>
+          <a:bodyPr wrap="square" lIns="0" rIns="0" tIns="0" bIns="0" anchor="ctr">
+            <a:spAutoFit/>
+          </a:bodyPr>
+          <a:lstStyle/>
+          <a:p>
+            <a:pPr algn="l"/>
+            <a:r>
+              <a:rPr sz="1250">
+                <a:solidFill>
+                  <a:srgbClr val="000000"/>
+                </a:solidFill>
+                <a:latin typeface="Calibri"/>
+              </a:rPr>
+              <a:t>The new part is the only colour. A removed solid gets its own colour.</a:t>
+            </a:r>
+          </a:p>
+        </p:txBody>
+      </p:sp>
+      <p:sp>
+        <p:nvSpPr>
+          <p:cNvPr id="68" name="TextBox 67"/>
+          <p:cNvSpPr txBox="1"/>
+          <p:nvPr/>
+        </p:nvSpPr>
+        <p:spPr>
+          <a:xfrm>
+            <a:off x="594360" y="5897880"/>
+            <a:ext cx="10972800" cy="548640"/>
+          </a:xfrm>
+          <a:prstGeom prst="rect">
+            <a:avLst/>
+          </a:prstGeom>
+          <a:noFill/>
+        </p:spPr>
+        <p:txBody>
+          <a:bodyPr wrap="square" lIns="0" rIns="0" tIns="0" bIns="0" anchor="t">
+            <a:spAutoFit/>
+          </a:bodyPr>
+          <a:lstStyle/>
+          <a:p>
+            <a:pPr algn="l"/>
+            <a:r>
+              <a:rPr sz="1250">
+                <a:solidFill>
+                  <a:srgbClr val="6B6B6B"/>
+                </a:solidFill>
+                <a:latin typeface="Calibri"/>
+              </a:rPr>
+              <a:t>Legend above: cyan is the move in this frame, grey is what already exists, pink is the solid being removed, lime is the result.</a:t>
+            </a:r>
+          </a:p>
+        </p:txBody>
+      </p:sp>
+    </p:spTree>
+  </p:cSld>
+  <p:clrMapOvr>
+    <a:masterClrMapping/>
+  </p:clrMapOvr>
+</p:sld>
+</file>
+
+<file path=ppt/slides/slide9.xml><?xml version="1.0" encoding="utf-8"?>
 <p:sld xmlns:a="http://schemas.openxmlformats.org/drawingml/2006/main" xmlns:p="http://schemas.openxmlformats.org/presentationml/2006/main" xmlns:r="http://schemas.openxmlformats.org/officeDocument/2006/relationships">
   <p:cSld>
     <p:bg>
@@ -13004,7 +17230,7 @@
                 </a:solidFill>
                 <a:latin typeface="Arial"/>
               </a:rPr>
-              <a:t>P1a — CSG MASSING SEQUENCE</a:t>
+              <a:t>P2a — CSG PROCESS AND INSTRUCTIONS</a:t>
             </a:r>
           </a:p>
         </p:txBody>
@@ -13122,7 +17348,7 @@
                 </a:solidFill>
                 <a:latin typeface="Calibri"/>
               </a:rPr>
-              <a:t>Build a parametric massing study, then build a repeating panel from its own points and faces and develop a small printable variant of it.  This first milestone is the massing study: an ordered sequence of primitives and Booleans, diagrammed so another person could follow it.</a:t>
+              <a:t>Explain a CSG object through a BIG-style process diagram with instructions, then 3D print it.  This first assignment is the process sheet: an ordered sequence of primitives, transformations and Booleans, drawn so another person could rebuild it.</a:t>
             </a:r>
           </a:p>
         </p:txBody>
@@ -13407,7 +17633,7 @@
                 </a:solidFill>
                 <a:latin typeface="Calibri"/>
               </a:rPr>
-              <a:t>Three primitives, three transformations, three Booleans, in a stated order.</a:t>
+              <a:t>Three primitives. Translate, rotate, scale. Union, difference, intersection.</a:t>
             </a:r>
           </a:p>
         </p:txBody>
@@ -13653,7 +17879,7 @@
                 </a:solidFill>
                 <a:latin typeface="Arial"/>
               </a:rPr>
-              <a:t>THE DIAGRAMS</a:t>
+              <a:t>THE FRAMES</a:t>
             </a:r>
           </a:p>
         </p:txBody>
@@ -13692,7 +17918,7 @@
                 </a:solidFill>
                 <a:latin typeface="Calibri"/>
               </a:rPr>
-              <a:t>Eight or nine, numbered. One operation each, read left to right.</a:t>
+              <a:t>Eight or nine, numbered. One operation each, read in sequence.</a:t>
             </a:r>
           </a:p>
         </p:txBody>
@@ -13977,1647 +18203,7 @@
                 </a:solidFill>
                 <a:latin typeface="Calibri"/>
               </a:rPr>
-              <a:t>Drawn, not diagrammed: building scale, a figure, planting, ground, shadow.</a:t>
-            </a:r>
-          </a:p>
-        </p:txBody>
-      </p:sp>
-    </p:spTree>
-  </p:cSld>
-  <p:clrMapOvr>
-    <a:masterClrMapping/>
-  </p:clrMapOvr>
-</p:sld>
-</file>
-
-<file path=ppt/slides/slide9.xml><?xml version="1.0" encoding="utf-8"?>
-<p:sld xmlns:a="http://schemas.openxmlformats.org/drawingml/2006/main" xmlns:p="http://schemas.openxmlformats.org/presentationml/2006/main" xmlns:r="http://schemas.openxmlformats.org/officeDocument/2006/relationships">
-  <p:cSld>
-    <p:bg>
-      <p:bgPr>
-        <a:solidFill>
-          <a:srgbClr val="FFFDF7"/>
-        </a:solidFill>
-        <a:effectLst/>
-      </p:bgPr>
-    </p:bg>
-    <p:spTree>
-      <p:nvGrpSpPr>
-        <p:cNvPr id="1" name=""/>
-        <p:cNvGrpSpPr/>
-        <p:nvPr/>
-      </p:nvGrpSpPr>
-      <p:grpSpPr/>
-      <p:sp>
-        <p:nvSpPr>
-          <p:cNvPr id="2" name="Rectangle 1"/>
-          <p:cNvSpPr/>
-          <p:nvPr/>
-        </p:nvSpPr>
-        <p:spPr>
-          <a:xfrm>
-            <a:off x="594360" y="566928"/>
-            <a:ext cx="10972800" cy="0"/>
-          </a:xfrm>
-          <a:prstGeom prst="rect">
-            <a:avLst/>
-          </a:prstGeom>
-          <a:noFill/>
-          <a:ln w="50800">
-            <a:solidFill>
-              <a:srgbClr val="000000"/>
-            </a:solidFill>
-          </a:ln>
-          <a:effectLst/>
-        </p:spPr>
-        <p:style>
-          <a:lnRef idx="1">
-            <a:schemeClr val="accent1"/>
-          </a:lnRef>
-          <a:fillRef idx="3">
-            <a:schemeClr val="accent1"/>
-          </a:fillRef>
-          <a:effectRef idx="2">
-            <a:schemeClr val="accent1"/>
-          </a:effectRef>
-          <a:fontRef idx="minor">
-            <a:schemeClr val="lt1"/>
-          </a:fontRef>
-        </p:style>
-        <p:txBody>
-          <a:bodyPr rtlCol="0" anchor="ctr"/>
-          <a:lstStyle/>
-          <a:p>
-            <a:pPr algn="ctr"/>
-          </a:p>
-        </p:txBody>
-      </p:sp>
-      <p:sp>
-        <p:nvSpPr>
-          <p:cNvPr id="3" name="TextBox 2"/>
-          <p:cNvSpPr txBox="1"/>
-          <p:nvPr/>
-        </p:nvSpPr>
-        <p:spPr>
-          <a:xfrm>
-            <a:off x="594360" y="676656"/>
-            <a:ext cx="10972800" cy="566928"/>
-          </a:xfrm>
-          <a:prstGeom prst="rect">
-            <a:avLst/>
-          </a:prstGeom>
-          <a:noFill/>
-        </p:spPr>
-        <p:txBody>
-          <a:bodyPr wrap="square" lIns="0" rIns="0" tIns="0" bIns="0" anchor="t">
-            <a:spAutoFit/>
-          </a:bodyPr>
-          <a:lstStyle/>
-          <a:p>
-            <a:pPr algn="l"/>
-            <a:r>
-              <a:rPr sz="3300" b="1">
-                <a:solidFill>
-                  <a:srgbClr val="000000"/>
-                </a:solidFill>
-                <a:latin typeface="Arial"/>
-              </a:rPr>
-              <a:t>REQUIREMENTS — P1a</a:t>
-            </a:r>
-          </a:p>
-        </p:txBody>
-      </p:sp>
-      <p:sp>
-        <p:nvSpPr>
-          <p:cNvPr id="4" name="TextBox 3"/>
-          <p:cNvSpPr txBox="1"/>
-          <p:nvPr/>
-        </p:nvSpPr>
-        <p:spPr>
-          <a:xfrm>
-            <a:off x="594360" y="1261872"/>
-            <a:ext cx="10972800" cy="310896"/>
-          </a:xfrm>
-          <a:prstGeom prst="rect">
-            <a:avLst/>
-          </a:prstGeom>
-          <a:noFill/>
-        </p:spPr>
-        <p:txBody>
-          <a:bodyPr wrap="square" lIns="0" rIns="0" tIns="0" bIns="0" anchor="t">
-            <a:spAutoFit/>
-          </a:bodyPr>
-          <a:lstStyle/>
-          <a:p>
-            <a:pPr algn="l"/>
-            <a:r>
-              <a:rPr sz="1350">
-                <a:solidFill>
-                  <a:srgbClr val="6B6B6B"/>
-                </a:solidFill>
-                <a:latin typeface="Calibri"/>
-              </a:rPr>
-              <a:t>Visual quality 35% · computational understanding 25% · technical execution 20% · experimentation 10% · requirements and identity 10%.</a:t>
-            </a:r>
-          </a:p>
-        </p:txBody>
-      </p:sp>
-      <p:sp>
-        <p:nvSpPr>
-          <p:cNvPr id="5" name="Rectangle 4"/>
-          <p:cNvSpPr/>
-          <p:nvPr/>
-        </p:nvSpPr>
-        <p:spPr>
-          <a:xfrm>
-            <a:off x="662940" y="1851660"/>
-            <a:ext cx="777240" cy="579120"/>
-          </a:xfrm>
-          <a:prstGeom prst="rect">
-            <a:avLst/>
-          </a:prstGeom>
-          <a:solidFill>
-            <a:srgbClr val="000000"/>
-          </a:solidFill>
-          <a:ln w="6350">
-            <a:solidFill>
-              <a:srgbClr val="000000"/>
-            </a:solidFill>
-          </a:ln>
-          <a:effectLst/>
-        </p:spPr>
-        <p:style>
-          <a:lnRef idx="1">
-            <a:schemeClr val="accent1"/>
-          </a:lnRef>
-          <a:fillRef idx="3">
-            <a:schemeClr val="accent1"/>
-          </a:fillRef>
-          <a:effectRef idx="2">
-            <a:schemeClr val="accent1"/>
-          </a:effectRef>
-          <a:fontRef idx="minor">
-            <a:schemeClr val="lt1"/>
-          </a:fontRef>
-        </p:style>
-        <p:txBody>
-          <a:bodyPr rtlCol="0" anchor="ctr"/>
-          <a:lstStyle/>
-          <a:p/>
-        </p:txBody>
-      </p:sp>
-      <p:sp>
-        <p:nvSpPr>
-          <p:cNvPr id="6" name="Rectangle 5"/>
-          <p:cNvSpPr/>
-          <p:nvPr/>
-        </p:nvSpPr>
-        <p:spPr>
-          <a:xfrm>
-            <a:off x="594360" y="1783080"/>
-            <a:ext cx="777240" cy="579120"/>
-          </a:xfrm>
-          <a:prstGeom prst="rect">
-            <a:avLst/>
-          </a:prstGeom>
-          <a:solidFill>
-            <a:srgbClr val="00D9E1"/>
-          </a:solidFill>
-          <a:ln w="34925">
-            <a:solidFill>
-              <a:srgbClr val="000000"/>
-            </a:solidFill>
-          </a:ln>
-          <a:effectLst/>
-        </p:spPr>
-        <p:style>
-          <a:lnRef idx="1">
-            <a:schemeClr val="accent1"/>
-          </a:lnRef>
-          <a:fillRef idx="3">
-            <a:schemeClr val="accent1"/>
-          </a:fillRef>
-          <a:effectRef idx="2">
-            <a:schemeClr val="accent1"/>
-          </a:effectRef>
-          <a:fontRef idx="minor">
-            <a:schemeClr val="lt1"/>
-          </a:fontRef>
-        </p:style>
-        <p:txBody>
-          <a:bodyPr rtlCol="0" anchor="ctr"/>
-          <a:lstStyle/>
-          <a:p/>
-        </p:txBody>
-      </p:sp>
-      <p:sp>
-        <p:nvSpPr>
-          <p:cNvPr id="7" name="TextBox 6"/>
-          <p:cNvSpPr txBox="1"/>
-          <p:nvPr/>
-        </p:nvSpPr>
-        <p:spPr>
-          <a:xfrm>
-            <a:off x="594360" y="1972056"/>
-            <a:ext cx="777240" cy="274320"/>
-          </a:xfrm>
-          <a:prstGeom prst="rect">
-            <a:avLst/>
-          </a:prstGeom>
-          <a:noFill/>
-        </p:spPr>
-        <p:txBody>
-          <a:bodyPr wrap="square" lIns="0" rIns="0" tIns="0" bIns="0" anchor="t">
-            <a:spAutoFit/>
-          </a:bodyPr>
-          <a:lstStyle/>
-          <a:p>
-            <a:pPr algn="ctr"/>
-            <a:r>
-              <a:rPr sz="1500" b="1">
-                <a:solidFill>
-                  <a:srgbClr val="000000"/>
-                </a:solidFill>
-                <a:latin typeface="Arial"/>
-              </a:rPr>
-              <a:t>01</a:t>
-            </a:r>
-          </a:p>
-        </p:txBody>
-      </p:sp>
-      <p:sp>
-        <p:nvSpPr>
-          <p:cNvPr id="8" name="Rectangle 7"/>
-          <p:cNvSpPr/>
-          <p:nvPr/>
-        </p:nvSpPr>
-        <p:spPr>
-          <a:xfrm>
-            <a:off x="1714499" y="1851660"/>
-            <a:ext cx="9921240" cy="579120"/>
-          </a:xfrm>
-          <a:prstGeom prst="rect">
-            <a:avLst/>
-          </a:prstGeom>
-          <a:solidFill>
-            <a:srgbClr val="000000"/>
-          </a:solidFill>
-          <a:ln w="6350">
-            <a:solidFill>
-              <a:srgbClr val="000000"/>
-            </a:solidFill>
-          </a:ln>
-          <a:effectLst/>
-        </p:spPr>
-        <p:style>
-          <a:lnRef idx="1">
-            <a:schemeClr val="accent1"/>
-          </a:lnRef>
-          <a:fillRef idx="3">
-            <a:schemeClr val="accent1"/>
-          </a:fillRef>
-          <a:effectRef idx="2">
-            <a:schemeClr val="accent1"/>
-          </a:effectRef>
-          <a:fontRef idx="minor">
-            <a:schemeClr val="lt1"/>
-          </a:fontRef>
-        </p:style>
-        <p:txBody>
-          <a:bodyPr rtlCol="0" anchor="ctr"/>
-          <a:lstStyle/>
-          <a:p/>
-        </p:txBody>
-      </p:sp>
-      <p:sp>
-        <p:nvSpPr>
-          <p:cNvPr id="9" name="Rectangle 8"/>
-          <p:cNvSpPr/>
-          <p:nvPr/>
-        </p:nvSpPr>
-        <p:spPr>
-          <a:xfrm>
-            <a:off x="1645919" y="1783080"/>
-            <a:ext cx="9921240" cy="579120"/>
-          </a:xfrm>
-          <a:prstGeom prst="rect">
-            <a:avLst/>
-          </a:prstGeom>
-          <a:solidFill>
-            <a:srgbClr val="FFFDF7"/>
-          </a:solidFill>
-          <a:ln w="34925">
-            <a:solidFill>
-              <a:srgbClr val="000000"/>
-            </a:solidFill>
-          </a:ln>
-          <a:effectLst/>
-        </p:spPr>
-        <p:style>
-          <a:lnRef idx="1">
-            <a:schemeClr val="accent1"/>
-          </a:lnRef>
-          <a:fillRef idx="3">
-            <a:schemeClr val="accent1"/>
-          </a:fillRef>
-          <a:effectRef idx="2">
-            <a:schemeClr val="accent1"/>
-          </a:effectRef>
-          <a:fontRef idx="minor">
-            <a:schemeClr val="lt1"/>
-          </a:fontRef>
-        </p:style>
-        <p:txBody>
-          <a:bodyPr rtlCol="0" anchor="ctr"/>
-          <a:lstStyle/>
-          <a:p/>
-        </p:txBody>
-      </p:sp>
-      <p:sp>
-        <p:nvSpPr>
-          <p:cNvPr id="10" name="TextBox 9"/>
-          <p:cNvSpPr txBox="1"/>
-          <p:nvPr/>
-        </p:nvSpPr>
-        <p:spPr>
-          <a:xfrm>
-            <a:off x="1920240" y="1874519"/>
-            <a:ext cx="9372600" cy="396239"/>
-          </a:xfrm>
-          <a:prstGeom prst="rect">
-            <a:avLst/>
-          </a:prstGeom>
-          <a:noFill/>
-        </p:spPr>
-        <p:txBody>
-          <a:bodyPr wrap="square" lIns="0" rIns="0" tIns="0" bIns="0" anchor="ctr">
-            <a:spAutoFit/>
-          </a:bodyPr>
-          <a:lstStyle/>
-          <a:p>
-            <a:pPr algn="l">
-              <a:lnSpc>
-                <a:spcPct val="125000"/>
-              </a:lnSpc>
-            </a:pPr>
-            <a:r>
-              <a:rPr sz="1200">
-                <a:solidFill>
-                  <a:srgbClr val="000000"/>
-                </a:solidFill>
-                <a:latin typeface="Calibri"/>
-              </a:rPr>
-              <a:t>One 17 × 11 inch sheet carrying an ordered sequence of eight or nine numbered diagrams: one operation per diagram, read in order, each showing what the one before it produced.</a:t>
-            </a:r>
-          </a:p>
-        </p:txBody>
-      </p:sp>
-      <p:sp>
-        <p:nvSpPr>
-          <p:cNvPr id="11" name="Rectangle 10"/>
-          <p:cNvSpPr/>
-          <p:nvPr/>
-        </p:nvSpPr>
-        <p:spPr>
-          <a:xfrm>
-            <a:off x="662940" y="2577084"/>
-            <a:ext cx="777240" cy="579120"/>
-          </a:xfrm>
-          <a:prstGeom prst="rect">
-            <a:avLst/>
-          </a:prstGeom>
-          <a:solidFill>
-            <a:srgbClr val="000000"/>
-          </a:solidFill>
-          <a:ln w="6350">
-            <a:solidFill>
-              <a:srgbClr val="000000"/>
-            </a:solidFill>
-          </a:ln>
-          <a:effectLst/>
-        </p:spPr>
-        <p:style>
-          <a:lnRef idx="1">
-            <a:schemeClr val="accent1"/>
-          </a:lnRef>
-          <a:fillRef idx="3">
-            <a:schemeClr val="accent1"/>
-          </a:fillRef>
-          <a:effectRef idx="2">
-            <a:schemeClr val="accent1"/>
-          </a:effectRef>
-          <a:fontRef idx="minor">
-            <a:schemeClr val="lt1"/>
-          </a:fontRef>
-        </p:style>
-        <p:txBody>
-          <a:bodyPr rtlCol="0" anchor="ctr"/>
-          <a:lstStyle/>
-          <a:p/>
-        </p:txBody>
-      </p:sp>
-      <p:sp>
-        <p:nvSpPr>
-          <p:cNvPr id="12" name="Rectangle 11"/>
-          <p:cNvSpPr/>
-          <p:nvPr/>
-        </p:nvSpPr>
-        <p:spPr>
-          <a:xfrm>
-            <a:off x="594360" y="2508504"/>
-            <a:ext cx="777240" cy="579120"/>
-          </a:xfrm>
-          <a:prstGeom prst="rect">
-            <a:avLst/>
-          </a:prstGeom>
-          <a:solidFill>
-            <a:srgbClr val="C6F035"/>
-          </a:solidFill>
-          <a:ln w="34925">
-            <a:solidFill>
-              <a:srgbClr val="000000"/>
-            </a:solidFill>
-          </a:ln>
-          <a:effectLst/>
-        </p:spPr>
-        <p:style>
-          <a:lnRef idx="1">
-            <a:schemeClr val="accent1"/>
-          </a:lnRef>
-          <a:fillRef idx="3">
-            <a:schemeClr val="accent1"/>
-          </a:fillRef>
-          <a:effectRef idx="2">
-            <a:schemeClr val="accent1"/>
-          </a:effectRef>
-          <a:fontRef idx="minor">
-            <a:schemeClr val="lt1"/>
-          </a:fontRef>
-        </p:style>
-        <p:txBody>
-          <a:bodyPr rtlCol="0" anchor="ctr"/>
-          <a:lstStyle/>
-          <a:p/>
-        </p:txBody>
-      </p:sp>
-      <p:sp>
-        <p:nvSpPr>
-          <p:cNvPr id="13" name="TextBox 12"/>
-          <p:cNvSpPr txBox="1"/>
-          <p:nvPr/>
-        </p:nvSpPr>
-        <p:spPr>
-          <a:xfrm>
-            <a:off x="594360" y="2697479"/>
-            <a:ext cx="777240" cy="274320"/>
-          </a:xfrm>
-          <a:prstGeom prst="rect">
-            <a:avLst/>
-          </a:prstGeom>
-          <a:noFill/>
-        </p:spPr>
-        <p:txBody>
-          <a:bodyPr wrap="square" lIns="0" rIns="0" tIns="0" bIns="0" anchor="t">
-            <a:spAutoFit/>
-          </a:bodyPr>
-          <a:lstStyle/>
-          <a:p>
-            <a:pPr algn="ctr"/>
-            <a:r>
-              <a:rPr sz="1500" b="1">
-                <a:solidFill>
-                  <a:srgbClr val="000000"/>
-                </a:solidFill>
-                <a:latin typeface="Arial"/>
-              </a:rPr>
-              <a:t>02</a:t>
-            </a:r>
-          </a:p>
-        </p:txBody>
-      </p:sp>
-      <p:sp>
-        <p:nvSpPr>
-          <p:cNvPr id="14" name="Rectangle 13"/>
-          <p:cNvSpPr/>
-          <p:nvPr/>
-        </p:nvSpPr>
-        <p:spPr>
-          <a:xfrm>
-            <a:off x="1714499" y="2577084"/>
-            <a:ext cx="9921240" cy="579120"/>
-          </a:xfrm>
-          <a:prstGeom prst="rect">
-            <a:avLst/>
-          </a:prstGeom>
-          <a:solidFill>
-            <a:srgbClr val="000000"/>
-          </a:solidFill>
-          <a:ln w="6350">
-            <a:solidFill>
-              <a:srgbClr val="000000"/>
-            </a:solidFill>
-          </a:ln>
-          <a:effectLst/>
-        </p:spPr>
-        <p:style>
-          <a:lnRef idx="1">
-            <a:schemeClr val="accent1"/>
-          </a:lnRef>
-          <a:fillRef idx="3">
-            <a:schemeClr val="accent1"/>
-          </a:fillRef>
-          <a:effectRef idx="2">
-            <a:schemeClr val="accent1"/>
-          </a:effectRef>
-          <a:fontRef idx="minor">
-            <a:schemeClr val="lt1"/>
-          </a:fontRef>
-        </p:style>
-        <p:txBody>
-          <a:bodyPr rtlCol="0" anchor="ctr"/>
-          <a:lstStyle/>
-          <a:p/>
-        </p:txBody>
-      </p:sp>
-      <p:sp>
-        <p:nvSpPr>
-          <p:cNvPr id="15" name="Rectangle 14"/>
-          <p:cNvSpPr/>
-          <p:nvPr/>
-        </p:nvSpPr>
-        <p:spPr>
-          <a:xfrm>
-            <a:off x="1645919" y="2508504"/>
-            <a:ext cx="9921240" cy="579120"/>
-          </a:xfrm>
-          <a:prstGeom prst="rect">
-            <a:avLst/>
-          </a:prstGeom>
-          <a:solidFill>
-            <a:srgbClr val="FFFDF7"/>
-          </a:solidFill>
-          <a:ln w="34925">
-            <a:solidFill>
-              <a:srgbClr val="000000"/>
-            </a:solidFill>
-          </a:ln>
-          <a:effectLst/>
-        </p:spPr>
-        <p:style>
-          <a:lnRef idx="1">
-            <a:schemeClr val="accent1"/>
-          </a:lnRef>
-          <a:fillRef idx="3">
-            <a:schemeClr val="accent1"/>
-          </a:fillRef>
-          <a:effectRef idx="2">
-            <a:schemeClr val="accent1"/>
-          </a:effectRef>
-          <a:fontRef idx="minor">
-            <a:schemeClr val="lt1"/>
-          </a:fontRef>
-        </p:style>
-        <p:txBody>
-          <a:bodyPr rtlCol="0" anchor="ctr"/>
-          <a:lstStyle/>
-          <a:p/>
-        </p:txBody>
-      </p:sp>
-      <p:sp>
-        <p:nvSpPr>
-          <p:cNvPr id="16" name="TextBox 15"/>
-          <p:cNvSpPr txBox="1"/>
-          <p:nvPr/>
-        </p:nvSpPr>
-        <p:spPr>
-          <a:xfrm>
-            <a:off x="1920240" y="2599944"/>
-            <a:ext cx="9372600" cy="396239"/>
-          </a:xfrm>
-          <a:prstGeom prst="rect">
-            <a:avLst/>
-          </a:prstGeom>
-          <a:noFill/>
-        </p:spPr>
-        <p:txBody>
-          <a:bodyPr wrap="square" lIns="0" rIns="0" tIns="0" bIns="0" anchor="ctr">
-            <a:spAutoFit/>
-          </a:bodyPr>
-          <a:lstStyle/>
-          <a:p>
-            <a:pPr algn="l">
-              <a:lnSpc>
-                <a:spcPct val="125000"/>
-              </a:lnSpc>
-            </a:pPr>
-            <a:r>
-              <a:rPr sz="1200">
-                <a:solidFill>
-                  <a:srgbClr val="000000"/>
-                </a:solidFill>
-                <a:latin typeface="Calibri"/>
-              </a:rPr>
-              <a:t>Use at least three primitives, at least three transformations covering translate, rotate and scale, and at least three Boolean operations covering union, difference and intersection. Name the operands of every subtraction — which solid is kept and which is removed.</a:t>
-            </a:r>
-          </a:p>
-        </p:txBody>
-      </p:sp>
-      <p:sp>
-        <p:nvSpPr>
-          <p:cNvPr id="17" name="Rectangle 16"/>
-          <p:cNvSpPr/>
-          <p:nvPr/>
-        </p:nvSpPr>
-        <p:spPr>
-          <a:xfrm>
-            <a:off x="662940" y="3302508"/>
-            <a:ext cx="777240" cy="579120"/>
-          </a:xfrm>
-          <a:prstGeom prst="rect">
-            <a:avLst/>
-          </a:prstGeom>
-          <a:solidFill>
-            <a:srgbClr val="000000"/>
-          </a:solidFill>
-          <a:ln w="6350">
-            <a:solidFill>
-              <a:srgbClr val="000000"/>
-            </a:solidFill>
-          </a:ln>
-          <a:effectLst/>
-        </p:spPr>
-        <p:style>
-          <a:lnRef idx="1">
-            <a:schemeClr val="accent1"/>
-          </a:lnRef>
-          <a:fillRef idx="3">
-            <a:schemeClr val="accent1"/>
-          </a:fillRef>
-          <a:effectRef idx="2">
-            <a:schemeClr val="accent1"/>
-          </a:effectRef>
-          <a:fontRef idx="minor">
-            <a:schemeClr val="lt1"/>
-          </a:fontRef>
-        </p:style>
-        <p:txBody>
-          <a:bodyPr rtlCol="0" anchor="ctr"/>
-          <a:lstStyle/>
-          <a:p/>
-        </p:txBody>
-      </p:sp>
-      <p:sp>
-        <p:nvSpPr>
-          <p:cNvPr id="18" name="Rectangle 17"/>
-          <p:cNvSpPr/>
-          <p:nvPr/>
-        </p:nvSpPr>
-        <p:spPr>
-          <a:xfrm>
-            <a:off x="594360" y="3233928"/>
-            <a:ext cx="777240" cy="579120"/>
-          </a:xfrm>
-          <a:prstGeom prst="rect">
-            <a:avLst/>
-          </a:prstGeom>
-          <a:solidFill>
-            <a:srgbClr val="FFE500"/>
-          </a:solidFill>
-          <a:ln w="34925">
-            <a:solidFill>
-              <a:srgbClr val="000000"/>
-            </a:solidFill>
-          </a:ln>
-          <a:effectLst/>
-        </p:spPr>
-        <p:style>
-          <a:lnRef idx="1">
-            <a:schemeClr val="accent1"/>
-          </a:lnRef>
-          <a:fillRef idx="3">
-            <a:schemeClr val="accent1"/>
-          </a:fillRef>
-          <a:effectRef idx="2">
-            <a:schemeClr val="accent1"/>
-          </a:effectRef>
-          <a:fontRef idx="minor">
-            <a:schemeClr val="lt1"/>
-          </a:fontRef>
-        </p:style>
-        <p:txBody>
-          <a:bodyPr rtlCol="0" anchor="ctr"/>
-          <a:lstStyle/>
-          <a:p/>
-        </p:txBody>
-      </p:sp>
-      <p:sp>
-        <p:nvSpPr>
-          <p:cNvPr id="19" name="TextBox 18"/>
-          <p:cNvSpPr txBox="1"/>
-          <p:nvPr/>
-        </p:nvSpPr>
-        <p:spPr>
-          <a:xfrm>
-            <a:off x="594360" y="3422904"/>
-            <a:ext cx="777240" cy="274320"/>
-          </a:xfrm>
-          <a:prstGeom prst="rect">
-            <a:avLst/>
-          </a:prstGeom>
-          <a:noFill/>
-        </p:spPr>
-        <p:txBody>
-          <a:bodyPr wrap="square" lIns="0" rIns="0" tIns="0" bIns="0" anchor="t">
-            <a:spAutoFit/>
-          </a:bodyPr>
-          <a:lstStyle/>
-          <a:p>
-            <a:pPr algn="ctr"/>
-            <a:r>
-              <a:rPr sz="1500" b="1">
-                <a:solidFill>
-                  <a:srgbClr val="000000"/>
-                </a:solidFill>
-                <a:latin typeface="Arial"/>
-              </a:rPr>
-              <a:t>03</a:t>
-            </a:r>
-          </a:p>
-        </p:txBody>
-      </p:sp>
-      <p:sp>
-        <p:nvSpPr>
-          <p:cNvPr id="20" name="Rectangle 19"/>
-          <p:cNvSpPr/>
-          <p:nvPr/>
-        </p:nvSpPr>
-        <p:spPr>
-          <a:xfrm>
-            <a:off x="1714499" y="3302508"/>
-            <a:ext cx="9921240" cy="579120"/>
-          </a:xfrm>
-          <a:prstGeom prst="rect">
-            <a:avLst/>
-          </a:prstGeom>
-          <a:solidFill>
-            <a:srgbClr val="000000"/>
-          </a:solidFill>
-          <a:ln w="6350">
-            <a:solidFill>
-              <a:srgbClr val="000000"/>
-            </a:solidFill>
-          </a:ln>
-          <a:effectLst/>
-        </p:spPr>
-        <p:style>
-          <a:lnRef idx="1">
-            <a:schemeClr val="accent1"/>
-          </a:lnRef>
-          <a:fillRef idx="3">
-            <a:schemeClr val="accent1"/>
-          </a:fillRef>
-          <a:effectRef idx="2">
-            <a:schemeClr val="accent1"/>
-          </a:effectRef>
-          <a:fontRef idx="minor">
-            <a:schemeClr val="lt1"/>
-          </a:fontRef>
-        </p:style>
-        <p:txBody>
-          <a:bodyPr rtlCol="0" anchor="ctr"/>
-          <a:lstStyle/>
-          <a:p/>
-        </p:txBody>
-      </p:sp>
-      <p:sp>
-        <p:nvSpPr>
-          <p:cNvPr id="21" name="Rectangle 20"/>
-          <p:cNvSpPr/>
-          <p:nvPr/>
-        </p:nvSpPr>
-        <p:spPr>
-          <a:xfrm>
-            <a:off x="1645919" y="3233928"/>
-            <a:ext cx="9921240" cy="579120"/>
-          </a:xfrm>
-          <a:prstGeom prst="rect">
-            <a:avLst/>
-          </a:prstGeom>
-          <a:solidFill>
-            <a:srgbClr val="FFFDF7"/>
-          </a:solidFill>
-          <a:ln w="34925">
-            <a:solidFill>
-              <a:srgbClr val="000000"/>
-            </a:solidFill>
-          </a:ln>
-          <a:effectLst/>
-        </p:spPr>
-        <p:style>
-          <a:lnRef idx="1">
-            <a:schemeClr val="accent1"/>
-          </a:lnRef>
-          <a:fillRef idx="3">
-            <a:schemeClr val="accent1"/>
-          </a:fillRef>
-          <a:effectRef idx="2">
-            <a:schemeClr val="accent1"/>
-          </a:effectRef>
-          <a:fontRef idx="minor">
-            <a:schemeClr val="lt1"/>
-          </a:fontRef>
-        </p:style>
-        <p:txBody>
-          <a:bodyPr rtlCol="0" anchor="ctr"/>
-          <a:lstStyle/>
-          <a:p/>
-        </p:txBody>
-      </p:sp>
-      <p:sp>
-        <p:nvSpPr>
-          <p:cNvPr id="22" name="TextBox 21"/>
-          <p:cNvSpPr txBox="1"/>
-          <p:nvPr/>
-        </p:nvSpPr>
-        <p:spPr>
-          <a:xfrm>
-            <a:off x="1920240" y="3325368"/>
-            <a:ext cx="9372600" cy="396239"/>
-          </a:xfrm>
-          <a:prstGeom prst="rect">
-            <a:avLst/>
-          </a:prstGeom>
-          <a:noFill/>
-        </p:spPr>
-        <p:txBody>
-          <a:bodyPr wrap="square" lIns="0" rIns="0" tIns="0" bIns="0" anchor="ctr">
-            <a:spAutoFit/>
-          </a:bodyPr>
-          <a:lstStyle/>
-          <a:p>
-            <a:pPr algn="l">
-              <a:lnSpc>
-                <a:spcPct val="125000"/>
-              </a:lnSpc>
-            </a:pPr>
-            <a:r>
-              <a:rPr sz="1200">
-                <a:solidFill>
-                  <a:srgbClr val="000000"/>
-                </a:solidFill>
-                <a:latin typeface="Calibri"/>
-              </a:rPr>
-              <a:t>Develop the last diagram as a drawing rather than a diagram: the final solid at building scale, with a 1.75 m human figure, vegetation, ground and shadow, so the sequence ends in something readable as architecture.</a:t>
-            </a:r>
-          </a:p>
-        </p:txBody>
-      </p:sp>
-      <p:sp>
-        <p:nvSpPr>
-          <p:cNvPr id="23" name="Rectangle 22"/>
-          <p:cNvSpPr/>
-          <p:nvPr/>
-        </p:nvSpPr>
-        <p:spPr>
-          <a:xfrm>
-            <a:off x="662940" y="4027932"/>
-            <a:ext cx="777240" cy="579120"/>
-          </a:xfrm>
-          <a:prstGeom prst="rect">
-            <a:avLst/>
-          </a:prstGeom>
-          <a:solidFill>
-            <a:srgbClr val="000000"/>
-          </a:solidFill>
-          <a:ln w="6350">
-            <a:solidFill>
-              <a:srgbClr val="000000"/>
-            </a:solidFill>
-          </a:ln>
-          <a:effectLst/>
-        </p:spPr>
-        <p:style>
-          <a:lnRef idx="1">
-            <a:schemeClr val="accent1"/>
-          </a:lnRef>
-          <a:fillRef idx="3">
-            <a:schemeClr val="accent1"/>
-          </a:fillRef>
-          <a:effectRef idx="2">
-            <a:schemeClr val="accent1"/>
-          </a:effectRef>
-          <a:fontRef idx="minor">
-            <a:schemeClr val="lt1"/>
-          </a:fontRef>
-        </p:style>
-        <p:txBody>
-          <a:bodyPr rtlCol="0" anchor="ctr"/>
-          <a:lstStyle/>
-          <a:p/>
-        </p:txBody>
-      </p:sp>
-      <p:sp>
-        <p:nvSpPr>
-          <p:cNvPr id="24" name="Rectangle 23"/>
-          <p:cNvSpPr/>
-          <p:nvPr/>
-        </p:nvSpPr>
-        <p:spPr>
-          <a:xfrm>
-            <a:off x="594360" y="3959352"/>
-            <a:ext cx="777240" cy="579120"/>
-          </a:xfrm>
-          <a:prstGeom prst="rect">
-            <a:avLst/>
-          </a:prstGeom>
-          <a:solidFill>
-            <a:srgbClr val="FF4D8D"/>
-          </a:solidFill>
-          <a:ln w="34925">
-            <a:solidFill>
-              <a:srgbClr val="000000"/>
-            </a:solidFill>
-          </a:ln>
-          <a:effectLst/>
-        </p:spPr>
-        <p:style>
-          <a:lnRef idx="1">
-            <a:schemeClr val="accent1"/>
-          </a:lnRef>
-          <a:fillRef idx="3">
-            <a:schemeClr val="accent1"/>
-          </a:fillRef>
-          <a:effectRef idx="2">
-            <a:schemeClr val="accent1"/>
-          </a:effectRef>
-          <a:fontRef idx="minor">
-            <a:schemeClr val="lt1"/>
-          </a:fontRef>
-        </p:style>
-        <p:txBody>
-          <a:bodyPr rtlCol="0" anchor="ctr"/>
-          <a:lstStyle/>
-          <a:p/>
-        </p:txBody>
-      </p:sp>
-      <p:sp>
-        <p:nvSpPr>
-          <p:cNvPr id="25" name="TextBox 24"/>
-          <p:cNvSpPr txBox="1"/>
-          <p:nvPr/>
-        </p:nvSpPr>
-        <p:spPr>
-          <a:xfrm>
-            <a:off x="594360" y="4148328"/>
-            <a:ext cx="777240" cy="274320"/>
-          </a:xfrm>
-          <a:prstGeom prst="rect">
-            <a:avLst/>
-          </a:prstGeom>
-          <a:noFill/>
-        </p:spPr>
-        <p:txBody>
-          <a:bodyPr wrap="square" lIns="0" rIns="0" tIns="0" bIns="0" anchor="t">
-            <a:spAutoFit/>
-          </a:bodyPr>
-          <a:lstStyle/>
-          <a:p>
-            <a:pPr algn="ctr"/>
-            <a:r>
-              <a:rPr sz="1500" b="1">
-                <a:solidFill>
-                  <a:srgbClr val="000000"/>
-                </a:solidFill>
-                <a:latin typeface="Arial"/>
-              </a:rPr>
-              <a:t>04</a:t>
-            </a:r>
-          </a:p>
-        </p:txBody>
-      </p:sp>
-      <p:sp>
-        <p:nvSpPr>
-          <p:cNvPr id="26" name="Rectangle 25"/>
-          <p:cNvSpPr/>
-          <p:nvPr/>
-        </p:nvSpPr>
-        <p:spPr>
-          <a:xfrm>
-            <a:off x="1714499" y="4027932"/>
-            <a:ext cx="9921240" cy="579120"/>
-          </a:xfrm>
-          <a:prstGeom prst="rect">
-            <a:avLst/>
-          </a:prstGeom>
-          <a:solidFill>
-            <a:srgbClr val="000000"/>
-          </a:solidFill>
-          <a:ln w="6350">
-            <a:solidFill>
-              <a:srgbClr val="000000"/>
-            </a:solidFill>
-          </a:ln>
-          <a:effectLst/>
-        </p:spPr>
-        <p:style>
-          <a:lnRef idx="1">
-            <a:schemeClr val="accent1"/>
-          </a:lnRef>
-          <a:fillRef idx="3">
-            <a:schemeClr val="accent1"/>
-          </a:fillRef>
-          <a:effectRef idx="2">
-            <a:schemeClr val="accent1"/>
-          </a:effectRef>
-          <a:fontRef idx="minor">
-            <a:schemeClr val="lt1"/>
-          </a:fontRef>
-        </p:style>
-        <p:txBody>
-          <a:bodyPr rtlCol="0" anchor="ctr"/>
-          <a:lstStyle/>
-          <a:p/>
-        </p:txBody>
-      </p:sp>
-      <p:sp>
-        <p:nvSpPr>
-          <p:cNvPr id="27" name="Rectangle 26"/>
-          <p:cNvSpPr/>
-          <p:nvPr/>
-        </p:nvSpPr>
-        <p:spPr>
-          <a:xfrm>
-            <a:off x="1645919" y="3959352"/>
-            <a:ext cx="9921240" cy="579120"/>
-          </a:xfrm>
-          <a:prstGeom prst="rect">
-            <a:avLst/>
-          </a:prstGeom>
-          <a:solidFill>
-            <a:srgbClr val="FFFDF7"/>
-          </a:solidFill>
-          <a:ln w="34925">
-            <a:solidFill>
-              <a:srgbClr val="000000"/>
-            </a:solidFill>
-          </a:ln>
-          <a:effectLst/>
-        </p:spPr>
-        <p:style>
-          <a:lnRef idx="1">
-            <a:schemeClr val="accent1"/>
-          </a:lnRef>
-          <a:fillRef idx="3">
-            <a:schemeClr val="accent1"/>
-          </a:fillRef>
-          <a:effectRef idx="2">
-            <a:schemeClr val="accent1"/>
-          </a:effectRef>
-          <a:fontRef idx="minor">
-            <a:schemeClr val="lt1"/>
-          </a:fontRef>
-        </p:style>
-        <p:txBody>
-          <a:bodyPr rtlCol="0" anchor="ctr"/>
-          <a:lstStyle/>
-          <a:p/>
-        </p:txBody>
-      </p:sp>
-      <p:sp>
-        <p:nvSpPr>
-          <p:cNvPr id="28" name="TextBox 27"/>
-          <p:cNvSpPr txBox="1"/>
-          <p:nvPr/>
-        </p:nvSpPr>
-        <p:spPr>
-          <a:xfrm>
-            <a:off x="1920240" y="4050791"/>
-            <a:ext cx="9372600" cy="396239"/>
-          </a:xfrm>
-          <a:prstGeom prst="rect">
-            <a:avLst/>
-          </a:prstGeom>
-          <a:noFill/>
-        </p:spPr>
-        <p:txBody>
-          <a:bodyPr wrap="square" lIns="0" rIns="0" tIns="0" bIns="0" anchor="ctr">
-            <a:spAutoFit/>
-          </a:bodyPr>
-          <a:lstStyle/>
-          <a:p>
-            <a:pPr algn="l">
-              <a:lnSpc>
-                <a:spcPct val="125000"/>
-              </a:lnSpc>
-            </a:pPr>
-            <a:r>
-              <a:rPr sz="1200">
-                <a:solidFill>
-                  <a:srgbClr val="000000"/>
-                </a:solidFill>
-                <a:latin typeface="Calibri"/>
-              </a:rPr>
-              <a:t>Write the sequence out as pseudocode beside the diagrams — one line per operation, in the same order as the diagrams, with the parameters you exposed.</a:t>
-            </a:r>
-          </a:p>
-        </p:txBody>
-      </p:sp>
-      <p:sp>
-        <p:nvSpPr>
-          <p:cNvPr id="29" name="Rectangle 28"/>
-          <p:cNvSpPr/>
-          <p:nvPr/>
-        </p:nvSpPr>
-        <p:spPr>
-          <a:xfrm>
-            <a:off x="662940" y="4753356"/>
-            <a:ext cx="777240" cy="579120"/>
-          </a:xfrm>
-          <a:prstGeom prst="rect">
-            <a:avLst/>
-          </a:prstGeom>
-          <a:solidFill>
-            <a:srgbClr val="000000"/>
-          </a:solidFill>
-          <a:ln w="6350">
-            <a:solidFill>
-              <a:srgbClr val="000000"/>
-            </a:solidFill>
-          </a:ln>
-          <a:effectLst/>
-        </p:spPr>
-        <p:style>
-          <a:lnRef idx="1">
-            <a:schemeClr val="accent1"/>
-          </a:lnRef>
-          <a:fillRef idx="3">
-            <a:schemeClr val="accent1"/>
-          </a:fillRef>
-          <a:effectRef idx="2">
-            <a:schemeClr val="accent1"/>
-          </a:effectRef>
-          <a:fontRef idx="minor">
-            <a:schemeClr val="lt1"/>
-          </a:fontRef>
-        </p:style>
-        <p:txBody>
-          <a:bodyPr rtlCol="0" anchor="ctr"/>
-          <a:lstStyle/>
-          <a:p/>
-        </p:txBody>
-      </p:sp>
-      <p:sp>
-        <p:nvSpPr>
-          <p:cNvPr id="30" name="Rectangle 29"/>
-          <p:cNvSpPr/>
-          <p:nvPr/>
-        </p:nvSpPr>
-        <p:spPr>
-          <a:xfrm>
-            <a:off x="594360" y="4684776"/>
-            <a:ext cx="777240" cy="579120"/>
-          </a:xfrm>
-          <a:prstGeom prst="rect">
-            <a:avLst/>
-          </a:prstGeom>
-          <a:solidFill>
-            <a:srgbClr val="00D9E1"/>
-          </a:solidFill>
-          <a:ln w="34925">
-            <a:solidFill>
-              <a:srgbClr val="000000"/>
-            </a:solidFill>
-          </a:ln>
-          <a:effectLst/>
-        </p:spPr>
-        <p:style>
-          <a:lnRef idx="1">
-            <a:schemeClr val="accent1"/>
-          </a:lnRef>
-          <a:fillRef idx="3">
-            <a:schemeClr val="accent1"/>
-          </a:fillRef>
-          <a:effectRef idx="2">
-            <a:schemeClr val="accent1"/>
-          </a:effectRef>
-          <a:fontRef idx="minor">
-            <a:schemeClr val="lt1"/>
-          </a:fontRef>
-        </p:style>
-        <p:txBody>
-          <a:bodyPr rtlCol="0" anchor="ctr"/>
-          <a:lstStyle/>
-          <a:p/>
-        </p:txBody>
-      </p:sp>
-      <p:sp>
-        <p:nvSpPr>
-          <p:cNvPr id="31" name="TextBox 30"/>
-          <p:cNvSpPr txBox="1"/>
-          <p:nvPr/>
-        </p:nvSpPr>
-        <p:spPr>
-          <a:xfrm>
-            <a:off x="594360" y="4873752"/>
-            <a:ext cx="777240" cy="274320"/>
-          </a:xfrm>
-          <a:prstGeom prst="rect">
-            <a:avLst/>
-          </a:prstGeom>
-          <a:noFill/>
-        </p:spPr>
-        <p:txBody>
-          <a:bodyPr wrap="square" lIns="0" rIns="0" tIns="0" bIns="0" anchor="t">
-            <a:spAutoFit/>
-          </a:bodyPr>
-          <a:lstStyle/>
-          <a:p>
-            <a:pPr algn="ctr"/>
-            <a:r>
-              <a:rPr sz="1500" b="1">
-                <a:solidFill>
-                  <a:srgbClr val="000000"/>
-                </a:solidFill>
-                <a:latin typeface="Arial"/>
-              </a:rPr>
-              <a:t>05</a:t>
-            </a:r>
-          </a:p>
-        </p:txBody>
-      </p:sp>
-      <p:sp>
-        <p:nvSpPr>
-          <p:cNvPr id="32" name="Rectangle 31"/>
-          <p:cNvSpPr/>
-          <p:nvPr/>
-        </p:nvSpPr>
-        <p:spPr>
-          <a:xfrm>
-            <a:off x="1714499" y="4753356"/>
-            <a:ext cx="9921240" cy="579120"/>
-          </a:xfrm>
-          <a:prstGeom prst="rect">
-            <a:avLst/>
-          </a:prstGeom>
-          <a:solidFill>
-            <a:srgbClr val="000000"/>
-          </a:solidFill>
-          <a:ln w="6350">
-            <a:solidFill>
-              <a:srgbClr val="000000"/>
-            </a:solidFill>
-          </a:ln>
-          <a:effectLst/>
-        </p:spPr>
-        <p:style>
-          <a:lnRef idx="1">
-            <a:schemeClr val="accent1"/>
-          </a:lnRef>
-          <a:fillRef idx="3">
-            <a:schemeClr val="accent1"/>
-          </a:fillRef>
-          <a:effectRef idx="2">
-            <a:schemeClr val="accent1"/>
-          </a:effectRef>
-          <a:fontRef idx="minor">
-            <a:schemeClr val="lt1"/>
-          </a:fontRef>
-        </p:style>
-        <p:txBody>
-          <a:bodyPr rtlCol="0" anchor="ctr"/>
-          <a:lstStyle/>
-          <a:p/>
-        </p:txBody>
-      </p:sp>
-      <p:sp>
-        <p:nvSpPr>
-          <p:cNvPr id="33" name="Rectangle 32"/>
-          <p:cNvSpPr/>
-          <p:nvPr/>
-        </p:nvSpPr>
-        <p:spPr>
-          <a:xfrm>
-            <a:off x="1645919" y="4684776"/>
-            <a:ext cx="9921240" cy="579120"/>
-          </a:xfrm>
-          <a:prstGeom prst="rect">
-            <a:avLst/>
-          </a:prstGeom>
-          <a:solidFill>
-            <a:srgbClr val="FFFDF7"/>
-          </a:solidFill>
-          <a:ln w="34925">
-            <a:solidFill>
-              <a:srgbClr val="000000"/>
-            </a:solidFill>
-          </a:ln>
-          <a:effectLst/>
-        </p:spPr>
-        <p:style>
-          <a:lnRef idx="1">
-            <a:schemeClr val="accent1"/>
-          </a:lnRef>
-          <a:fillRef idx="3">
-            <a:schemeClr val="accent1"/>
-          </a:fillRef>
-          <a:effectRef idx="2">
-            <a:schemeClr val="accent1"/>
-          </a:effectRef>
-          <a:fontRef idx="minor">
-            <a:schemeClr val="lt1"/>
-          </a:fontRef>
-        </p:style>
-        <p:txBody>
-          <a:bodyPr rtlCol="0" anchor="ctr"/>
-          <a:lstStyle/>
-          <a:p/>
-        </p:txBody>
-      </p:sp>
-      <p:sp>
-        <p:nvSpPr>
-          <p:cNvPr id="34" name="TextBox 33"/>
-          <p:cNvSpPr txBox="1"/>
-          <p:nvPr/>
-        </p:nvSpPr>
-        <p:spPr>
-          <a:xfrm>
-            <a:off x="1920240" y="4776215"/>
-            <a:ext cx="9372600" cy="396239"/>
-          </a:xfrm>
-          <a:prstGeom prst="rect">
-            <a:avLst/>
-          </a:prstGeom>
-          <a:noFill/>
-        </p:spPr>
-        <p:txBody>
-          <a:bodyPr wrap="square" lIns="0" rIns="0" tIns="0" bIns="0" anchor="ctr">
-            <a:spAutoFit/>
-          </a:bodyPr>
-          <a:lstStyle/>
-          <a:p>
-            <a:pPr algn="l">
-              <a:lnSpc>
-                <a:spcPct val="125000"/>
-              </a:lnSpc>
-            </a:pPr>
-            <a:r>
-              <a:rPr sz="1200">
-                <a:solidFill>
-                  <a:srgbClr val="000000"/>
-                </a:solidFill>
-                <a:latin typeface="Calibri"/>
-              </a:rPr>
-              <a:t>Read the spatial operations in Di Mari and Yoo, Operative Design, and Di Mari, Conditional Design, and state which operation your sequence performs in their terms.</a:t>
-            </a:r>
-          </a:p>
-        </p:txBody>
-      </p:sp>
-      <p:sp>
-        <p:nvSpPr>
-          <p:cNvPr id="35" name="Rectangle 34"/>
-          <p:cNvSpPr/>
-          <p:nvPr/>
-        </p:nvSpPr>
-        <p:spPr>
-          <a:xfrm>
-            <a:off x="662940" y="5478780"/>
-            <a:ext cx="777240" cy="579120"/>
-          </a:xfrm>
-          <a:prstGeom prst="rect">
-            <a:avLst/>
-          </a:prstGeom>
-          <a:solidFill>
-            <a:srgbClr val="000000"/>
-          </a:solidFill>
-          <a:ln w="6350">
-            <a:solidFill>
-              <a:srgbClr val="000000"/>
-            </a:solidFill>
-          </a:ln>
-          <a:effectLst/>
-        </p:spPr>
-        <p:style>
-          <a:lnRef idx="1">
-            <a:schemeClr val="accent1"/>
-          </a:lnRef>
-          <a:fillRef idx="3">
-            <a:schemeClr val="accent1"/>
-          </a:fillRef>
-          <a:effectRef idx="2">
-            <a:schemeClr val="accent1"/>
-          </a:effectRef>
-          <a:fontRef idx="minor">
-            <a:schemeClr val="lt1"/>
-          </a:fontRef>
-        </p:style>
-        <p:txBody>
-          <a:bodyPr rtlCol="0" anchor="ctr"/>
-          <a:lstStyle/>
-          <a:p/>
-        </p:txBody>
-      </p:sp>
-      <p:sp>
-        <p:nvSpPr>
-          <p:cNvPr id="36" name="Rectangle 35"/>
-          <p:cNvSpPr/>
-          <p:nvPr/>
-        </p:nvSpPr>
-        <p:spPr>
-          <a:xfrm>
-            <a:off x="594360" y="5410199"/>
-            <a:ext cx="777240" cy="579120"/>
-          </a:xfrm>
-          <a:prstGeom prst="rect">
-            <a:avLst/>
-          </a:prstGeom>
-          <a:solidFill>
-            <a:srgbClr val="C6F035"/>
-          </a:solidFill>
-          <a:ln w="34925">
-            <a:solidFill>
-              <a:srgbClr val="000000"/>
-            </a:solidFill>
-          </a:ln>
-          <a:effectLst/>
-        </p:spPr>
-        <p:style>
-          <a:lnRef idx="1">
-            <a:schemeClr val="accent1"/>
-          </a:lnRef>
-          <a:fillRef idx="3">
-            <a:schemeClr val="accent1"/>
-          </a:fillRef>
-          <a:effectRef idx="2">
-            <a:schemeClr val="accent1"/>
-          </a:effectRef>
-          <a:fontRef idx="minor">
-            <a:schemeClr val="lt1"/>
-          </a:fontRef>
-        </p:style>
-        <p:txBody>
-          <a:bodyPr rtlCol="0" anchor="ctr"/>
-          <a:lstStyle/>
-          <a:p/>
-        </p:txBody>
-      </p:sp>
-      <p:sp>
-        <p:nvSpPr>
-          <p:cNvPr id="37" name="TextBox 36"/>
-          <p:cNvSpPr txBox="1"/>
-          <p:nvPr/>
-        </p:nvSpPr>
-        <p:spPr>
-          <a:xfrm>
-            <a:off x="594360" y="5599176"/>
-            <a:ext cx="777240" cy="274320"/>
-          </a:xfrm>
-          <a:prstGeom prst="rect">
-            <a:avLst/>
-          </a:prstGeom>
-          <a:noFill/>
-        </p:spPr>
-        <p:txBody>
-          <a:bodyPr wrap="square" lIns="0" rIns="0" tIns="0" bIns="0" anchor="t">
-            <a:spAutoFit/>
-          </a:bodyPr>
-          <a:lstStyle/>
-          <a:p>
-            <a:pPr algn="ctr"/>
-            <a:r>
-              <a:rPr sz="1500" b="1">
-                <a:solidFill>
-                  <a:srgbClr val="000000"/>
-                </a:solidFill>
-                <a:latin typeface="Arial"/>
-              </a:rPr>
-              <a:t>06</a:t>
-            </a:r>
-          </a:p>
-        </p:txBody>
-      </p:sp>
-      <p:sp>
-        <p:nvSpPr>
-          <p:cNvPr id="38" name="Rectangle 37"/>
-          <p:cNvSpPr/>
-          <p:nvPr/>
-        </p:nvSpPr>
-        <p:spPr>
-          <a:xfrm>
-            <a:off x="1714499" y="5478780"/>
-            <a:ext cx="9921240" cy="579120"/>
-          </a:xfrm>
-          <a:prstGeom prst="rect">
-            <a:avLst/>
-          </a:prstGeom>
-          <a:solidFill>
-            <a:srgbClr val="000000"/>
-          </a:solidFill>
-          <a:ln w="6350">
-            <a:solidFill>
-              <a:srgbClr val="000000"/>
-            </a:solidFill>
-          </a:ln>
-          <a:effectLst/>
-        </p:spPr>
-        <p:style>
-          <a:lnRef idx="1">
-            <a:schemeClr val="accent1"/>
-          </a:lnRef>
-          <a:fillRef idx="3">
-            <a:schemeClr val="accent1"/>
-          </a:fillRef>
-          <a:effectRef idx="2">
-            <a:schemeClr val="accent1"/>
-          </a:effectRef>
-          <a:fontRef idx="minor">
-            <a:schemeClr val="lt1"/>
-          </a:fontRef>
-        </p:style>
-        <p:txBody>
-          <a:bodyPr rtlCol="0" anchor="ctr"/>
-          <a:lstStyle/>
-          <a:p/>
-        </p:txBody>
-      </p:sp>
-      <p:sp>
-        <p:nvSpPr>
-          <p:cNvPr id="39" name="Rectangle 38"/>
-          <p:cNvSpPr/>
-          <p:nvPr/>
-        </p:nvSpPr>
-        <p:spPr>
-          <a:xfrm>
-            <a:off x="1645919" y="5410199"/>
-            <a:ext cx="9921240" cy="579120"/>
-          </a:xfrm>
-          <a:prstGeom prst="rect">
-            <a:avLst/>
-          </a:prstGeom>
-          <a:solidFill>
-            <a:srgbClr val="FFFDF7"/>
-          </a:solidFill>
-          <a:ln w="34925">
-            <a:solidFill>
-              <a:srgbClr val="000000"/>
-            </a:solidFill>
-          </a:ln>
-          <a:effectLst/>
-        </p:spPr>
-        <p:style>
-          <a:lnRef idx="1">
-            <a:schemeClr val="accent1"/>
-          </a:lnRef>
-          <a:fillRef idx="3">
-            <a:schemeClr val="accent1"/>
-          </a:fillRef>
-          <a:effectRef idx="2">
-            <a:schemeClr val="accent1"/>
-          </a:effectRef>
-          <a:fontRef idx="minor">
-            <a:schemeClr val="lt1"/>
-          </a:fontRef>
-        </p:style>
-        <p:txBody>
-          <a:bodyPr rtlCol="0" anchor="ctr"/>
-          <a:lstStyle/>
-          <a:p/>
-        </p:txBody>
-      </p:sp>
-      <p:sp>
-        <p:nvSpPr>
-          <p:cNvPr id="40" name="TextBox 39"/>
-          <p:cNvSpPr txBox="1"/>
-          <p:nvPr/>
-        </p:nvSpPr>
-        <p:spPr>
-          <a:xfrm>
-            <a:off x="1920240" y="5501639"/>
-            <a:ext cx="9372600" cy="396239"/>
-          </a:xfrm>
-          <a:prstGeom prst="rect">
-            <a:avLst/>
-          </a:prstGeom>
-          <a:noFill/>
-        </p:spPr>
-        <p:txBody>
-          <a:bodyPr wrap="square" lIns="0" rIns="0" tIns="0" bIns="0" anchor="ctr">
-            <a:spAutoFit/>
-          </a:bodyPr>
-          <a:lstStyle/>
-          <a:p>
-            <a:pPr algn="l">
-              <a:lnSpc>
-                <a:spcPct val="125000"/>
-              </a:lnSpc>
-            </a:pPr>
-            <a:r>
-              <a:rPr sz="1200">
-                <a:solidFill>
-                  <a:srgbClr val="000000"/>
-                </a:solidFill>
-                <a:latin typeface="Calibri"/>
-              </a:rPr>
-              <a:t>Submit an editable graph with exposed inputs and geometry generated in the graph. Keep the source operations intact.</a:t>
+              <a:t>At building scale: a 1.75 m figure, vegetation, ground, shadow.</a:t>
             </a:r>
           </a:p>
         </p:txBody>
